--- a/trunk/academia/trabalhos/UbiPerson.pptx
+++ b/trunk/academia/trabalhos/UbiPerson.pptx
@@ -11,16 +11,17 @@
     <p:sldId id="259" r:id="rId5"/>
     <p:sldId id="260" r:id="rId6"/>
     <p:sldId id="261" r:id="rId7"/>
-    <p:sldId id="262" r:id="rId8"/>
-    <p:sldId id="263" r:id="rId9"/>
-    <p:sldId id="264" r:id="rId10"/>
-    <p:sldId id="265" r:id="rId11"/>
-    <p:sldId id="266" r:id="rId12"/>
-    <p:sldId id="267" r:id="rId13"/>
-    <p:sldId id="268" r:id="rId14"/>
-    <p:sldId id="269" r:id="rId15"/>
-    <p:sldId id="270" r:id="rId16"/>
-    <p:sldId id="271" r:id="rId17"/>
+    <p:sldId id="272" r:id="rId8"/>
+    <p:sldId id="262" r:id="rId9"/>
+    <p:sldId id="263" r:id="rId10"/>
+    <p:sldId id="264" r:id="rId11"/>
+    <p:sldId id="265" r:id="rId12"/>
+    <p:sldId id="266" r:id="rId13"/>
+    <p:sldId id="267" r:id="rId14"/>
+    <p:sldId id="268" r:id="rId15"/>
+    <p:sldId id="269" r:id="rId16"/>
+    <p:sldId id="270" r:id="rId17"/>
+    <p:sldId id="271" r:id="rId18"/>
   </p:sldIdLst>
   <p:sldSz cx="9144000" cy="6858000" type="screen4x3"/>
   <p:notesSz cx="6858000" cy="9144000"/>
@@ -303,7 +304,8 @@
           <a:p>
             <a:fld id="{D7F2887D-3FE0-41A6-AE39-21C16B90780E}" type="datetimeFigureOut">
               <a:rPr lang="pt-BR" smtClean="0"/>
-              <a:t>09/06/2011</a:t>
+              <a:pPr/>
+              <a:t>9/6/2011</a:t>
             </a:fld>
             <a:endParaRPr lang="pt-BR"/>
           </a:p>
@@ -345,6 +347,7 @@
           <a:p>
             <a:fld id="{EEF294A6-254F-469B-AD55-0A6661443653}" type="slidenum">
               <a:rPr lang="pt-BR" smtClean="0"/>
+              <a:pPr/>
               <a:t>‹#›</a:t>
             </a:fld>
             <a:endParaRPr lang="pt-BR"/>
@@ -468,7 +471,8 @@
           <a:p>
             <a:fld id="{D7F2887D-3FE0-41A6-AE39-21C16B90780E}" type="datetimeFigureOut">
               <a:rPr lang="pt-BR" smtClean="0"/>
-              <a:t>09/06/2011</a:t>
+              <a:pPr/>
+              <a:t>9/6/2011</a:t>
             </a:fld>
             <a:endParaRPr lang="pt-BR"/>
           </a:p>
@@ -510,6 +514,7 @@
           <a:p>
             <a:fld id="{EEF294A6-254F-469B-AD55-0A6661443653}" type="slidenum">
               <a:rPr lang="pt-BR" smtClean="0"/>
+              <a:pPr/>
               <a:t>‹#›</a:t>
             </a:fld>
             <a:endParaRPr lang="pt-BR"/>
@@ -643,7 +648,8 @@
           <a:p>
             <a:fld id="{D7F2887D-3FE0-41A6-AE39-21C16B90780E}" type="datetimeFigureOut">
               <a:rPr lang="pt-BR" smtClean="0"/>
-              <a:t>09/06/2011</a:t>
+              <a:pPr/>
+              <a:t>9/6/2011</a:t>
             </a:fld>
             <a:endParaRPr lang="pt-BR"/>
           </a:p>
@@ -685,6 +691,7 @@
           <a:p>
             <a:fld id="{EEF294A6-254F-469B-AD55-0A6661443653}" type="slidenum">
               <a:rPr lang="pt-BR" smtClean="0"/>
+              <a:pPr/>
               <a:t>‹#›</a:t>
             </a:fld>
             <a:endParaRPr lang="pt-BR"/>
@@ -808,7 +815,8 @@
           <a:p>
             <a:fld id="{D7F2887D-3FE0-41A6-AE39-21C16B90780E}" type="datetimeFigureOut">
               <a:rPr lang="pt-BR" smtClean="0"/>
-              <a:t>09/06/2011</a:t>
+              <a:pPr/>
+              <a:t>9/6/2011</a:t>
             </a:fld>
             <a:endParaRPr lang="pt-BR"/>
           </a:p>
@@ -850,6 +858,7 @@
           <a:p>
             <a:fld id="{EEF294A6-254F-469B-AD55-0A6661443653}" type="slidenum">
               <a:rPr lang="pt-BR" smtClean="0"/>
+              <a:pPr/>
               <a:t>‹#›</a:t>
             </a:fld>
             <a:endParaRPr lang="pt-BR"/>
@@ -1049,7 +1058,8 @@
           <a:p>
             <a:fld id="{D7F2887D-3FE0-41A6-AE39-21C16B90780E}" type="datetimeFigureOut">
               <a:rPr lang="pt-BR" smtClean="0"/>
-              <a:t>09/06/2011</a:t>
+              <a:pPr/>
+              <a:t>9/6/2011</a:t>
             </a:fld>
             <a:endParaRPr lang="pt-BR"/>
           </a:p>
@@ -1091,6 +1101,7 @@
           <a:p>
             <a:fld id="{EEF294A6-254F-469B-AD55-0A6661443653}" type="slidenum">
               <a:rPr lang="pt-BR" smtClean="0"/>
+              <a:pPr/>
               <a:t>‹#›</a:t>
             </a:fld>
             <a:endParaRPr lang="pt-BR"/>
@@ -1332,7 +1343,8 @@
           <a:p>
             <a:fld id="{D7F2887D-3FE0-41A6-AE39-21C16B90780E}" type="datetimeFigureOut">
               <a:rPr lang="pt-BR" smtClean="0"/>
-              <a:t>09/06/2011</a:t>
+              <a:pPr/>
+              <a:t>9/6/2011</a:t>
             </a:fld>
             <a:endParaRPr lang="pt-BR"/>
           </a:p>
@@ -1374,6 +1386,7 @@
           <a:p>
             <a:fld id="{EEF294A6-254F-469B-AD55-0A6661443653}" type="slidenum">
               <a:rPr lang="pt-BR" smtClean="0"/>
+              <a:pPr/>
               <a:t>‹#›</a:t>
             </a:fld>
             <a:endParaRPr lang="pt-BR"/>
@@ -1749,7 +1762,8 @@
           <a:p>
             <a:fld id="{D7F2887D-3FE0-41A6-AE39-21C16B90780E}" type="datetimeFigureOut">
               <a:rPr lang="pt-BR" smtClean="0"/>
-              <a:t>09/06/2011</a:t>
+              <a:pPr/>
+              <a:t>9/6/2011</a:t>
             </a:fld>
             <a:endParaRPr lang="pt-BR"/>
           </a:p>
@@ -1791,6 +1805,7 @@
           <a:p>
             <a:fld id="{EEF294A6-254F-469B-AD55-0A6661443653}" type="slidenum">
               <a:rPr lang="pt-BR" smtClean="0"/>
+              <a:pPr/>
               <a:t>‹#›</a:t>
             </a:fld>
             <a:endParaRPr lang="pt-BR"/>
@@ -1862,7 +1877,8 @@
           <a:p>
             <a:fld id="{D7F2887D-3FE0-41A6-AE39-21C16B90780E}" type="datetimeFigureOut">
               <a:rPr lang="pt-BR" smtClean="0"/>
-              <a:t>09/06/2011</a:t>
+              <a:pPr/>
+              <a:t>9/6/2011</a:t>
             </a:fld>
             <a:endParaRPr lang="pt-BR"/>
           </a:p>
@@ -1904,6 +1920,7 @@
           <a:p>
             <a:fld id="{EEF294A6-254F-469B-AD55-0A6661443653}" type="slidenum">
               <a:rPr lang="pt-BR" smtClean="0"/>
+              <a:pPr/>
               <a:t>‹#›</a:t>
             </a:fld>
             <a:endParaRPr lang="pt-BR"/>
@@ -1952,7 +1969,8 @@
           <a:p>
             <a:fld id="{D7F2887D-3FE0-41A6-AE39-21C16B90780E}" type="datetimeFigureOut">
               <a:rPr lang="pt-BR" smtClean="0"/>
-              <a:t>09/06/2011</a:t>
+              <a:pPr/>
+              <a:t>9/6/2011</a:t>
             </a:fld>
             <a:endParaRPr lang="pt-BR"/>
           </a:p>
@@ -1994,6 +2012,7 @@
           <a:p>
             <a:fld id="{EEF294A6-254F-469B-AD55-0A6661443653}" type="slidenum">
               <a:rPr lang="pt-BR" smtClean="0"/>
+              <a:pPr/>
               <a:t>‹#›</a:t>
             </a:fld>
             <a:endParaRPr lang="pt-BR"/>
@@ -2224,7 +2243,8 @@
           <a:p>
             <a:fld id="{D7F2887D-3FE0-41A6-AE39-21C16B90780E}" type="datetimeFigureOut">
               <a:rPr lang="pt-BR" smtClean="0"/>
-              <a:t>09/06/2011</a:t>
+              <a:pPr/>
+              <a:t>9/6/2011</a:t>
             </a:fld>
             <a:endParaRPr lang="pt-BR"/>
           </a:p>
@@ -2266,6 +2286,7 @@
           <a:p>
             <a:fld id="{EEF294A6-254F-469B-AD55-0A6661443653}" type="slidenum">
               <a:rPr lang="pt-BR" smtClean="0"/>
+              <a:pPr/>
               <a:t>‹#›</a:t>
             </a:fld>
             <a:endParaRPr lang="pt-BR"/>
@@ -2472,7 +2493,8 @@
           <a:p>
             <a:fld id="{D7F2887D-3FE0-41A6-AE39-21C16B90780E}" type="datetimeFigureOut">
               <a:rPr lang="pt-BR" smtClean="0"/>
-              <a:t>09/06/2011</a:t>
+              <a:pPr/>
+              <a:t>9/6/2011</a:t>
             </a:fld>
             <a:endParaRPr lang="pt-BR"/>
           </a:p>
@@ -2514,6 +2536,7 @@
           <a:p>
             <a:fld id="{EEF294A6-254F-469B-AD55-0A6661443653}" type="slidenum">
               <a:rPr lang="pt-BR" smtClean="0"/>
+              <a:pPr/>
               <a:t>‹#›</a:t>
             </a:fld>
             <a:endParaRPr lang="pt-BR"/>
@@ -2680,7 +2703,8 @@
           <a:p>
             <a:fld id="{D7F2887D-3FE0-41A6-AE39-21C16B90780E}" type="datetimeFigureOut">
               <a:rPr lang="pt-BR" smtClean="0"/>
-              <a:t>09/06/2011</a:t>
+              <a:pPr/>
+              <a:t>9/6/2011</a:t>
             </a:fld>
             <a:endParaRPr lang="pt-BR"/>
           </a:p>
@@ -2758,6 +2782,7 @@
           <a:p>
             <a:fld id="{EEF294A6-254F-469B-AD55-0A6661443653}" type="slidenum">
               <a:rPr lang="pt-BR" smtClean="0"/>
+              <a:pPr/>
               <a:t>‹#›</a:t>
             </a:fld>
             <a:endParaRPr lang="pt-BR"/>
@@ -3119,6 +3144,13 @@
   <p:clrMapOvr>
     <a:masterClrMapping/>
   </p:clrMapOvr>
+  <p:timing>
+    <p:tnLst>
+      <p:par>
+        <p:cTn id="1" dur="indefinite" restart="never" nodeType="tmRoot"/>
+      </p:par>
+    </p:tnLst>
+  </p:timing>
 </p:sld>
 </file>
 
@@ -3156,7 +3188,7 @@
           <a:p>
             <a:r>
               <a:rPr lang="pt-BR" dirty="0" err="1" smtClean="0"/>
-              <a:t>UPInferenceCache</a:t>
+              <a:t>UPServices</a:t>
             </a:r>
             <a:endParaRPr lang="pt-BR" dirty="0"/>
           </a:p>
@@ -3174,56 +3206,28 @@
         </p:nvSpPr>
         <p:spPr/>
         <p:txBody>
-          <a:bodyPr>
-            <a:normAutofit lnSpcReduction="10000"/>
-          </a:bodyPr>
+          <a:bodyPr/>
           <a:lstStyle/>
           <a:p>
             <a:r>
               <a:rPr lang="pt-BR" dirty="0" smtClean="0"/>
-              <a:t>Funciona</a:t>
+              <a:t>Acessa BD de trilhas</a:t>
+            </a:r>
+          </a:p>
+          <a:p>
+            <a:r>
+              <a:rPr lang="pt-BR" dirty="0" smtClean="0"/>
+              <a:t>Processa requisições de registro e solicitações de trilhas</a:t>
+            </a:r>
+          </a:p>
+          <a:p>
+            <a:r>
+              <a:rPr lang="pt-BR" dirty="0" smtClean="0"/>
+              <a:t>Armazena os</a:t>
             </a:r>
             <a:r>
               <a:rPr lang="pt-BR" baseline="0" dirty="0" smtClean="0"/>
-              <a:t> como </a:t>
-            </a:r>
-            <a:r>
-              <a:rPr lang="pt-BR" baseline="0" dirty="0" err="1" smtClean="0"/>
-              <a:t>cache</a:t>
-            </a:r>
-            <a:r>
-              <a:rPr lang="pt-BR" baseline="0" dirty="0" smtClean="0"/>
-              <a:t> para dados inferidos</a:t>
-            </a:r>
-          </a:p>
-          <a:p>
-            <a:r>
-              <a:rPr lang="pt-BR" baseline="0" dirty="0" smtClean="0"/>
-              <a:t>Se a informação estiver no </a:t>
-            </a:r>
-            <a:r>
-              <a:rPr lang="pt-BR" baseline="0" dirty="0" err="1" smtClean="0"/>
-              <a:t>cache</a:t>
-            </a:r>
-            <a:r>
-              <a:rPr lang="pt-BR" baseline="0" dirty="0" smtClean="0"/>
-              <a:t> e não estiver vencida,</a:t>
-            </a:r>
-            <a:r>
-              <a:rPr lang="pt-BR" dirty="0" smtClean="0"/>
-              <a:t> retorna a informação</a:t>
-            </a:r>
-          </a:p>
-          <a:p>
-            <a:r>
-              <a:rPr lang="pt-BR" dirty="0" smtClean="0"/>
-              <a:t>Caso contrário, repassa a requisição</a:t>
-            </a:r>
-          </a:p>
-          <a:p>
-            <a:r>
-              <a:rPr lang="pt-BR" dirty="0" smtClean="0"/>
-              <a:t>Módulo não implementado</a:t>
+              <a:t> dados</a:t>
             </a:r>
             <a:endParaRPr lang="pt-BR" dirty="0"/>
           </a:p>
@@ -3231,30 +3235,847 @@
       </p:sp>
       <p:sp>
         <p:nvSpPr>
-          <p:cNvPr id="5" name="Content Placeholder 4"/>
-          <p:cNvSpPr>
-            <a:spLocks noGrp="1"/>
-          </p:cNvSpPr>
-          <p:nvPr>
-            <p:ph sz="half" idx="2"/>
-          </p:nvPr>
-        </p:nvSpPr>
-        <p:spPr/>
-        <p:txBody>
-          <a:bodyPr>
-            <a:normAutofit lnSpcReduction="10000"/>
-          </a:bodyPr>
-          <a:lstStyle/>
-          <a:p>
-            <a:endParaRPr lang="pt-BR"/>
-          </a:p>
-        </p:txBody>
-      </p:sp>
+          <p:cNvPr id="6" name="Rectangle 5"/>
+          <p:cNvSpPr/>
+          <p:nvPr/>
+        </p:nvSpPr>
+        <p:spPr>
+          <a:xfrm>
+            <a:off x="6329374" y="1785926"/>
+            <a:ext cx="1457335" cy="714380"/>
+          </a:xfrm>
+          <a:prstGeom prst="rect">
+            <a:avLst/>
+          </a:prstGeom>
+        </p:spPr>
+        <p:style>
+          <a:lnRef idx="2">
+            <a:schemeClr val="accent1"/>
+          </a:lnRef>
+          <a:fillRef idx="1">
+            <a:schemeClr val="lt1"/>
+          </a:fillRef>
+          <a:effectRef idx="0">
+            <a:schemeClr val="accent1"/>
+          </a:effectRef>
+          <a:fontRef idx="minor">
+            <a:schemeClr val="dk1"/>
+          </a:fontRef>
+        </p:style>
+        <p:txBody>
+          <a:bodyPr rtlCol="0" anchor="ctr"/>
+          <a:lstStyle/>
+          <a:p>
+            <a:pPr algn="ctr"/>
+            <a:r>
+              <a:rPr lang="pt-BR" sz="1200" b="1" dirty="0" smtClean="0"/>
+              <a:t>UPCommunication</a:t>
+            </a:r>
+            <a:endParaRPr lang="pt-BR" sz="1200" b="1" dirty="0"/>
+          </a:p>
+        </p:txBody>
+      </p:sp>
+      <p:sp>
+        <p:nvSpPr>
+          <p:cNvPr id="7" name="Rectangle 6"/>
+          <p:cNvSpPr/>
+          <p:nvPr/>
+        </p:nvSpPr>
+        <p:spPr>
+          <a:xfrm>
+            <a:off x="6329374" y="2714620"/>
+            <a:ext cx="1457335" cy="714380"/>
+          </a:xfrm>
+          <a:prstGeom prst="rect">
+            <a:avLst/>
+          </a:prstGeom>
+        </p:spPr>
+        <p:style>
+          <a:lnRef idx="2">
+            <a:schemeClr val="accent1"/>
+          </a:lnRef>
+          <a:fillRef idx="1">
+            <a:schemeClr val="lt1"/>
+          </a:fillRef>
+          <a:effectRef idx="0">
+            <a:schemeClr val="accent1"/>
+          </a:effectRef>
+          <a:fontRef idx="minor">
+            <a:schemeClr val="dk1"/>
+          </a:fontRef>
+        </p:style>
+        <p:txBody>
+          <a:bodyPr rtlCol="0" anchor="ctr"/>
+          <a:lstStyle/>
+          <a:p>
+            <a:pPr algn="ctr"/>
+            <a:r>
+              <a:rPr lang="pt-BR" sz="1200" b="1" dirty="0" smtClean="0"/>
+              <a:t>UPAuthentication</a:t>
+            </a:r>
+            <a:endParaRPr lang="pt-BR" sz="1200" b="1" dirty="0"/>
+          </a:p>
+        </p:txBody>
+      </p:sp>
+      <p:sp>
+        <p:nvSpPr>
+          <p:cNvPr id="8" name="Rectangle 7"/>
+          <p:cNvSpPr/>
+          <p:nvPr/>
+        </p:nvSpPr>
+        <p:spPr>
+          <a:xfrm>
+            <a:off x="6329374" y="3643314"/>
+            <a:ext cx="1457335" cy="714380"/>
+          </a:xfrm>
+          <a:prstGeom prst="rect">
+            <a:avLst/>
+          </a:prstGeom>
+        </p:spPr>
+        <p:style>
+          <a:lnRef idx="2">
+            <a:schemeClr val="accent1">
+              <a:shade val="50000"/>
+            </a:schemeClr>
+          </a:lnRef>
+          <a:fillRef idx="1">
+            <a:schemeClr val="accent1"/>
+          </a:fillRef>
+          <a:effectRef idx="0">
+            <a:schemeClr val="accent1"/>
+          </a:effectRef>
+          <a:fontRef idx="minor">
+            <a:schemeClr val="lt1"/>
+          </a:fontRef>
+        </p:style>
+        <p:txBody>
+          <a:bodyPr rtlCol="0" anchor="ctr"/>
+          <a:lstStyle/>
+          <a:p>
+            <a:pPr algn="ctr"/>
+            <a:r>
+              <a:rPr lang="pt-BR" sz="1200" b="1" dirty="0" smtClean="0"/>
+              <a:t>UPServices</a:t>
+            </a:r>
+            <a:endParaRPr lang="pt-BR" sz="1200" b="1" dirty="0"/>
+          </a:p>
+        </p:txBody>
+      </p:sp>
+      <p:sp>
+        <p:nvSpPr>
+          <p:cNvPr id="9" name="Rectangle 8"/>
+          <p:cNvSpPr/>
+          <p:nvPr/>
+        </p:nvSpPr>
+        <p:spPr>
+          <a:xfrm>
+            <a:off x="6329374" y="4572008"/>
+            <a:ext cx="1457335" cy="714380"/>
+          </a:xfrm>
+          <a:prstGeom prst="rect">
+            <a:avLst/>
+          </a:prstGeom>
+        </p:spPr>
+        <p:style>
+          <a:lnRef idx="2">
+            <a:schemeClr val="accent1"/>
+          </a:lnRef>
+          <a:fillRef idx="1">
+            <a:schemeClr val="lt1"/>
+          </a:fillRef>
+          <a:effectRef idx="0">
+            <a:schemeClr val="accent1"/>
+          </a:effectRef>
+          <a:fontRef idx="minor">
+            <a:schemeClr val="dk1"/>
+          </a:fontRef>
+        </p:style>
+        <p:txBody>
+          <a:bodyPr rtlCol="0" anchor="ctr"/>
+          <a:lstStyle/>
+          <a:p>
+            <a:pPr algn="ctr"/>
+            <a:r>
+              <a:rPr lang="pt-BR" sz="1200" b="1" dirty="0" smtClean="0"/>
+              <a:t>UPInferenceCache</a:t>
+            </a:r>
+            <a:endParaRPr lang="pt-BR" sz="1200" b="1" dirty="0"/>
+          </a:p>
+        </p:txBody>
+      </p:sp>
+      <p:sp>
+        <p:nvSpPr>
+          <p:cNvPr id="10" name="Rectangle 9"/>
+          <p:cNvSpPr/>
+          <p:nvPr/>
+        </p:nvSpPr>
+        <p:spPr>
+          <a:xfrm>
+            <a:off x="6329374" y="5500702"/>
+            <a:ext cx="1457335" cy="714380"/>
+          </a:xfrm>
+          <a:prstGeom prst="rect">
+            <a:avLst/>
+          </a:prstGeom>
+        </p:spPr>
+        <p:style>
+          <a:lnRef idx="2">
+            <a:schemeClr val="accent1"/>
+          </a:lnRef>
+          <a:fillRef idx="1">
+            <a:schemeClr val="lt1"/>
+          </a:fillRef>
+          <a:effectRef idx="0">
+            <a:schemeClr val="accent1"/>
+          </a:effectRef>
+          <a:fontRef idx="minor">
+            <a:schemeClr val="dk1"/>
+          </a:fontRef>
+        </p:style>
+        <p:txBody>
+          <a:bodyPr rtlCol="0" anchor="ctr"/>
+          <a:lstStyle/>
+          <a:p>
+            <a:pPr algn="ctr"/>
+            <a:r>
+              <a:rPr lang="pt-BR" sz="1200" b="1" dirty="0" smtClean="0"/>
+              <a:t>UPInferenceEngine</a:t>
+            </a:r>
+            <a:endParaRPr lang="pt-BR" sz="1200" b="1" dirty="0"/>
+          </a:p>
+        </p:txBody>
+      </p:sp>
+      <p:sp>
+        <p:nvSpPr>
+          <p:cNvPr id="11" name="Cloud 10"/>
+          <p:cNvSpPr/>
+          <p:nvPr/>
+        </p:nvSpPr>
+        <p:spPr>
+          <a:xfrm>
+            <a:off x="4572000" y="1714488"/>
+            <a:ext cx="1143008" cy="928694"/>
+          </a:xfrm>
+          <a:prstGeom prst="cloud">
+            <a:avLst/>
+          </a:prstGeom>
+        </p:spPr>
+        <p:style>
+          <a:lnRef idx="2">
+            <a:schemeClr val="accent1"/>
+          </a:lnRef>
+          <a:fillRef idx="1">
+            <a:schemeClr val="lt1"/>
+          </a:fillRef>
+          <a:effectRef idx="0">
+            <a:schemeClr val="accent1"/>
+          </a:effectRef>
+          <a:fontRef idx="minor">
+            <a:schemeClr val="dk1"/>
+          </a:fontRef>
+        </p:style>
+        <p:txBody>
+          <a:bodyPr rtlCol="0" anchor="ctr"/>
+          <a:lstStyle/>
+          <a:p>
+            <a:pPr algn="ctr"/>
+            <a:r>
+              <a:rPr lang="pt-BR" sz="1200" b="1" dirty="0" smtClean="0"/>
+              <a:t>Internet</a:t>
+            </a:r>
+            <a:endParaRPr lang="pt-BR" sz="1200" b="1" dirty="0"/>
+          </a:p>
+        </p:txBody>
+      </p:sp>
+      <p:sp>
+        <p:nvSpPr>
+          <p:cNvPr id="12" name="Flowchart: Magnetic Disk 11"/>
+          <p:cNvSpPr/>
+          <p:nvPr/>
+        </p:nvSpPr>
+        <p:spPr>
+          <a:xfrm>
+            <a:off x="4857752" y="4857760"/>
+            <a:ext cx="871544" cy="857256"/>
+          </a:xfrm>
+          <a:prstGeom prst="flowChartMagneticDisk">
+            <a:avLst/>
+          </a:prstGeom>
+        </p:spPr>
+        <p:style>
+          <a:lnRef idx="2">
+            <a:schemeClr val="accent1"/>
+          </a:lnRef>
+          <a:fillRef idx="1">
+            <a:schemeClr val="lt1"/>
+          </a:fillRef>
+          <a:effectRef idx="0">
+            <a:schemeClr val="accent1"/>
+          </a:effectRef>
+          <a:fontRef idx="minor">
+            <a:schemeClr val="dk1"/>
+          </a:fontRef>
+        </p:style>
+        <p:txBody>
+          <a:bodyPr rtlCol="0" anchor="ctr"/>
+          <a:lstStyle/>
+          <a:p>
+            <a:pPr algn="ctr"/>
+            <a:r>
+              <a:rPr lang="pt-BR" sz="1200" b="1" dirty="0" smtClean="0"/>
+              <a:t>CacheDB</a:t>
+            </a:r>
+            <a:endParaRPr lang="pt-BR" sz="1200" b="1" dirty="0"/>
+          </a:p>
+        </p:txBody>
+      </p:sp>
+      <p:sp>
+        <p:nvSpPr>
+          <p:cNvPr id="13" name="Flowchart: Magnetic Disk 12"/>
+          <p:cNvSpPr/>
+          <p:nvPr/>
+        </p:nvSpPr>
+        <p:spPr>
+          <a:xfrm>
+            <a:off x="8215338" y="4429132"/>
+            <a:ext cx="728668" cy="857256"/>
+          </a:xfrm>
+          <a:prstGeom prst="flowChartMagneticDisk">
+            <a:avLst/>
+          </a:prstGeom>
+        </p:spPr>
+        <p:style>
+          <a:lnRef idx="2">
+            <a:schemeClr val="accent1">
+              <a:shade val="50000"/>
+            </a:schemeClr>
+          </a:lnRef>
+          <a:fillRef idx="1">
+            <a:schemeClr val="accent1"/>
+          </a:fillRef>
+          <a:effectRef idx="0">
+            <a:schemeClr val="accent1"/>
+          </a:effectRef>
+          <a:fontRef idx="minor">
+            <a:schemeClr val="lt1"/>
+          </a:fontRef>
+        </p:style>
+        <p:txBody>
+          <a:bodyPr rtlCol="0" anchor="ctr"/>
+          <a:lstStyle/>
+          <a:p>
+            <a:pPr algn="ctr"/>
+            <a:r>
+              <a:rPr lang="pt-BR" sz="1200" b="1" dirty="0" smtClean="0"/>
+              <a:t>TrailsDB</a:t>
+            </a:r>
+            <a:endParaRPr lang="pt-BR" sz="1200" b="1" dirty="0"/>
+          </a:p>
+        </p:txBody>
+      </p:sp>
+      <p:sp>
+        <p:nvSpPr>
+          <p:cNvPr id="14" name="Flowchart: Magnetic Disk 13"/>
+          <p:cNvSpPr/>
+          <p:nvPr/>
+        </p:nvSpPr>
+        <p:spPr>
+          <a:xfrm>
+            <a:off x="8143900" y="2643182"/>
+            <a:ext cx="728668" cy="857256"/>
+          </a:xfrm>
+          <a:prstGeom prst="flowChartMagneticDisk">
+            <a:avLst/>
+          </a:prstGeom>
+        </p:spPr>
+        <p:style>
+          <a:lnRef idx="2">
+            <a:schemeClr val="accent1"/>
+          </a:lnRef>
+          <a:fillRef idx="1">
+            <a:schemeClr val="lt1"/>
+          </a:fillRef>
+          <a:effectRef idx="0">
+            <a:schemeClr val="accent1"/>
+          </a:effectRef>
+          <a:fontRef idx="minor">
+            <a:schemeClr val="dk1"/>
+          </a:fontRef>
+        </p:style>
+        <p:txBody>
+          <a:bodyPr rtlCol="0" anchor="ctr"/>
+          <a:lstStyle/>
+          <a:p>
+            <a:pPr algn="ctr"/>
+            <a:r>
+              <a:rPr lang="pt-BR" sz="1200" b="1" dirty="0" smtClean="0"/>
+              <a:t>UserDB</a:t>
+            </a:r>
+            <a:endParaRPr lang="pt-BR" sz="1200" b="1" dirty="0"/>
+          </a:p>
+        </p:txBody>
+      </p:sp>
+      <p:sp>
+        <p:nvSpPr>
+          <p:cNvPr id="15" name="Rectangle 14"/>
+          <p:cNvSpPr/>
+          <p:nvPr/>
+        </p:nvSpPr>
+        <p:spPr>
+          <a:xfrm>
+            <a:off x="4429124" y="3643314"/>
+            <a:ext cx="1500198" cy="714380"/>
+          </a:xfrm>
+          <a:prstGeom prst="rect">
+            <a:avLst/>
+          </a:prstGeom>
+        </p:spPr>
+        <p:style>
+          <a:lnRef idx="2">
+            <a:schemeClr val="accent1"/>
+          </a:lnRef>
+          <a:fillRef idx="1">
+            <a:schemeClr val="lt1"/>
+          </a:fillRef>
+          <a:effectRef idx="0">
+            <a:schemeClr val="accent1"/>
+          </a:effectRef>
+          <a:fontRef idx="minor">
+            <a:schemeClr val="dk1"/>
+          </a:fontRef>
+        </p:style>
+        <p:txBody>
+          <a:bodyPr rtlCol="0" anchor="ctr"/>
+          <a:lstStyle/>
+          <a:p>
+            <a:pPr algn="ctr"/>
+            <a:r>
+              <a:rPr lang="pt-BR" sz="1200" b="1" dirty="0" smtClean="0"/>
+              <a:t>UPRemoteExecution</a:t>
+            </a:r>
+            <a:endParaRPr lang="pt-BR" sz="1200" b="1" dirty="0"/>
+          </a:p>
+        </p:txBody>
+      </p:sp>
+      <p:cxnSp>
+        <p:nvCxnSpPr>
+          <p:cNvPr id="16" name="Straight Arrow Connector 15"/>
+          <p:cNvCxnSpPr>
+            <a:stCxn id="11" idx="0"/>
+            <a:endCxn id="6" idx="1"/>
+          </p:cNvCxnSpPr>
+          <p:nvPr/>
+        </p:nvCxnSpPr>
+        <p:spPr>
+          <a:xfrm flipV="1">
+            <a:off x="5714055" y="2143116"/>
+            <a:ext cx="615319" cy="35719"/>
+          </a:xfrm>
+          <a:prstGeom prst="straightConnector1">
+            <a:avLst/>
+          </a:prstGeom>
+          <a:ln>
+            <a:headEnd type="arrow"/>
+            <a:tailEnd type="arrow"/>
+          </a:ln>
+        </p:spPr>
+        <p:style>
+          <a:lnRef idx="2">
+            <a:schemeClr val="accent1"/>
+          </a:lnRef>
+          <a:fillRef idx="1">
+            <a:schemeClr val="lt1"/>
+          </a:fillRef>
+          <a:effectRef idx="0">
+            <a:schemeClr val="accent1"/>
+          </a:effectRef>
+          <a:fontRef idx="minor">
+            <a:schemeClr val="dk1"/>
+          </a:fontRef>
+        </p:style>
+      </p:cxnSp>
+      <p:cxnSp>
+        <p:nvCxnSpPr>
+          <p:cNvPr id="17" name="Straight Arrow Connector 16"/>
+          <p:cNvCxnSpPr>
+            <a:stCxn id="15" idx="0"/>
+            <a:endCxn id="11" idx="1"/>
+          </p:cNvCxnSpPr>
+          <p:nvPr/>
+        </p:nvCxnSpPr>
+        <p:spPr>
+          <a:xfrm rot="16200000" flipV="1">
+            <a:off x="4660804" y="3124894"/>
+            <a:ext cx="1001121" cy="35719"/>
+          </a:xfrm>
+          <a:prstGeom prst="straightConnector1">
+            <a:avLst/>
+          </a:prstGeom>
+          <a:ln>
+            <a:headEnd type="arrow"/>
+            <a:tailEnd type="arrow"/>
+          </a:ln>
+        </p:spPr>
+        <p:style>
+          <a:lnRef idx="2">
+            <a:schemeClr val="accent1"/>
+          </a:lnRef>
+          <a:fillRef idx="1">
+            <a:schemeClr val="lt1"/>
+          </a:fillRef>
+          <a:effectRef idx="0">
+            <a:schemeClr val="accent1"/>
+          </a:effectRef>
+          <a:fontRef idx="minor">
+            <a:schemeClr val="dk1"/>
+          </a:fontRef>
+        </p:style>
+      </p:cxnSp>
+      <p:cxnSp>
+        <p:nvCxnSpPr>
+          <p:cNvPr id="18" name="Straight Arrow Connector 17"/>
+          <p:cNvCxnSpPr>
+            <a:stCxn id="15" idx="3"/>
+            <a:endCxn id="8" idx="1"/>
+          </p:cNvCxnSpPr>
+          <p:nvPr/>
+        </p:nvCxnSpPr>
+        <p:spPr>
+          <a:xfrm>
+            <a:off x="5929322" y="4000504"/>
+            <a:ext cx="400052" cy="1588"/>
+          </a:xfrm>
+          <a:prstGeom prst="straightConnector1">
+            <a:avLst/>
+          </a:prstGeom>
+          <a:ln>
+            <a:headEnd type="arrow"/>
+            <a:tailEnd type="arrow"/>
+          </a:ln>
+        </p:spPr>
+        <p:style>
+          <a:lnRef idx="2">
+            <a:schemeClr val="accent1"/>
+          </a:lnRef>
+          <a:fillRef idx="1">
+            <a:schemeClr val="lt1"/>
+          </a:fillRef>
+          <a:effectRef idx="0">
+            <a:schemeClr val="accent1"/>
+          </a:effectRef>
+          <a:fontRef idx="minor">
+            <a:schemeClr val="dk1"/>
+          </a:fontRef>
+        </p:style>
+      </p:cxnSp>
+      <p:cxnSp>
+        <p:nvCxnSpPr>
+          <p:cNvPr id="19" name="Straight Arrow Connector 18"/>
+          <p:cNvCxnSpPr>
+            <a:stCxn id="12" idx="4"/>
+            <a:endCxn id="9" idx="1"/>
+          </p:cNvCxnSpPr>
+          <p:nvPr/>
+        </p:nvCxnSpPr>
+        <p:spPr>
+          <a:xfrm flipV="1">
+            <a:off x="5729296" y="4929198"/>
+            <a:ext cx="600078" cy="357190"/>
+          </a:xfrm>
+          <a:prstGeom prst="straightConnector1">
+            <a:avLst/>
+          </a:prstGeom>
+          <a:ln>
+            <a:headEnd type="arrow"/>
+            <a:tailEnd type="arrow"/>
+          </a:ln>
+        </p:spPr>
+        <p:style>
+          <a:lnRef idx="2">
+            <a:schemeClr val="accent1"/>
+          </a:lnRef>
+          <a:fillRef idx="1">
+            <a:schemeClr val="lt1"/>
+          </a:fillRef>
+          <a:effectRef idx="0">
+            <a:schemeClr val="accent1"/>
+          </a:effectRef>
+          <a:fontRef idx="minor">
+            <a:schemeClr val="dk1"/>
+          </a:fontRef>
+        </p:style>
+      </p:cxnSp>
+      <p:cxnSp>
+        <p:nvCxnSpPr>
+          <p:cNvPr id="20" name="Straight Arrow Connector 19"/>
+          <p:cNvCxnSpPr>
+            <a:stCxn id="7" idx="3"/>
+            <a:endCxn id="14" idx="2"/>
+          </p:cNvCxnSpPr>
+          <p:nvPr/>
+        </p:nvCxnSpPr>
+        <p:spPr>
+          <a:xfrm>
+            <a:off x="7786709" y="3071810"/>
+            <a:ext cx="357191" cy="1588"/>
+          </a:xfrm>
+          <a:prstGeom prst="straightConnector1">
+            <a:avLst/>
+          </a:prstGeom>
+          <a:ln>
+            <a:headEnd type="arrow"/>
+            <a:tailEnd type="arrow"/>
+          </a:ln>
+        </p:spPr>
+        <p:style>
+          <a:lnRef idx="2">
+            <a:schemeClr val="accent1"/>
+          </a:lnRef>
+          <a:fillRef idx="1">
+            <a:schemeClr val="lt1"/>
+          </a:fillRef>
+          <a:effectRef idx="0">
+            <a:schemeClr val="accent1"/>
+          </a:effectRef>
+          <a:fontRef idx="minor">
+            <a:schemeClr val="dk1"/>
+          </a:fontRef>
+        </p:style>
+      </p:cxnSp>
+      <p:cxnSp>
+        <p:nvCxnSpPr>
+          <p:cNvPr id="21" name="Straight Arrow Connector 20"/>
+          <p:cNvCxnSpPr>
+            <a:stCxn id="8" idx="3"/>
+            <a:endCxn id="13" idx="2"/>
+          </p:cNvCxnSpPr>
+          <p:nvPr/>
+        </p:nvCxnSpPr>
+        <p:spPr>
+          <a:xfrm>
+            <a:off x="7786709" y="4000504"/>
+            <a:ext cx="428629" cy="857256"/>
+          </a:xfrm>
+          <a:prstGeom prst="straightConnector1">
+            <a:avLst/>
+          </a:prstGeom>
+          <a:ln>
+            <a:headEnd type="arrow"/>
+            <a:tailEnd type="arrow"/>
+          </a:ln>
+        </p:spPr>
+        <p:style>
+          <a:lnRef idx="2">
+            <a:schemeClr val="accent1"/>
+          </a:lnRef>
+          <a:fillRef idx="1">
+            <a:schemeClr val="lt1"/>
+          </a:fillRef>
+          <a:effectRef idx="0">
+            <a:schemeClr val="accent1"/>
+          </a:effectRef>
+          <a:fontRef idx="minor">
+            <a:schemeClr val="dk1"/>
+          </a:fontRef>
+        </p:style>
+      </p:cxnSp>
+      <p:cxnSp>
+        <p:nvCxnSpPr>
+          <p:cNvPr id="22" name="Straight Arrow Connector 21"/>
+          <p:cNvCxnSpPr>
+            <a:stCxn id="13" idx="2"/>
+            <a:endCxn id="10" idx="3"/>
+          </p:cNvCxnSpPr>
+          <p:nvPr/>
+        </p:nvCxnSpPr>
+        <p:spPr>
+          <a:xfrm rot="10800000" flipV="1">
+            <a:off x="7786710" y="4857760"/>
+            <a:ext cx="428629" cy="1000132"/>
+          </a:xfrm>
+          <a:prstGeom prst="straightConnector1">
+            <a:avLst/>
+          </a:prstGeom>
+          <a:ln>
+            <a:headEnd type="arrow"/>
+            <a:tailEnd type="arrow"/>
+          </a:ln>
+        </p:spPr>
+        <p:style>
+          <a:lnRef idx="2">
+            <a:schemeClr val="accent1"/>
+          </a:lnRef>
+          <a:fillRef idx="1">
+            <a:schemeClr val="lt1"/>
+          </a:fillRef>
+          <a:effectRef idx="0">
+            <a:schemeClr val="accent1"/>
+          </a:effectRef>
+          <a:fontRef idx="minor">
+            <a:schemeClr val="dk1"/>
+          </a:fontRef>
+        </p:style>
+      </p:cxnSp>
+      <p:cxnSp>
+        <p:nvCxnSpPr>
+          <p:cNvPr id="23" name="Straight Arrow Connector 22"/>
+          <p:cNvCxnSpPr>
+            <a:stCxn id="6" idx="2"/>
+            <a:endCxn id="7" idx="0"/>
+          </p:cNvCxnSpPr>
+          <p:nvPr/>
+        </p:nvCxnSpPr>
+        <p:spPr>
+          <a:xfrm rot="5400000">
+            <a:off x="6950885" y="2607463"/>
+            <a:ext cx="214314" cy="1588"/>
+          </a:xfrm>
+          <a:prstGeom prst="straightConnector1">
+            <a:avLst/>
+          </a:prstGeom>
+          <a:ln>
+            <a:headEnd type="arrow"/>
+            <a:tailEnd type="arrow"/>
+          </a:ln>
+        </p:spPr>
+        <p:style>
+          <a:lnRef idx="1">
+            <a:schemeClr val="accent1"/>
+          </a:lnRef>
+          <a:fillRef idx="0">
+            <a:schemeClr val="accent1"/>
+          </a:fillRef>
+          <a:effectRef idx="0">
+            <a:schemeClr val="accent1"/>
+          </a:effectRef>
+          <a:fontRef idx="minor">
+            <a:schemeClr val="tx1"/>
+          </a:fontRef>
+        </p:style>
+      </p:cxnSp>
+      <p:cxnSp>
+        <p:nvCxnSpPr>
+          <p:cNvPr id="24" name="Straight Arrow Connector 23"/>
+          <p:cNvCxnSpPr>
+            <a:stCxn id="7" idx="2"/>
+            <a:endCxn id="8" idx="0"/>
+          </p:cNvCxnSpPr>
+          <p:nvPr/>
+        </p:nvCxnSpPr>
+        <p:spPr>
+          <a:xfrm rot="5400000">
+            <a:off x="6950885" y="3536157"/>
+            <a:ext cx="214314" cy="1588"/>
+          </a:xfrm>
+          <a:prstGeom prst="straightConnector1">
+            <a:avLst/>
+          </a:prstGeom>
+          <a:ln>
+            <a:headEnd type="arrow"/>
+            <a:tailEnd type="arrow"/>
+          </a:ln>
+        </p:spPr>
+        <p:style>
+          <a:lnRef idx="1">
+            <a:schemeClr val="accent1"/>
+          </a:lnRef>
+          <a:fillRef idx="0">
+            <a:schemeClr val="accent1"/>
+          </a:fillRef>
+          <a:effectRef idx="0">
+            <a:schemeClr val="accent1"/>
+          </a:effectRef>
+          <a:fontRef idx="minor">
+            <a:schemeClr val="tx1"/>
+          </a:fontRef>
+        </p:style>
+      </p:cxnSp>
+      <p:cxnSp>
+        <p:nvCxnSpPr>
+          <p:cNvPr id="25" name="Straight Arrow Connector 24"/>
+          <p:cNvCxnSpPr>
+            <a:stCxn id="8" idx="2"/>
+            <a:endCxn id="9" idx="0"/>
+          </p:cNvCxnSpPr>
+          <p:nvPr/>
+        </p:nvCxnSpPr>
+        <p:spPr>
+          <a:xfrm rot="5400000">
+            <a:off x="6950885" y="4464851"/>
+            <a:ext cx="214314" cy="1588"/>
+          </a:xfrm>
+          <a:prstGeom prst="straightConnector1">
+            <a:avLst/>
+          </a:prstGeom>
+          <a:ln>
+            <a:headEnd type="arrow"/>
+            <a:tailEnd type="arrow"/>
+          </a:ln>
+        </p:spPr>
+        <p:style>
+          <a:lnRef idx="1">
+            <a:schemeClr val="accent1"/>
+          </a:lnRef>
+          <a:fillRef idx="0">
+            <a:schemeClr val="accent1"/>
+          </a:fillRef>
+          <a:effectRef idx="0">
+            <a:schemeClr val="accent1"/>
+          </a:effectRef>
+          <a:fontRef idx="minor">
+            <a:schemeClr val="tx1"/>
+          </a:fontRef>
+        </p:style>
+      </p:cxnSp>
+      <p:cxnSp>
+        <p:nvCxnSpPr>
+          <p:cNvPr id="26" name="Straight Arrow Connector 25"/>
+          <p:cNvCxnSpPr>
+            <a:stCxn id="9" idx="2"/>
+            <a:endCxn id="10" idx="0"/>
+          </p:cNvCxnSpPr>
+          <p:nvPr/>
+        </p:nvCxnSpPr>
+        <p:spPr>
+          <a:xfrm rot="5400000">
+            <a:off x="6950885" y="5393545"/>
+            <a:ext cx="214314" cy="1588"/>
+          </a:xfrm>
+          <a:prstGeom prst="straightConnector1">
+            <a:avLst/>
+          </a:prstGeom>
+          <a:ln>
+            <a:headEnd type="arrow"/>
+            <a:tailEnd type="arrow"/>
+          </a:ln>
+        </p:spPr>
+        <p:style>
+          <a:lnRef idx="1">
+            <a:schemeClr val="accent1"/>
+          </a:lnRef>
+          <a:fillRef idx="0">
+            <a:schemeClr val="accent1"/>
+          </a:fillRef>
+          <a:effectRef idx="0">
+            <a:schemeClr val="accent1"/>
+          </a:effectRef>
+          <a:fontRef idx="minor">
+            <a:schemeClr val="tx1"/>
+          </a:fontRef>
+        </p:style>
+      </p:cxnSp>
     </p:spTree>
   </p:cSld>
   <p:clrMapOvr>
     <a:masterClrMapping/>
   </p:clrMapOvr>
+  <p:timing>
+    <p:tnLst>
+      <p:par>
+        <p:cTn id="1" dur="indefinite" restart="never" nodeType="tmRoot"/>
+      </p:par>
+    </p:tnLst>
+  </p:timing>
 </p:sld>
 </file>
 
@@ -3292,7 +4113,7 @@
           <a:p>
             <a:r>
               <a:rPr lang="pt-BR" dirty="0" err="1" smtClean="0"/>
-              <a:t>UPInferenceEngine</a:t>
+              <a:t>UPInferenceCache</a:t>
             </a:r>
             <a:endParaRPr lang="pt-BR" dirty="0"/>
           </a:p>
@@ -3310,22 +4131,56 @@
         </p:nvSpPr>
         <p:spPr/>
         <p:txBody>
-          <a:bodyPr/>
+          <a:bodyPr>
+            <a:normAutofit lnSpcReduction="10000"/>
+          </a:bodyPr>
           <a:lstStyle/>
           <a:p>
             <a:r>
               <a:rPr lang="pt-BR" dirty="0" smtClean="0"/>
-              <a:t>Infere os dados de perfil a</a:t>
+              <a:t>Funciona</a:t>
             </a:r>
             <a:r>
               <a:rPr lang="pt-BR" baseline="0" dirty="0" smtClean="0"/>
-              <a:t> partir das trilhas</a:t>
-            </a:r>
-          </a:p>
-          <a:p>
+              <a:t> como </a:t>
+            </a:r>
+            <a:r>
+              <a:rPr lang="pt-BR" baseline="0" dirty="0" err="1" smtClean="0"/>
+              <a:t>cache</a:t>
+            </a:r>
             <a:r>
               <a:rPr lang="pt-BR" baseline="0" dirty="0" smtClean="0"/>
-              <a:t>Implementação simples para demonstração: apenas conta o número de trocas de contexto</a:t>
+              <a:t> para dados inferidos</a:t>
+            </a:r>
+          </a:p>
+          <a:p>
+            <a:r>
+              <a:rPr lang="pt-BR" baseline="0" dirty="0" smtClean="0"/>
+              <a:t>Se a informação estiver no </a:t>
+            </a:r>
+            <a:r>
+              <a:rPr lang="pt-BR" baseline="0" dirty="0" err="1" smtClean="0"/>
+              <a:t>cache</a:t>
+            </a:r>
+            <a:r>
+              <a:rPr lang="pt-BR" baseline="0" dirty="0" smtClean="0"/>
+              <a:t> e não estiver vencida,</a:t>
+            </a:r>
+            <a:r>
+              <a:rPr lang="pt-BR" dirty="0" smtClean="0"/>
+              <a:t> retorna a informação</a:t>
+            </a:r>
+          </a:p>
+          <a:p>
+            <a:r>
+              <a:rPr lang="pt-BR" dirty="0" smtClean="0"/>
+              <a:t>Caso contrário, repassa a requisição</a:t>
+            </a:r>
+          </a:p>
+          <a:p>
+            <a:r>
+              <a:rPr lang="pt-BR" dirty="0" smtClean="0"/>
+              <a:t>Módulo não implementado</a:t>
             </a:r>
             <a:endParaRPr lang="pt-BR" dirty="0"/>
           </a:p>
@@ -3333,28 +4188,847 @@
       </p:sp>
       <p:sp>
         <p:nvSpPr>
-          <p:cNvPr id="5" name="Content Placeholder 4"/>
-          <p:cNvSpPr>
-            <a:spLocks noGrp="1"/>
-          </p:cNvSpPr>
-          <p:nvPr>
-            <p:ph sz="half" idx="2"/>
-          </p:nvPr>
-        </p:nvSpPr>
-        <p:spPr/>
-        <p:txBody>
-          <a:bodyPr/>
-          <a:lstStyle/>
-          <a:p>
-            <a:endParaRPr lang="pt-BR"/>
-          </a:p>
-        </p:txBody>
-      </p:sp>
+          <p:cNvPr id="6" name="Rectangle 5"/>
+          <p:cNvSpPr/>
+          <p:nvPr/>
+        </p:nvSpPr>
+        <p:spPr>
+          <a:xfrm>
+            <a:off x="6329374" y="1785926"/>
+            <a:ext cx="1457335" cy="714380"/>
+          </a:xfrm>
+          <a:prstGeom prst="rect">
+            <a:avLst/>
+          </a:prstGeom>
+        </p:spPr>
+        <p:style>
+          <a:lnRef idx="2">
+            <a:schemeClr val="accent1"/>
+          </a:lnRef>
+          <a:fillRef idx="1">
+            <a:schemeClr val="lt1"/>
+          </a:fillRef>
+          <a:effectRef idx="0">
+            <a:schemeClr val="accent1"/>
+          </a:effectRef>
+          <a:fontRef idx="minor">
+            <a:schemeClr val="dk1"/>
+          </a:fontRef>
+        </p:style>
+        <p:txBody>
+          <a:bodyPr rtlCol="0" anchor="ctr"/>
+          <a:lstStyle/>
+          <a:p>
+            <a:pPr algn="ctr"/>
+            <a:r>
+              <a:rPr lang="pt-BR" sz="1200" b="1" dirty="0" smtClean="0"/>
+              <a:t>UPCommunication</a:t>
+            </a:r>
+            <a:endParaRPr lang="pt-BR" sz="1200" b="1" dirty="0"/>
+          </a:p>
+        </p:txBody>
+      </p:sp>
+      <p:sp>
+        <p:nvSpPr>
+          <p:cNvPr id="7" name="Rectangle 6"/>
+          <p:cNvSpPr/>
+          <p:nvPr/>
+        </p:nvSpPr>
+        <p:spPr>
+          <a:xfrm>
+            <a:off x="6329374" y="2714620"/>
+            <a:ext cx="1457335" cy="714380"/>
+          </a:xfrm>
+          <a:prstGeom prst="rect">
+            <a:avLst/>
+          </a:prstGeom>
+        </p:spPr>
+        <p:style>
+          <a:lnRef idx="2">
+            <a:schemeClr val="accent1"/>
+          </a:lnRef>
+          <a:fillRef idx="1">
+            <a:schemeClr val="lt1"/>
+          </a:fillRef>
+          <a:effectRef idx="0">
+            <a:schemeClr val="accent1"/>
+          </a:effectRef>
+          <a:fontRef idx="minor">
+            <a:schemeClr val="dk1"/>
+          </a:fontRef>
+        </p:style>
+        <p:txBody>
+          <a:bodyPr rtlCol="0" anchor="ctr"/>
+          <a:lstStyle/>
+          <a:p>
+            <a:pPr algn="ctr"/>
+            <a:r>
+              <a:rPr lang="pt-BR" sz="1200" b="1" dirty="0" smtClean="0"/>
+              <a:t>UPAuthentication</a:t>
+            </a:r>
+            <a:endParaRPr lang="pt-BR" sz="1200" b="1" dirty="0"/>
+          </a:p>
+        </p:txBody>
+      </p:sp>
+      <p:sp>
+        <p:nvSpPr>
+          <p:cNvPr id="8" name="Rectangle 7"/>
+          <p:cNvSpPr/>
+          <p:nvPr/>
+        </p:nvSpPr>
+        <p:spPr>
+          <a:xfrm>
+            <a:off x="6329374" y="3643314"/>
+            <a:ext cx="1457335" cy="714380"/>
+          </a:xfrm>
+          <a:prstGeom prst="rect">
+            <a:avLst/>
+          </a:prstGeom>
+        </p:spPr>
+        <p:style>
+          <a:lnRef idx="2">
+            <a:schemeClr val="accent1"/>
+          </a:lnRef>
+          <a:fillRef idx="1">
+            <a:schemeClr val="lt1"/>
+          </a:fillRef>
+          <a:effectRef idx="0">
+            <a:schemeClr val="accent1"/>
+          </a:effectRef>
+          <a:fontRef idx="minor">
+            <a:schemeClr val="dk1"/>
+          </a:fontRef>
+        </p:style>
+        <p:txBody>
+          <a:bodyPr rtlCol="0" anchor="ctr"/>
+          <a:lstStyle/>
+          <a:p>
+            <a:pPr algn="ctr"/>
+            <a:r>
+              <a:rPr lang="pt-BR" sz="1200" b="1" dirty="0" smtClean="0"/>
+              <a:t>UPServices</a:t>
+            </a:r>
+            <a:endParaRPr lang="pt-BR" sz="1200" b="1" dirty="0"/>
+          </a:p>
+        </p:txBody>
+      </p:sp>
+      <p:sp>
+        <p:nvSpPr>
+          <p:cNvPr id="9" name="Rectangle 8"/>
+          <p:cNvSpPr/>
+          <p:nvPr/>
+        </p:nvSpPr>
+        <p:spPr>
+          <a:xfrm>
+            <a:off x="6329374" y="4572008"/>
+            <a:ext cx="1457335" cy="714380"/>
+          </a:xfrm>
+          <a:prstGeom prst="rect">
+            <a:avLst/>
+          </a:prstGeom>
+        </p:spPr>
+        <p:style>
+          <a:lnRef idx="2">
+            <a:schemeClr val="accent1">
+              <a:shade val="50000"/>
+            </a:schemeClr>
+          </a:lnRef>
+          <a:fillRef idx="1">
+            <a:schemeClr val="accent1"/>
+          </a:fillRef>
+          <a:effectRef idx="0">
+            <a:schemeClr val="accent1"/>
+          </a:effectRef>
+          <a:fontRef idx="minor">
+            <a:schemeClr val="lt1"/>
+          </a:fontRef>
+        </p:style>
+        <p:txBody>
+          <a:bodyPr rtlCol="0" anchor="ctr"/>
+          <a:lstStyle/>
+          <a:p>
+            <a:pPr algn="ctr"/>
+            <a:r>
+              <a:rPr lang="pt-BR" sz="1200" b="1" dirty="0" smtClean="0"/>
+              <a:t>UPInferenceCache</a:t>
+            </a:r>
+            <a:endParaRPr lang="pt-BR" sz="1200" b="1" dirty="0"/>
+          </a:p>
+        </p:txBody>
+      </p:sp>
+      <p:sp>
+        <p:nvSpPr>
+          <p:cNvPr id="10" name="Rectangle 9"/>
+          <p:cNvSpPr/>
+          <p:nvPr/>
+        </p:nvSpPr>
+        <p:spPr>
+          <a:xfrm>
+            <a:off x="6329374" y="5500702"/>
+            <a:ext cx="1457335" cy="714380"/>
+          </a:xfrm>
+          <a:prstGeom prst="rect">
+            <a:avLst/>
+          </a:prstGeom>
+        </p:spPr>
+        <p:style>
+          <a:lnRef idx="2">
+            <a:schemeClr val="accent1"/>
+          </a:lnRef>
+          <a:fillRef idx="1">
+            <a:schemeClr val="lt1"/>
+          </a:fillRef>
+          <a:effectRef idx="0">
+            <a:schemeClr val="accent1"/>
+          </a:effectRef>
+          <a:fontRef idx="minor">
+            <a:schemeClr val="dk1"/>
+          </a:fontRef>
+        </p:style>
+        <p:txBody>
+          <a:bodyPr rtlCol="0" anchor="ctr"/>
+          <a:lstStyle/>
+          <a:p>
+            <a:pPr algn="ctr"/>
+            <a:r>
+              <a:rPr lang="pt-BR" sz="1200" b="1" dirty="0" smtClean="0"/>
+              <a:t>UPInferenceEngine</a:t>
+            </a:r>
+            <a:endParaRPr lang="pt-BR" sz="1200" b="1" dirty="0"/>
+          </a:p>
+        </p:txBody>
+      </p:sp>
+      <p:sp>
+        <p:nvSpPr>
+          <p:cNvPr id="11" name="Cloud 10"/>
+          <p:cNvSpPr/>
+          <p:nvPr/>
+        </p:nvSpPr>
+        <p:spPr>
+          <a:xfrm>
+            <a:off x="4572000" y="1714488"/>
+            <a:ext cx="1143008" cy="928694"/>
+          </a:xfrm>
+          <a:prstGeom prst="cloud">
+            <a:avLst/>
+          </a:prstGeom>
+        </p:spPr>
+        <p:style>
+          <a:lnRef idx="2">
+            <a:schemeClr val="accent1"/>
+          </a:lnRef>
+          <a:fillRef idx="1">
+            <a:schemeClr val="lt1"/>
+          </a:fillRef>
+          <a:effectRef idx="0">
+            <a:schemeClr val="accent1"/>
+          </a:effectRef>
+          <a:fontRef idx="minor">
+            <a:schemeClr val="dk1"/>
+          </a:fontRef>
+        </p:style>
+        <p:txBody>
+          <a:bodyPr rtlCol="0" anchor="ctr"/>
+          <a:lstStyle/>
+          <a:p>
+            <a:pPr algn="ctr"/>
+            <a:r>
+              <a:rPr lang="pt-BR" sz="1200" b="1" dirty="0" smtClean="0"/>
+              <a:t>Internet</a:t>
+            </a:r>
+            <a:endParaRPr lang="pt-BR" sz="1200" b="1" dirty="0"/>
+          </a:p>
+        </p:txBody>
+      </p:sp>
+      <p:sp>
+        <p:nvSpPr>
+          <p:cNvPr id="12" name="Flowchart: Magnetic Disk 11"/>
+          <p:cNvSpPr/>
+          <p:nvPr/>
+        </p:nvSpPr>
+        <p:spPr>
+          <a:xfrm>
+            <a:off x="4857752" y="4857760"/>
+            <a:ext cx="871544" cy="857256"/>
+          </a:xfrm>
+          <a:prstGeom prst="flowChartMagneticDisk">
+            <a:avLst/>
+          </a:prstGeom>
+        </p:spPr>
+        <p:style>
+          <a:lnRef idx="2">
+            <a:schemeClr val="accent1">
+              <a:shade val="50000"/>
+            </a:schemeClr>
+          </a:lnRef>
+          <a:fillRef idx="1">
+            <a:schemeClr val="accent1"/>
+          </a:fillRef>
+          <a:effectRef idx="0">
+            <a:schemeClr val="accent1"/>
+          </a:effectRef>
+          <a:fontRef idx="minor">
+            <a:schemeClr val="lt1"/>
+          </a:fontRef>
+        </p:style>
+        <p:txBody>
+          <a:bodyPr rtlCol="0" anchor="ctr"/>
+          <a:lstStyle/>
+          <a:p>
+            <a:pPr algn="ctr"/>
+            <a:r>
+              <a:rPr lang="pt-BR" sz="1200" b="1" dirty="0" smtClean="0"/>
+              <a:t>CacheDB</a:t>
+            </a:r>
+            <a:endParaRPr lang="pt-BR" sz="1200" b="1" dirty="0"/>
+          </a:p>
+        </p:txBody>
+      </p:sp>
+      <p:sp>
+        <p:nvSpPr>
+          <p:cNvPr id="13" name="Flowchart: Magnetic Disk 12"/>
+          <p:cNvSpPr/>
+          <p:nvPr/>
+        </p:nvSpPr>
+        <p:spPr>
+          <a:xfrm>
+            <a:off x="8215338" y="4429132"/>
+            <a:ext cx="728668" cy="857256"/>
+          </a:xfrm>
+          <a:prstGeom prst="flowChartMagneticDisk">
+            <a:avLst/>
+          </a:prstGeom>
+        </p:spPr>
+        <p:style>
+          <a:lnRef idx="2">
+            <a:schemeClr val="accent1"/>
+          </a:lnRef>
+          <a:fillRef idx="1">
+            <a:schemeClr val="lt1"/>
+          </a:fillRef>
+          <a:effectRef idx="0">
+            <a:schemeClr val="accent1"/>
+          </a:effectRef>
+          <a:fontRef idx="minor">
+            <a:schemeClr val="dk1"/>
+          </a:fontRef>
+        </p:style>
+        <p:txBody>
+          <a:bodyPr rtlCol="0" anchor="ctr"/>
+          <a:lstStyle/>
+          <a:p>
+            <a:pPr algn="ctr"/>
+            <a:r>
+              <a:rPr lang="pt-BR" sz="1200" b="1" dirty="0" smtClean="0"/>
+              <a:t>TrailsDB</a:t>
+            </a:r>
+            <a:endParaRPr lang="pt-BR" sz="1200" b="1" dirty="0"/>
+          </a:p>
+        </p:txBody>
+      </p:sp>
+      <p:sp>
+        <p:nvSpPr>
+          <p:cNvPr id="14" name="Flowchart: Magnetic Disk 13"/>
+          <p:cNvSpPr/>
+          <p:nvPr/>
+        </p:nvSpPr>
+        <p:spPr>
+          <a:xfrm>
+            <a:off x="8143900" y="2643182"/>
+            <a:ext cx="728668" cy="857256"/>
+          </a:xfrm>
+          <a:prstGeom prst="flowChartMagneticDisk">
+            <a:avLst/>
+          </a:prstGeom>
+        </p:spPr>
+        <p:style>
+          <a:lnRef idx="2">
+            <a:schemeClr val="accent1"/>
+          </a:lnRef>
+          <a:fillRef idx="1">
+            <a:schemeClr val="lt1"/>
+          </a:fillRef>
+          <a:effectRef idx="0">
+            <a:schemeClr val="accent1"/>
+          </a:effectRef>
+          <a:fontRef idx="minor">
+            <a:schemeClr val="dk1"/>
+          </a:fontRef>
+        </p:style>
+        <p:txBody>
+          <a:bodyPr rtlCol="0" anchor="ctr"/>
+          <a:lstStyle/>
+          <a:p>
+            <a:pPr algn="ctr"/>
+            <a:r>
+              <a:rPr lang="pt-BR" sz="1200" b="1" dirty="0" smtClean="0"/>
+              <a:t>UserDB</a:t>
+            </a:r>
+            <a:endParaRPr lang="pt-BR" sz="1200" b="1" dirty="0"/>
+          </a:p>
+        </p:txBody>
+      </p:sp>
+      <p:sp>
+        <p:nvSpPr>
+          <p:cNvPr id="15" name="Rectangle 14"/>
+          <p:cNvSpPr/>
+          <p:nvPr/>
+        </p:nvSpPr>
+        <p:spPr>
+          <a:xfrm>
+            <a:off x="4429124" y="3643314"/>
+            <a:ext cx="1500198" cy="714380"/>
+          </a:xfrm>
+          <a:prstGeom prst="rect">
+            <a:avLst/>
+          </a:prstGeom>
+        </p:spPr>
+        <p:style>
+          <a:lnRef idx="2">
+            <a:schemeClr val="accent1"/>
+          </a:lnRef>
+          <a:fillRef idx="1">
+            <a:schemeClr val="lt1"/>
+          </a:fillRef>
+          <a:effectRef idx="0">
+            <a:schemeClr val="accent1"/>
+          </a:effectRef>
+          <a:fontRef idx="minor">
+            <a:schemeClr val="dk1"/>
+          </a:fontRef>
+        </p:style>
+        <p:txBody>
+          <a:bodyPr rtlCol="0" anchor="ctr"/>
+          <a:lstStyle/>
+          <a:p>
+            <a:pPr algn="ctr"/>
+            <a:r>
+              <a:rPr lang="pt-BR" sz="1200" b="1" dirty="0" smtClean="0"/>
+              <a:t>UPRemoteExecution</a:t>
+            </a:r>
+            <a:endParaRPr lang="pt-BR" sz="1200" b="1" dirty="0"/>
+          </a:p>
+        </p:txBody>
+      </p:sp>
+      <p:cxnSp>
+        <p:nvCxnSpPr>
+          <p:cNvPr id="16" name="Straight Arrow Connector 15"/>
+          <p:cNvCxnSpPr>
+            <a:stCxn id="11" idx="0"/>
+            <a:endCxn id="6" idx="1"/>
+          </p:cNvCxnSpPr>
+          <p:nvPr/>
+        </p:nvCxnSpPr>
+        <p:spPr>
+          <a:xfrm flipV="1">
+            <a:off x="5714055" y="2143116"/>
+            <a:ext cx="615319" cy="35719"/>
+          </a:xfrm>
+          <a:prstGeom prst="straightConnector1">
+            <a:avLst/>
+          </a:prstGeom>
+          <a:ln>
+            <a:headEnd type="arrow"/>
+            <a:tailEnd type="arrow"/>
+          </a:ln>
+        </p:spPr>
+        <p:style>
+          <a:lnRef idx="2">
+            <a:schemeClr val="accent1"/>
+          </a:lnRef>
+          <a:fillRef idx="1">
+            <a:schemeClr val="lt1"/>
+          </a:fillRef>
+          <a:effectRef idx="0">
+            <a:schemeClr val="accent1"/>
+          </a:effectRef>
+          <a:fontRef idx="minor">
+            <a:schemeClr val="dk1"/>
+          </a:fontRef>
+        </p:style>
+      </p:cxnSp>
+      <p:cxnSp>
+        <p:nvCxnSpPr>
+          <p:cNvPr id="17" name="Straight Arrow Connector 16"/>
+          <p:cNvCxnSpPr>
+            <a:stCxn id="15" idx="0"/>
+            <a:endCxn id="11" idx="1"/>
+          </p:cNvCxnSpPr>
+          <p:nvPr/>
+        </p:nvCxnSpPr>
+        <p:spPr>
+          <a:xfrm rot="16200000" flipV="1">
+            <a:off x="4660804" y="3124894"/>
+            <a:ext cx="1001121" cy="35719"/>
+          </a:xfrm>
+          <a:prstGeom prst="straightConnector1">
+            <a:avLst/>
+          </a:prstGeom>
+          <a:ln>
+            <a:headEnd type="arrow"/>
+            <a:tailEnd type="arrow"/>
+          </a:ln>
+        </p:spPr>
+        <p:style>
+          <a:lnRef idx="2">
+            <a:schemeClr val="accent1"/>
+          </a:lnRef>
+          <a:fillRef idx="1">
+            <a:schemeClr val="lt1"/>
+          </a:fillRef>
+          <a:effectRef idx="0">
+            <a:schemeClr val="accent1"/>
+          </a:effectRef>
+          <a:fontRef idx="minor">
+            <a:schemeClr val="dk1"/>
+          </a:fontRef>
+        </p:style>
+      </p:cxnSp>
+      <p:cxnSp>
+        <p:nvCxnSpPr>
+          <p:cNvPr id="18" name="Straight Arrow Connector 17"/>
+          <p:cNvCxnSpPr>
+            <a:stCxn id="15" idx="3"/>
+            <a:endCxn id="8" idx="1"/>
+          </p:cNvCxnSpPr>
+          <p:nvPr/>
+        </p:nvCxnSpPr>
+        <p:spPr>
+          <a:xfrm>
+            <a:off x="5929322" y="4000504"/>
+            <a:ext cx="400052" cy="1588"/>
+          </a:xfrm>
+          <a:prstGeom prst="straightConnector1">
+            <a:avLst/>
+          </a:prstGeom>
+          <a:ln>
+            <a:headEnd type="arrow"/>
+            <a:tailEnd type="arrow"/>
+          </a:ln>
+        </p:spPr>
+        <p:style>
+          <a:lnRef idx="2">
+            <a:schemeClr val="accent1"/>
+          </a:lnRef>
+          <a:fillRef idx="1">
+            <a:schemeClr val="lt1"/>
+          </a:fillRef>
+          <a:effectRef idx="0">
+            <a:schemeClr val="accent1"/>
+          </a:effectRef>
+          <a:fontRef idx="minor">
+            <a:schemeClr val="dk1"/>
+          </a:fontRef>
+        </p:style>
+      </p:cxnSp>
+      <p:cxnSp>
+        <p:nvCxnSpPr>
+          <p:cNvPr id="19" name="Straight Arrow Connector 18"/>
+          <p:cNvCxnSpPr>
+            <a:stCxn id="12" idx="4"/>
+            <a:endCxn id="9" idx="1"/>
+          </p:cNvCxnSpPr>
+          <p:nvPr/>
+        </p:nvCxnSpPr>
+        <p:spPr>
+          <a:xfrm flipV="1">
+            <a:off x="5729296" y="4929198"/>
+            <a:ext cx="600078" cy="357190"/>
+          </a:xfrm>
+          <a:prstGeom prst="straightConnector1">
+            <a:avLst/>
+          </a:prstGeom>
+          <a:ln>
+            <a:headEnd type="arrow"/>
+            <a:tailEnd type="arrow"/>
+          </a:ln>
+        </p:spPr>
+        <p:style>
+          <a:lnRef idx="2">
+            <a:schemeClr val="accent1"/>
+          </a:lnRef>
+          <a:fillRef idx="1">
+            <a:schemeClr val="lt1"/>
+          </a:fillRef>
+          <a:effectRef idx="0">
+            <a:schemeClr val="accent1"/>
+          </a:effectRef>
+          <a:fontRef idx="minor">
+            <a:schemeClr val="dk1"/>
+          </a:fontRef>
+        </p:style>
+      </p:cxnSp>
+      <p:cxnSp>
+        <p:nvCxnSpPr>
+          <p:cNvPr id="20" name="Straight Arrow Connector 19"/>
+          <p:cNvCxnSpPr>
+            <a:stCxn id="7" idx="3"/>
+            <a:endCxn id="14" idx="2"/>
+          </p:cNvCxnSpPr>
+          <p:nvPr/>
+        </p:nvCxnSpPr>
+        <p:spPr>
+          <a:xfrm>
+            <a:off x="7786709" y="3071810"/>
+            <a:ext cx="357191" cy="1588"/>
+          </a:xfrm>
+          <a:prstGeom prst="straightConnector1">
+            <a:avLst/>
+          </a:prstGeom>
+          <a:ln>
+            <a:headEnd type="arrow"/>
+            <a:tailEnd type="arrow"/>
+          </a:ln>
+        </p:spPr>
+        <p:style>
+          <a:lnRef idx="2">
+            <a:schemeClr val="accent1"/>
+          </a:lnRef>
+          <a:fillRef idx="1">
+            <a:schemeClr val="lt1"/>
+          </a:fillRef>
+          <a:effectRef idx="0">
+            <a:schemeClr val="accent1"/>
+          </a:effectRef>
+          <a:fontRef idx="minor">
+            <a:schemeClr val="dk1"/>
+          </a:fontRef>
+        </p:style>
+      </p:cxnSp>
+      <p:cxnSp>
+        <p:nvCxnSpPr>
+          <p:cNvPr id="21" name="Straight Arrow Connector 20"/>
+          <p:cNvCxnSpPr>
+            <a:stCxn id="8" idx="3"/>
+            <a:endCxn id="13" idx="2"/>
+          </p:cNvCxnSpPr>
+          <p:nvPr/>
+        </p:nvCxnSpPr>
+        <p:spPr>
+          <a:xfrm>
+            <a:off x="7786709" y="4000504"/>
+            <a:ext cx="428629" cy="857256"/>
+          </a:xfrm>
+          <a:prstGeom prst="straightConnector1">
+            <a:avLst/>
+          </a:prstGeom>
+          <a:ln>
+            <a:headEnd type="arrow"/>
+            <a:tailEnd type="arrow"/>
+          </a:ln>
+        </p:spPr>
+        <p:style>
+          <a:lnRef idx="2">
+            <a:schemeClr val="accent1"/>
+          </a:lnRef>
+          <a:fillRef idx="1">
+            <a:schemeClr val="lt1"/>
+          </a:fillRef>
+          <a:effectRef idx="0">
+            <a:schemeClr val="accent1"/>
+          </a:effectRef>
+          <a:fontRef idx="minor">
+            <a:schemeClr val="dk1"/>
+          </a:fontRef>
+        </p:style>
+      </p:cxnSp>
+      <p:cxnSp>
+        <p:nvCxnSpPr>
+          <p:cNvPr id="22" name="Straight Arrow Connector 21"/>
+          <p:cNvCxnSpPr>
+            <a:stCxn id="13" idx="2"/>
+            <a:endCxn id="10" idx="3"/>
+          </p:cNvCxnSpPr>
+          <p:nvPr/>
+        </p:nvCxnSpPr>
+        <p:spPr>
+          <a:xfrm rot="10800000" flipV="1">
+            <a:off x="7786710" y="4857760"/>
+            <a:ext cx="428629" cy="1000132"/>
+          </a:xfrm>
+          <a:prstGeom prst="straightConnector1">
+            <a:avLst/>
+          </a:prstGeom>
+          <a:ln>
+            <a:headEnd type="arrow"/>
+            <a:tailEnd type="arrow"/>
+          </a:ln>
+        </p:spPr>
+        <p:style>
+          <a:lnRef idx="2">
+            <a:schemeClr val="accent1"/>
+          </a:lnRef>
+          <a:fillRef idx="1">
+            <a:schemeClr val="lt1"/>
+          </a:fillRef>
+          <a:effectRef idx="0">
+            <a:schemeClr val="accent1"/>
+          </a:effectRef>
+          <a:fontRef idx="minor">
+            <a:schemeClr val="dk1"/>
+          </a:fontRef>
+        </p:style>
+      </p:cxnSp>
+      <p:cxnSp>
+        <p:nvCxnSpPr>
+          <p:cNvPr id="23" name="Straight Arrow Connector 22"/>
+          <p:cNvCxnSpPr>
+            <a:stCxn id="6" idx="2"/>
+            <a:endCxn id="7" idx="0"/>
+          </p:cNvCxnSpPr>
+          <p:nvPr/>
+        </p:nvCxnSpPr>
+        <p:spPr>
+          <a:xfrm rot="5400000">
+            <a:off x="6950885" y="2607463"/>
+            <a:ext cx="214314" cy="1588"/>
+          </a:xfrm>
+          <a:prstGeom prst="straightConnector1">
+            <a:avLst/>
+          </a:prstGeom>
+          <a:ln>
+            <a:headEnd type="arrow"/>
+            <a:tailEnd type="arrow"/>
+          </a:ln>
+        </p:spPr>
+        <p:style>
+          <a:lnRef idx="1">
+            <a:schemeClr val="accent1"/>
+          </a:lnRef>
+          <a:fillRef idx="0">
+            <a:schemeClr val="accent1"/>
+          </a:fillRef>
+          <a:effectRef idx="0">
+            <a:schemeClr val="accent1"/>
+          </a:effectRef>
+          <a:fontRef idx="minor">
+            <a:schemeClr val="tx1"/>
+          </a:fontRef>
+        </p:style>
+      </p:cxnSp>
+      <p:cxnSp>
+        <p:nvCxnSpPr>
+          <p:cNvPr id="24" name="Straight Arrow Connector 23"/>
+          <p:cNvCxnSpPr>
+            <a:stCxn id="7" idx="2"/>
+            <a:endCxn id="8" idx="0"/>
+          </p:cNvCxnSpPr>
+          <p:nvPr/>
+        </p:nvCxnSpPr>
+        <p:spPr>
+          <a:xfrm rot="5400000">
+            <a:off x="6950885" y="3536157"/>
+            <a:ext cx="214314" cy="1588"/>
+          </a:xfrm>
+          <a:prstGeom prst="straightConnector1">
+            <a:avLst/>
+          </a:prstGeom>
+          <a:ln>
+            <a:headEnd type="arrow"/>
+            <a:tailEnd type="arrow"/>
+          </a:ln>
+        </p:spPr>
+        <p:style>
+          <a:lnRef idx="1">
+            <a:schemeClr val="accent1"/>
+          </a:lnRef>
+          <a:fillRef idx="0">
+            <a:schemeClr val="accent1"/>
+          </a:fillRef>
+          <a:effectRef idx="0">
+            <a:schemeClr val="accent1"/>
+          </a:effectRef>
+          <a:fontRef idx="minor">
+            <a:schemeClr val="tx1"/>
+          </a:fontRef>
+        </p:style>
+      </p:cxnSp>
+      <p:cxnSp>
+        <p:nvCxnSpPr>
+          <p:cNvPr id="25" name="Straight Arrow Connector 24"/>
+          <p:cNvCxnSpPr>
+            <a:stCxn id="8" idx="2"/>
+            <a:endCxn id="9" idx="0"/>
+          </p:cNvCxnSpPr>
+          <p:nvPr/>
+        </p:nvCxnSpPr>
+        <p:spPr>
+          <a:xfrm rot="5400000">
+            <a:off x="6950885" y="4464851"/>
+            <a:ext cx="214314" cy="1588"/>
+          </a:xfrm>
+          <a:prstGeom prst="straightConnector1">
+            <a:avLst/>
+          </a:prstGeom>
+          <a:ln>
+            <a:headEnd type="arrow"/>
+            <a:tailEnd type="arrow"/>
+          </a:ln>
+        </p:spPr>
+        <p:style>
+          <a:lnRef idx="1">
+            <a:schemeClr val="accent1"/>
+          </a:lnRef>
+          <a:fillRef idx="0">
+            <a:schemeClr val="accent1"/>
+          </a:fillRef>
+          <a:effectRef idx="0">
+            <a:schemeClr val="accent1"/>
+          </a:effectRef>
+          <a:fontRef idx="minor">
+            <a:schemeClr val="tx1"/>
+          </a:fontRef>
+        </p:style>
+      </p:cxnSp>
+      <p:cxnSp>
+        <p:nvCxnSpPr>
+          <p:cNvPr id="26" name="Straight Arrow Connector 25"/>
+          <p:cNvCxnSpPr>
+            <a:stCxn id="9" idx="2"/>
+            <a:endCxn id="10" idx="0"/>
+          </p:cNvCxnSpPr>
+          <p:nvPr/>
+        </p:nvCxnSpPr>
+        <p:spPr>
+          <a:xfrm rot="5400000">
+            <a:off x="6950885" y="5393545"/>
+            <a:ext cx="214314" cy="1588"/>
+          </a:xfrm>
+          <a:prstGeom prst="straightConnector1">
+            <a:avLst/>
+          </a:prstGeom>
+          <a:ln>
+            <a:headEnd type="arrow"/>
+            <a:tailEnd type="arrow"/>
+          </a:ln>
+        </p:spPr>
+        <p:style>
+          <a:lnRef idx="1">
+            <a:schemeClr val="accent1"/>
+          </a:lnRef>
+          <a:fillRef idx="0">
+            <a:schemeClr val="accent1"/>
+          </a:fillRef>
+          <a:effectRef idx="0">
+            <a:schemeClr val="accent1"/>
+          </a:effectRef>
+          <a:fontRef idx="minor">
+            <a:schemeClr val="tx1"/>
+          </a:fontRef>
+        </p:style>
+      </p:cxnSp>
     </p:spTree>
   </p:cSld>
   <p:clrMapOvr>
     <a:masterClrMapping/>
   </p:clrMapOvr>
+  <p:timing>
+    <p:tnLst>
+      <p:par>
+        <p:cTn id="1" dur="indefinite" restart="never" nodeType="tmRoot"/>
+      </p:par>
+    </p:tnLst>
+  </p:timing>
 </p:sld>
 </file>
 
@@ -3392,11 +5066,7 @@
           <a:p>
             <a:r>
               <a:rPr lang="pt-BR" dirty="0" err="1" smtClean="0"/>
-              <a:t>UPRemote</a:t>
-            </a:r>
-            <a:r>
-              <a:rPr lang="pt-BR" baseline="0" dirty="0" err="1" smtClean="0"/>
-              <a:t>Engine</a:t>
+              <a:t>UPInferenceEngine</a:t>
             </a:r>
             <a:endParaRPr lang="pt-BR" dirty="0"/>
           </a:p>
@@ -3414,48 +5084,22 @@
         </p:nvSpPr>
         <p:spPr/>
         <p:txBody>
-          <a:bodyPr>
-            <a:normAutofit lnSpcReduction="10000"/>
-          </a:bodyPr>
+          <a:bodyPr/>
           <a:lstStyle/>
           <a:p>
             <a:r>
               <a:rPr lang="pt-BR" dirty="0" smtClean="0"/>
-              <a:t>Permite que código remoto seja executado no servidor</a:t>
-            </a:r>
-          </a:p>
-          <a:p>
-            <a:r>
-              <a:rPr lang="pt-BR" dirty="0" smtClean="0"/>
-              <a:t>Utiliza RMI</a:t>
-            </a:r>
-          </a:p>
-          <a:p>
-            <a:r>
-              <a:rPr lang="pt-BR" dirty="0" smtClean="0"/>
-              <a:t>Protegido, permite apenas acesso às trilhas </a:t>
-            </a:r>
-            <a:r>
-              <a:rPr lang="pt-BR" strike="sngStrike" dirty="0" smtClean="0"/>
-              <a:t>e ao perfil </a:t>
-            </a:r>
-            <a:r>
-              <a:rPr lang="pt-BR" dirty="0" smtClean="0"/>
-              <a:t>do usuário</a:t>
-            </a:r>
-          </a:p>
-          <a:p>
-            <a:r>
-              <a:rPr lang="pt-BR" dirty="0" smtClean="0"/>
-              <a:t>A trilha é disponibilizada através de um </a:t>
-            </a:r>
-            <a:r>
-              <a:rPr lang="pt-BR" i="1" dirty="0" err="1" smtClean="0"/>
-              <a:t>array</a:t>
-            </a:r>
-            <a:r>
-              <a:rPr lang="pt-BR" dirty="0" smtClean="0"/>
-              <a:t> de eventos</a:t>
+              <a:t>Infere os dados de perfil a</a:t>
+            </a:r>
+            <a:r>
+              <a:rPr lang="pt-BR" baseline="0" dirty="0" smtClean="0"/>
+              <a:t> partir das trilhas</a:t>
+            </a:r>
+          </a:p>
+          <a:p>
+            <a:r>
+              <a:rPr lang="pt-BR" baseline="0" dirty="0" smtClean="0"/>
+              <a:t>Implementação simples para demonstração: apenas conta o número de trocas de contexto</a:t>
             </a:r>
             <a:endParaRPr lang="pt-BR" dirty="0"/>
           </a:p>
@@ -3463,30 +5107,847 @@
       </p:sp>
       <p:sp>
         <p:nvSpPr>
-          <p:cNvPr id="5" name="Content Placeholder 4"/>
-          <p:cNvSpPr>
-            <a:spLocks noGrp="1"/>
-          </p:cNvSpPr>
-          <p:nvPr>
-            <p:ph sz="half" idx="2"/>
-          </p:nvPr>
-        </p:nvSpPr>
-        <p:spPr/>
-        <p:txBody>
-          <a:bodyPr>
-            <a:normAutofit lnSpcReduction="10000"/>
-          </a:bodyPr>
-          <a:lstStyle/>
-          <a:p>
-            <a:endParaRPr lang="pt-BR"/>
-          </a:p>
-        </p:txBody>
-      </p:sp>
+          <p:cNvPr id="6" name="Rectangle 5"/>
+          <p:cNvSpPr/>
+          <p:nvPr/>
+        </p:nvSpPr>
+        <p:spPr>
+          <a:xfrm>
+            <a:off x="6329374" y="1785926"/>
+            <a:ext cx="1457335" cy="714380"/>
+          </a:xfrm>
+          <a:prstGeom prst="rect">
+            <a:avLst/>
+          </a:prstGeom>
+        </p:spPr>
+        <p:style>
+          <a:lnRef idx="2">
+            <a:schemeClr val="accent1"/>
+          </a:lnRef>
+          <a:fillRef idx="1">
+            <a:schemeClr val="lt1"/>
+          </a:fillRef>
+          <a:effectRef idx="0">
+            <a:schemeClr val="accent1"/>
+          </a:effectRef>
+          <a:fontRef idx="minor">
+            <a:schemeClr val="dk1"/>
+          </a:fontRef>
+        </p:style>
+        <p:txBody>
+          <a:bodyPr rtlCol="0" anchor="ctr"/>
+          <a:lstStyle/>
+          <a:p>
+            <a:pPr algn="ctr"/>
+            <a:r>
+              <a:rPr lang="pt-BR" sz="1200" b="1" dirty="0" smtClean="0"/>
+              <a:t>UPCommunication</a:t>
+            </a:r>
+            <a:endParaRPr lang="pt-BR" sz="1200" b="1" dirty="0"/>
+          </a:p>
+        </p:txBody>
+      </p:sp>
+      <p:sp>
+        <p:nvSpPr>
+          <p:cNvPr id="7" name="Rectangle 6"/>
+          <p:cNvSpPr/>
+          <p:nvPr/>
+        </p:nvSpPr>
+        <p:spPr>
+          <a:xfrm>
+            <a:off x="6329374" y="2714620"/>
+            <a:ext cx="1457335" cy="714380"/>
+          </a:xfrm>
+          <a:prstGeom prst="rect">
+            <a:avLst/>
+          </a:prstGeom>
+        </p:spPr>
+        <p:style>
+          <a:lnRef idx="2">
+            <a:schemeClr val="accent1"/>
+          </a:lnRef>
+          <a:fillRef idx="1">
+            <a:schemeClr val="lt1"/>
+          </a:fillRef>
+          <a:effectRef idx="0">
+            <a:schemeClr val="accent1"/>
+          </a:effectRef>
+          <a:fontRef idx="minor">
+            <a:schemeClr val="dk1"/>
+          </a:fontRef>
+        </p:style>
+        <p:txBody>
+          <a:bodyPr rtlCol="0" anchor="ctr"/>
+          <a:lstStyle/>
+          <a:p>
+            <a:pPr algn="ctr"/>
+            <a:r>
+              <a:rPr lang="pt-BR" sz="1200" b="1" dirty="0" smtClean="0"/>
+              <a:t>UPAuthentication</a:t>
+            </a:r>
+            <a:endParaRPr lang="pt-BR" sz="1200" b="1" dirty="0"/>
+          </a:p>
+        </p:txBody>
+      </p:sp>
+      <p:sp>
+        <p:nvSpPr>
+          <p:cNvPr id="8" name="Rectangle 7"/>
+          <p:cNvSpPr/>
+          <p:nvPr/>
+        </p:nvSpPr>
+        <p:spPr>
+          <a:xfrm>
+            <a:off x="6329374" y="3643314"/>
+            <a:ext cx="1457335" cy="714380"/>
+          </a:xfrm>
+          <a:prstGeom prst="rect">
+            <a:avLst/>
+          </a:prstGeom>
+        </p:spPr>
+        <p:style>
+          <a:lnRef idx="2">
+            <a:schemeClr val="accent1"/>
+          </a:lnRef>
+          <a:fillRef idx="1">
+            <a:schemeClr val="lt1"/>
+          </a:fillRef>
+          <a:effectRef idx="0">
+            <a:schemeClr val="accent1"/>
+          </a:effectRef>
+          <a:fontRef idx="minor">
+            <a:schemeClr val="dk1"/>
+          </a:fontRef>
+        </p:style>
+        <p:txBody>
+          <a:bodyPr rtlCol="0" anchor="ctr"/>
+          <a:lstStyle/>
+          <a:p>
+            <a:pPr algn="ctr"/>
+            <a:r>
+              <a:rPr lang="pt-BR" sz="1200" b="1" dirty="0" smtClean="0"/>
+              <a:t>UPServices</a:t>
+            </a:r>
+            <a:endParaRPr lang="pt-BR" sz="1200" b="1" dirty="0"/>
+          </a:p>
+        </p:txBody>
+      </p:sp>
+      <p:sp>
+        <p:nvSpPr>
+          <p:cNvPr id="9" name="Rectangle 8"/>
+          <p:cNvSpPr/>
+          <p:nvPr/>
+        </p:nvSpPr>
+        <p:spPr>
+          <a:xfrm>
+            <a:off x="6329374" y="4572008"/>
+            <a:ext cx="1457335" cy="714380"/>
+          </a:xfrm>
+          <a:prstGeom prst="rect">
+            <a:avLst/>
+          </a:prstGeom>
+        </p:spPr>
+        <p:style>
+          <a:lnRef idx="2">
+            <a:schemeClr val="accent1"/>
+          </a:lnRef>
+          <a:fillRef idx="1">
+            <a:schemeClr val="lt1"/>
+          </a:fillRef>
+          <a:effectRef idx="0">
+            <a:schemeClr val="accent1"/>
+          </a:effectRef>
+          <a:fontRef idx="minor">
+            <a:schemeClr val="dk1"/>
+          </a:fontRef>
+        </p:style>
+        <p:txBody>
+          <a:bodyPr rtlCol="0" anchor="ctr"/>
+          <a:lstStyle/>
+          <a:p>
+            <a:pPr algn="ctr"/>
+            <a:r>
+              <a:rPr lang="pt-BR" sz="1200" b="1" dirty="0" smtClean="0"/>
+              <a:t>UPInferenceCache</a:t>
+            </a:r>
+            <a:endParaRPr lang="pt-BR" sz="1200" b="1" dirty="0"/>
+          </a:p>
+        </p:txBody>
+      </p:sp>
+      <p:sp>
+        <p:nvSpPr>
+          <p:cNvPr id="10" name="Rectangle 9"/>
+          <p:cNvSpPr/>
+          <p:nvPr/>
+        </p:nvSpPr>
+        <p:spPr>
+          <a:xfrm>
+            <a:off x="6329374" y="5500702"/>
+            <a:ext cx="1457335" cy="714380"/>
+          </a:xfrm>
+          <a:prstGeom prst="rect">
+            <a:avLst/>
+          </a:prstGeom>
+        </p:spPr>
+        <p:style>
+          <a:lnRef idx="2">
+            <a:schemeClr val="accent1">
+              <a:shade val="50000"/>
+            </a:schemeClr>
+          </a:lnRef>
+          <a:fillRef idx="1">
+            <a:schemeClr val="accent1"/>
+          </a:fillRef>
+          <a:effectRef idx="0">
+            <a:schemeClr val="accent1"/>
+          </a:effectRef>
+          <a:fontRef idx="minor">
+            <a:schemeClr val="lt1"/>
+          </a:fontRef>
+        </p:style>
+        <p:txBody>
+          <a:bodyPr rtlCol="0" anchor="ctr"/>
+          <a:lstStyle/>
+          <a:p>
+            <a:pPr algn="ctr"/>
+            <a:r>
+              <a:rPr lang="pt-BR" sz="1200" b="1" dirty="0" smtClean="0"/>
+              <a:t>UPInferenceEngine</a:t>
+            </a:r>
+            <a:endParaRPr lang="pt-BR" sz="1200" b="1" dirty="0"/>
+          </a:p>
+        </p:txBody>
+      </p:sp>
+      <p:sp>
+        <p:nvSpPr>
+          <p:cNvPr id="11" name="Cloud 10"/>
+          <p:cNvSpPr/>
+          <p:nvPr/>
+        </p:nvSpPr>
+        <p:spPr>
+          <a:xfrm>
+            <a:off x="4572000" y="1714488"/>
+            <a:ext cx="1143008" cy="928694"/>
+          </a:xfrm>
+          <a:prstGeom prst="cloud">
+            <a:avLst/>
+          </a:prstGeom>
+        </p:spPr>
+        <p:style>
+          <a:lnRef idx="2">
+            <a:schemeClr val="accent1"/>
+          </a:lnRef>
+          <a:fillRef idx="1">
+            <a:schemeClr val="lt1"/>
+          </a:fillRef>
+          <a:effectRef idx="0">
+            <a:schemeClr val="accent1"/>
+          </a:effectRef>
+          <a:fontRef idx="minor">
+            <a:schemeClr val="dk1"/>
+          </a:fontRef>
+        </p:style>
+        <p:txBody>
+          <a:bodyPr rtlCol="0" anchor="ctr"/>
+          <a:lstStyle/>
+          <a:p>
+            <a:pPr algn="ctr"/>
+            <a:r>
+              <a:rPr lang="pt-BR" sz="1200" b="1" dirty="0" smtClean="0"/>
+              <a:t>Internet</a:t>
+            </a:r>
+            <a:endParaRPr lang="pt-BR" sz="1200" b="1" dirty="0"/>
+          </a:p>
+        </p:txBody>
+      </p:sp>
+      <p:sp>
+        <p:nvSpPr>
+          <p:cNvPr id="12" name="Flowchart: Magnetic Disk 11"/>
+          <p:cNvSpPr/>
+          <p:nvPr/>
+        </p:nvSpPr>
+        <p:spPr>
+          <a:xfrm>
+            <a:off x="4857752" y="4857760"/>
+            <a:ext cx="871544" cy="857256"/>
+          </a:xfrm>
+          <a:prstGeom prst="flowChartMagneticDisk">
+            <a:avLst/>
+          </a:prstGeom>
+        </p:spPr>
+        <p:style>
+          <a:lnRef idx="2">
+            <a:schemeClr val="accent1"/>
+          </a:lnRef>
+          <a:fillRef idx="1">
+            <a:schemeClr val="lt1"/>
+          </a:fillRef>
+          <a:effectRef idx="0">
+            <a:schemeClr val="accent1"/>
+          </a:effectRef>
+          <a:fontRef idx="minor">
+            <a:schemeClr val="dk1"/>
+          </a:fontRef>
+        </p:style>
+        <p:txBody>
+          <a:bodyPr rtlCol="0" anchor="ctr"/>
+          <a:lstStyle/>
+          <a:p>
+            <a:pPr algn="ctr"/>
+            <a:r>
+              <a:rPr lang="pt-BR" sz="1200" b="1" dirty="0" smtClean="0"/>
+              <a:t>CacheDB</a:t>
+            </a:r>
+            <a:endParaRPr lang="pt-BR" sz="1200" b="1" dirty="0"/>
+          </a:p>
+        </p:txBody>
+      </p:sp>
+      <p:sp>
+        <p:nvSpPr>
+          <p:cNvPr id="13" name="Flowchart: Magnetic Disk 12"/>
+          <p:cNvSpPr/>
+          <p:nvPr/>
+        </p:nvSpPr>
+        <p:spPr>
+          <a:xfrm>
+            <a:off x="8215338" y="4429132"/>
+            <a:ext cx="728668" cy="857256"/>
+          </a:xfrm>
+          <a:prstGeom prst="flowChartMagneticDisk">
+            <a:avLst/>
+          </a:prstGeom>
+        </p:spPr>
+        <p:style>
+          <a:lnRef idx="2">
+            <a:schemeClr val="accent1">
+              <a:shade val="50000"/>
+            </a:schemeClr>
+          </a:lnRef>
+          <a:fillRef idx="1">
+            <a:schemeClr val="accent1"/>
+          </a:fillRef>
+          <a:effectRef idx="0">
+            <a:schemeClr val="accent1"/>
+          </a:effectRef>
+          <a:fontRef idx="minor">
+            <a:schemeClr val="lt1"/>
+          </a:fontRef>
+        </p:style>
+        <p:txBody>
+          <a:bodyPr rtlCol="0" anchor="ctr"/>
+          <a:lstStyle/>
+          <a:p>
+            <a:pPr algn="ctr"/>
+            <a:r>
+              <a:rPr lang="pt-BR" sz="1200" b="1" dirty="0" smtClean="0"/>
+              <a:t>TrailsDB</a:t>
+            </a:r>
+            <a:endParaRPr lang="pt-BR" sz="1200" b="1" dirty="0"/>
+          </a:p>
+        </p:txBody>
+      </p:sp>
+      <p:sp>
+        <p:nvSpPr>
+          <p:cNvPr id="14" name="Flowchart: Magnetic Disk 13"/>
+          <p:cNvSpPr/>
+          <p:nvPr/>
+        </p:nvSpPr>
+        <p:spPr>
+          <a:xfrm>
+            <a:off x="8143900" y="2643182"/>
+            <a:ext cx="728668" cy="857256"/>
+          </a:xfrm>
+          <a:prstGeom prst="flowChartMagneticDisk">
+            <a:avLst/>
+          </a:prstGeom>
+        </p:spPr>
+        <p:style>
+          <a:lnRef idx="2">
+            <a:schemeClr val="accent1"/>
+          </a:lnRef>
+          <a:fillRef idx="1">
+            <a:schemeClr val="lt1"/>
+          </a:fillRef>
+          <a:effectRef idx="0">
+            <a:schemeClr val="accent1"/>
+          </a:effectRef>
+          <a:fontRef idx="minor">
+            <a:schemeClr val="dk1"/>
+          </a:fontRef>
+        </p:style>
+        <p:txBody>
+          <a:bodyPr rtlCol="0" anchor="ctr"/>
+          <a:lstStyle/>
+          <a:p>
+            <a:pPr algn="ctr"/>
+            <a:r>
+              <a:rPr lang="pt-BR" sz="1200" b="1" dirty="0" smtClean="0"/>
+              <a:t>UserDB</a:t>
+            </a:r>
+            <a:endParaRPr lang="pt-BR" sz="1200" b="1" dirty="0"/>
+          </a:p>
+        </p:txBody>
+      </p:sp>
+      <p:sp>
+        <p:nvSpPr>
+          <p:cNvPr id="15" name="Rectangle 14"/>
+          <p:cNvSpPr/>
+          <p:nvPr/>
+        </p:nvSpPr>
+        <p:spPr>
+          <a:xfrm>
+            <a:off x="4429124" y="3643314"/>
+            <a:ext cx="1500198" cy="714380"/>
+          </a:xfrm>
+          <a:prstGeom prst="rect">
+            <a:avLst/>
+          </a:prstGeom>
+        </p:spPr>
+        <p:style>
+          <a:lnRef idx="2">
+            <a:schemeClr val="accent1"/>
+          </a:lnRef>
+          <a:fillRef idx="1">
+            <a:schemeClr val="lt1"/>
+          </a:fillRef>
+          <a:effectRef idx="0">
+            <a:schemeClr val="accent1"/>
+          </a:effectRef>
+          <a:fontRef idx="minor">
+            <a:schemeClr val="dk1"/>
+          </a:fontRef>
+        </p:style>
+        <p:txBody>
+          <a:bodyPr rtlCol="0" anchor="ctr"/>
+          <a:lstStyle/>
+          <a:p>
+            <a:pPr algn="ctr"/>
+            <a:r>
+              <a:rPr lang="pt-BR" sz="1200" b="1" dirty="0" smtClean="0"/>
+              <a:t>UPRemoteExecution</a:t>
+            </a:r>
+            <a:endParaRPr lang="pt-BR" sz="1200" b="1" dirty="0"/>
+          </a:p>
+        </p:txBody>
+      </p:sp>
+      <p:cxnSp>
+        <p:nvCxnSpPr>
+          <p:cNvPr id="16" name="Straight Arrow Connector 15"/>
+          <p:cNvCxnSpPr>
+            <a:stCxn id="11" idx="0"/>
+            <a:endCxn id="6" idx="1"/>
+          </p:cNvCxnSpPr>
+          <p:nvPr/>
+        </p:nvCxnSpPr>
+        <p:spPr>
+          <a:xfrm flipV="1">
+            <a:off x="5714055" y="2143116"/>
+            <a:ext cx="615319" cy="35719"/>
+          </a:xfrm>
+          <a:prstGeom prst="straightConnector1">
+            <a:avLst/>
+          </a:prstGeom>
+          <a:ln>
+            <a:headEnd type="arrow"/>
+            <a:tailEnd type="arrow"/>
+          </a:ln>
+        </p:spPr>
+        <p:style>
+          <a:lnRef idx="2">
+            <a:schemeClr val="accent1"/>
+          </a:lnRef>
+          <a:fillRef idx="1">
+            <a:schemeClr val="lt1"/>
+          </a:fillRef>
+          <a:effectRef idx="0">
+            <a:schemeClr val="accent1"/>
+          </a:effectRef>
+          <a:fontRef idx="minor">
+            <a:schemeClr val="dk1"/>
+          </a:fontRef>
+        </p:style>
+      </p:cxnSp>
+      <p:cxnSp>
+        <p:nvCxnSpPr>
+          <p:cNvPr id="17" name="Straight Arrow Connector 16"/>
+          <p:cNvCxnSpPr>
+            <a:stCxn id="15" idx="0"/>
+            <a:endCxn id="11" idx="1"/>
+          </p:cNvCxnSpPr>
+          <p:nvPr/>
+        </p:nvCxnSpPr>
+        <p:spPr>
+          <a:xfrm rot="16200000" flipV="1">
+            <a:off x="4660804" y="3124894"/>
+            <a:ext cx="1001121" cy="35719"/>
+          </a:xfrm>
+          <a:prstGeom prst="straightConnector1">
+            <a:avLst/>
+          </a:prstGeom>
+          <a:ln>
+            <a:headEnd type="arrow"/>
+            <a:tailEnd type="arrow"/>
+          </a:ln>
+        </p:spPr>
+        <p:style>
+          <a:lnRef idx="2">
+            <a:schemeClr val="accent1"/>
+          </a:lnRef>
+          <a:fillRef idx="1">
+            <a:schemeClr val="lt1"/>
+          </a:fillRef>
+          <a:effectRef idx="0">
+            <a:schemeClr val="accent1"/>
+          </a:effectRef>
+          <a:fontRef idx="minor">
+            <a:schemeClr val="dk1"/>
+          </a:fontRef>
+        </p:style>
+      </p:cxnSp>
+      <p:cxnSp>
+        <p:nvCxnSpPr>
+          <p:cNvPr id="18" name="Straight Arrow Connector 17"/>
+          <p:cNvCxnSpPr>
+            <a:stCxn id="15" idx="3"/>
+            <a:endCxn id="8" idx="1"/>
+          </p:cNvCxnSpPr>
+          <p:nvPr/>
+        </p:nvCxnSpPr>
+        <p:spPr>
+          <a:xfrm>
+            <a:off x="5929322" y="4000504"/>
+            <a:ext cx="400052" cy="1588"/>
+          </a:xfrm>
+          <a:prstGeom prst="straightConnector1">
+            <a:avLst/>
+          </a:prstGeom>
+          <a:ln>
+            <a:headEnd type="arrow"/>
+            <a:tailEnd type="arrow"/>
+          </a:ln>
+        </p:spPr>
+        <p:style>
+          <a:lnRef idx="2">
+            <a:schemeClr val="accent1"/>
+          </a:lnRef>
+          <a:fillRef idx="1">
+            <a:schemeClr val="lt1"/>
+          </a:fillRef>
+          <a:effectRef idx="0">
+            <a:schemeClr val="accent1"/>
+          </a:effectRef>
+          <a:fontRef idx="minor">
+            <a:schemeClr val="dk1"/>
+          </a:fontRef>
+        </p:style>
+      </p:cxnSp>
+      <p:cxnSp>
+        <p:nvCxnSpPr>
+          <p:cNvPr id="19" name="Straight Arrow Connector 18"/>
+          <p:cNvCxnSpPr>
+            <a:stCxn id="12" idx="4"/>
+            <a:endCxn id="9" idx="1"/>
+          </p:cNvCxnSpPr>
+          <p:nvPr/>
+        </p:nvCxnSpPr>
+        <p:spPr>
+          <a:xfrm flipV="1">
+            <a:off x="5729296" y="4929198"/>
+            <a:ext cx="600078" cy="357190"/>
+          </a:xfrm>
+          <a:prstGeom prst="straightConnector1">
+            <a:avLst/>
+          </a:prstGeom>
+          <a:ln>
+            <a:headEnd type="arrow"/>
+            <a:tailEnd type="arrow"/>
+          </a:ln>
+        </p:spPr>
+        <p:style>
+          <a:lnRef idx="2">
+            <a:schemeClr val="accent1"/>
+          </a:lnRef>
+          <a:fillRef idx="1">
+            <a:schemeClr val="lt1"/>
+          </a:fillRef>
+          <a:effectRef idx="0">
+            <a:schemeClr val="accent1"/>
+          </a:effectRef>
+          <a:fontRef idx="minor">
+            <a:schemeClr val="dk1"/>
+          </a:fontRef>
+        </p:style>
+      </p:cxnSp>
+      <p:cxnSp>
+        <p:nvCxnSpPr>
+          <p:cNvPr id="20" name="Straight Arrow Connector 19"/>
+          <p:cNvCxnSpPr>
+            <a:stCxn id="7" idx="3"/>
+            <a:endCxn id="14" idx="2"/>
+          </p:cNvCxnSpPr>
+          <p:nvPr/>
+        </p:nvCxnSpPr>
+        <p:spPr>
+          <a:xfrm>
+            <a:off x="7786709" y="3071810"/>
+            <a:ext cx="357191" cy="1588"/>
+          </a:xfrm>
+          <a:prstGeom prst="straightConnector1">
+            <a:avLst/>
+          </a:prstGeom>
+          <a:ln>
+            <a:headEnd type="arrow"/>
+            <a:tailEnd type="arrow"/>
+          </a:ln>
+        </p:spPr>
+        <p:style>
+          <a:lnRef idx="2">
+            <a:schemeClr val="accent1"/>
+          </a:lnRef>
+          <a:fillRef idx="1">
+            <a:schemeClr val="lt1"/>
+          </a:fillRef>
+          <a:effectRef idx="0">
+            <a:schemeClr val="accent1"/>
+          </a:effectRef>
+          <a:fontRef idx="minor">
+            <a:schemeClr val="dk1"/>
+          </a:fontRef>
+        </p:style>
+      </p:cxnSp>
+      <p:cxnSp>
+        <p:nvCxnSpPr>
+          <p:cNvPr id="21" name="Straight Arrow Connector 20"/>
+          <p:cNvCxnSpPr>
+            <a:stCxn id="8" idx="3"/>
+            <a:endCxn id="13" idx="2"/>
+          </p:cNvCxnSpPr>
+          <p:nvPr/>
+        </p:nvCxnSpPr>
+        <p:spPr>
+          <a:xfrm>
+            <a:off x="7786709" y="4000504"/>
+            <a:ext cx="428629" cy="857256"/>
+          </a:xfrm>
+          <a:prstGeom prst="straightConnector1">
+            <a:avLst/>
+          </a:prstGeom>
+          <a:ln>
+            <a:headEnd type="arrow"/>
+            <a:tailEnd type="arrow"/>
+          </a:ln>
+        </p:spPr>
+        <p:style>
+          <a:lnRef idx="2">
+            <a:schemeClr val="accent1"/>
+          </a:lnRef>
+          <a:fillRef idx="1">
+            <a:schemeClr val="lt1"/>
+          </a:fillRef>
+          <a:effectRef idx="0">
+            <a:schemeClr val="accent1"/>
+          </a:effectRef>
+          <a:fontRef idx="minor">
+            <a:schemeClr val="dk1"/>
+          </a:fontRef>
+        </p:style>
+      </p:cxnSp>
+      <p:cxnSp>
+        <p:nvCxnSpPr>
+          <p:cNvPr id="22" name="Straight Arrow Connector 21"/>
+          <p:cNvCxnSpPr>
+            <a:stCxn id="13" idx="2"/>
+            <a:endCxn id="10" idx="3"/>
+          </p:cNvCxnSpPr>
+          <p:nvPr/>
+        </p:nvCxnSpPr>
+        <p:spPr>
+          <a:xfrm rot="10800000" flipV="1">
+            <a:off x="7786710" y="4857760"/>
+            <a:ext cx="428629" cy="1000132"/>
+          </a:xfrm>
+          <a:prstGeom prst="straightConnector1">
+            <a:avLst/>
+          </a:prstGeom>
+          <a:ln>
+            <a:headEnd type="arrow"/>
+            <a:tailEnd type="arrow"/>
+          </a:ln>
+        </p:spPr>
+        <p:style>
+          <a:lnRef idx="2">
+            <a:schemeClr val="accent1"/>
+          </a:lnRef>
+          <a:fillRef idx="1">
+            <a:schemeClr val="lt1"/>
+          </a:fillRef>
+          <a:effectRef idx="0">
+            <a:schemeClr val="accent1"/>
+          </a:effectRef>
+          <a:fontRef idx="minor">
+            <a:schemeClr val="dk1"/>
+          </a:fontRef>
+        </p:style>
+      </p:cxnSp>
+      <p:cxnSp>
+        <p:nvCxnSpPr>
+          <p:cNvPr id="23" name="Straight Arrow Connector 22"/>
+          <p:cNvCxnSpPr>
+            <a:stCxn id="6" idx="2"/>
+            <a:endCxn id="7" idx="0"/>
+          </p:cNvCxnSpPr>
+          <p:nvPr/>
+        </p:nvCxnSpPr>
+        <p:spPr>
+          <a:xfrm rot="5400000">
+            <a:off x="6950885" y="2607463"/>
+            <a:ext cx="214314" cy="1588"/>
+          </a:xfrm>
+          <a:prstGeom prst="straightConnector1">
+            <a:avLst/>
+          </a:prstGeom>
+          <a:ln>
+            <a:headEnd type="arrow"/>
+            <a:tailEnd type="arrow"/>
+          </a:ln>
+        </p:spPr>
+        <p:style>
+          <a:lnRef idx="1">
+            <a:schemeClr val="accent1"/>
+          </a:lnRef>
+          <a:fillRef idx="0">
+            <a:schemeClr val="accent1"/>
+          </a:fillRef>
+          <a:effectRef idx="0">
+            <a:schemeClr val="accent1"/>
+          </a:effectRef>
+          <a:fontRef idx="minor">
+            <a:schemeClr val="tx1"/>
+          </a:fontRef>
+        </p:style>
+      </p:cxnSp>
+      <p:cxnSp>
+        <p:nvCxnSpPr>
+          <p:cNvPr id="24" name="Straight Arrow Connector 23"/>
+          <p:cNvCxnSpPr>
+            <a:stCxn id="7" idx="2"/>
+            <a:endCxn id="8" idx="0"/>
+          </p:cNvCxnSpPr>
+          <p:nvPr/>
+        </p:nvCxnSpPr>
+        <p:spPr>
+          <a:xfrm rot="5400000">
+            <a:off x="6950885" y="3536157"/>
+            <a:ext cx="214314" cy="1588"/>
+          </a:xfrm>
+          <a:prstGeom prst="straightConnector1">
+            <a:avLst/>
+          </a:prstGeom>
+          <a:ln>
+            <a:headEnd type="arrow"/>
+            <a:tailEnd type="arrow"/>
+          </a:ln>
+        </p:spPr>
+        <p:style>
+          <a:lnRef idx="1">
+            <a:schemeClr val="accent1"/>
+          </a:lnRef>
+          <a:fillRef idx="0">
+            <a:schemeClr val="accent1"/>
+          </a:fillRef>
+          <a:effectRef idx="0">
+            <a:schemeClr val="accent1"/>
+          </a:effectRef>
+          <a:fontRef idx="minor">
+            <a:schemeClr val="tx1"/>
+          </a:fontRef>
+        </p:style>
+      </p:cxnSp>
+      <p:cxnSp>
+        <p:nvCxnSpPr>
+          <p:cNvPr id="25" name="Straight Arrow Connector 24"/>
+          <p:cNvCxnSpPr>
+            <a:stCxn id="8" idx="2"/>
+            <a:endCxn id="9" idx="0"/>
+          </p:cNvCxnSpPr>
+          <p:nvPr/>
+        </p:nvCxnSpPr>
+        <p:spPr>
+          <a:xfrm rot="5400000">
+            <a:off x="6950885" y="4464851"/>
+            <a:ext cx="214314" cy="1588"/>
+          </a:xfrm>
+          <a:prstGeom prst="straightConnector1">
+            <a:avLst/>
+          </a:prstGeom>
+          <a:ln>
+            <a:headEnd type="arrow"/>
+            <a:tailEnd type="arrow"/>
+          </a:ln>
+        </p:spPr>
+        <p:style>
+          <a:lnRef idx="1">
+            <a:schemeClr val="accent1"/>
+          </a:lnRef>
+          <a:fillRef idx="0">
+            <a:schemeClr val="accent1"/>
+          </a:fillRef>
+          <a:effectRef idx="0">
+            <a:schemeClr val="accent1"/>
+          </a:effectRef>
+          <a:fontRef idx="minor">
+            <a:schemeClr val="tx1"/>
+          </a:fontRef>
+        </p:style>
+      </p:cxnSp>
+      <p:cxnSp>
+        <p:nvCxnSpPr>
+          <p:cNvPr id="26" name="Straight Arrow Connector 25"/>
+          <p:cNvCxnSpPr>
+            <a:stCxn id="9" idx="2"/>
+            <a:endCxn id="10" idx="0"/>
+          </p:cNvCxnSpPr>
+          <p:nvPr/>
+        </p:nvCxnSpPr>
+        <p:spPr>
+          <a:xfrm rot="5400000">
+            <a:off x="6950885" y="5393545"/>
+            <a:ext cx="214314" cy="1588"/>
+          </a:xfrm>
+          <a:prstGeom prst="straightConnector1">
+            <a:avLst/>
+          </a:prstGeom>
+          <a:ln>
+            <a:headEnd type="arrow"/>
+            <a:tailEnd type="arrow"/>
+          </a:ln>
+        </p:spPr>
+        <p:style>
+          <a:lnRef idx="1">
+            <a:schemeClr val="accent1"/>
+          </a:lnRef>
+          <a:fillRef idx="0">
+            <a:schemeClr val="accent1"/>
+          </a:fillRef>
+          <a:effectRef idx="0">
+            <a:schemeClr val="accent1"/>
+          </a:effectRef>
+          <a:fontRef idx="minor">
+            <a:schemeClr val="tx1"/>
+          </a:fontRef>
+        </p:style>
+      </p:cxnSp>
     </p:spTree>
   </p:cSld>
   <p:clrMapOvr>
     <a:masterClrMapping/>
   </p:clrMapOvr>
+  <p:timing>
+    <p:tnLst>
+      <p:par>
+        <p:cTn id="1" dur="indefinite" restart="never" nodeType="tmRoot"/>
+      </p:par>
+    </p:tnLst>
+  </p:timing>
 </p:sld>
 </file>
 
@@ -3523,8 +5984,12 @@
           <a:lstStyle/>
           <a:p>
             <a:r>
-              <a:rPr lang="pt-BR" dirty="0" smtClean="0"/>
-              <a:t>Protocolo de Comunicação</a:t>
+              <a:rPr lang="pt-BR" dirty="0" err="1" smtClean="0"/>
+              <a:t>UPRemote</a:t>
+            </a:r>
+            <a:r>
+              <a:rPr lang="pt-BR" baseline="0" dirty="0" err="1" smtClean="0"/>
+              <a:t>Engine</a:t>
             </a:r>
             <a:endParaRPr lang="pt-BR" dirty="0"/>
           </a:p>
@@ -3532,70 +5997,906 @@
       </p:sp>
       <p:sp>
         <p:nvSpPr>
-          <p:cNvPr id="3" name="Content Placeholder 2"/>
+          <p:cNvPr id="4" name="Content Placeholder 3"/>
           <p:cNvSpPr>
             <a:spLocks noGrp="1"/>
           </p:cNvSpPr>
           <p:nvPr>
-            <p:ph idx="1"/>
+            <p:ph sz="half" idx="1"/>
           </p:nvPr>
         </p:nvSpPr>
         <p:spPr/>
         <p:txBody>
-          <a:bodyPr/>
+          <a:bodyPr>
+            <a:normAutofit lnSpcReduction="10000"/>
+          </a:bodyPr>
           <a:lstStyle/>
           <a:p>
             <a:r>
               <a:rPr lang="pt-BR" dirty="0" smtClean="0"/>
-              <a:t>Comunicação via </a:t>
-            </a:r>
-            <a:r>
-              <a:rPr lang="pt-BR" dirty="0" err="1" smtClean="0"/>
-              <a:t>WebServices</a:t>
-            </a:r>
-            <a:endParaRPr lang="pt-BR" dirty="0" smtClean="0"/>
+              <a:t>Permite que código remoto seja executado no servidor</a:t>
+            </a:r>
           </a:p>
           <a:p>
             <a:r>
               <a:rPr lang="pt-BR" dirty="0" smtClean="0"/>
-              <a:t>Método de comunicação:</a:t>
-            </a:r>
-            <a:r>
-              <a:rPr lang="pt-BR" baseline="0" dirty="0" smtClean="0"/>
-              <a:t> REST sobre XML</a:t>
-            </a:r>
-          </a:p>
-          <a:p>
-            <a:pPr lvl="1"/>
+              <a:t>Utiliza RMI</a:t>
+            </a:r>
+          </a:p>
+          <a:p>
             <a:r>
               <a:rPr lang="pt-BR" dirty="0" smtClean="0"/>
-              <a:t>Foi escolhido ao invés de SOAP devido à necessidade de rodar em dispositivos móveis</a:t>
-            </a:r>
-            <a:endParaRPr lang="pt-BR" baseline="0" dirty="0" smtClean="0"/>
-          </a:p>
-          <a:p>
-            <a:r>
-              <a:rPr lang="pt-BR" baseline="0" dirty="0" smtClean="0"/>
-              <a:t>Implementação customizada</a:t>
-            </a:r>
-          </a:p>
-          <a:p>
-            <a:r>
-              <a:rPr lang="pt-BR" baseline="0" dirty="0" smtClean="0"/>
-              <a:t>Exemplo de comandos:</a:t>
-            </a:r>
-          </a:p>
-          <a:p>
-            <a:pPr lvl="1"/>
+              <a:t>Protegido, permite apenas acesso às trilhas </a:t>
+            </a:r>
+            <a:r>
+              <a:rPr lang="pt-BR" strike="sngStrike" dirty="0" smtClean="0"/>
+              <a:t>e ao perfil </a:t>
+            </a:r>
+            <a:r>
+              <a:rPr lang="pt-BR" dirty="0" smtClean="0"/>
+              <a:t>do usuário</a:t>
+            </a:r>
+          </a:p>
+          <a:p>
+            <a:r>
+              <a:rPr lang="pt-BR" dirty="0" smtClean="0"/>
+              <a:t>A trilha é disponibilizada através de um </a:t>
+            </a:r>
+            <a:r>
+              <a:rPr lang="pt-BR" i="1" dirty="0" err="1" smtClean="0"/>
+              <a:t>array</a:t>
+            </a:r>
+            <a:r>
+              <a:rPr lang="pt-BR" dirty="0" smtClean="0"/>
+              <a:t> de eventos</a:t>
+            </a:r>
             <a:endParaRPr lang="pt-BR" dirty="0"/>
           </a:p>
         </p:txBody>
       </p:sp>
+      <p:sp>
+        <p:nvSpPr>
+          <p:cNvPr id="6" name="Rectangle 5"/>
+          <p:cNvSpPr/>
+          <p:nvPr/>
+        </p:nvSpPr>
+        <p:spPr>
+          <a:xfrm>
+            <a:off x="6329374" y="1785926"/>
+            <a:ext cx="1457335" cy="714380"/>
+          </a:xfrm>
+          <a:prstGeom prst="rect">
+            <a:avLst/>
+          </a:prstGeom>
+        </p:spPr>
+        <p:style>
+          <a:lnRef idx="2">
+            <a:schemeClr val="accent1"/>
+          </a:lnRef>
+          <a:fillRef idx="1">
+            <a:schemeClr val="lt1"/>
+          </a:fillRef>
+          <a:effectRef idx="0">
+            <a:schemeClr val="accent1"/>
+          </a:effectRef>
+          <a:fontRef idx="minor">
+            <a:schemeClr val="dk1"/>
+          </a:fontRef>
+        </p:style>
+        <p:txBody>
+          <a:bodyPr rtlCol="0" anchor="ctr"/>
+          <a:lstStyle/>
+          <a:p>
+            <a:pPr algn="ctr"/>
+            <a:r>
+              <a:rPr lang="pt-BR" sz="1200" b="1" dirty="0" smtClean="0"/>
+              <a:t>UPCommunication</a:t>
+            </a:r>
+            <a:endParaRPr lang="pt-BR" sz="1200" b="1" dirty="0"/>
+          </a:p>
+        </p:txBody>
+      </p:sp>
+      <p:sp>
+        <p:nvSpPr>
+          <p:cNvPr id="7" name="Rectangle 6"/>
+          <p:cNvSpPr/>
+          <p:nvPr/>
+        </p:nvSpPr>
+        <p:spPr>
+          <a:xfrm>
+            <a:off x="6329374" y="2714620"/>
+            <a:ext cx="1457335" cy="714380"/>
+          </a:xfrm>
+          <a:prstGeom prst="rect">
+            <a:avLst/>
+          </a:prstGeom>
+        </p:spPr>
+        <p:style>
+          <a:lnRef idx="2">
+            <a:schemeClr val="accent1"/>
+          </a:lnRef>
+          <a:fillRef idx="1">
+            <a:schemeClr val="lt1"/>
+          </a:fillRef>
+          <a:effectRef idx="0">
+            <a:schemeClr val="accent1"/>
+          </a:effectRef>
+          <a:fontRef idx="minor">
+            <a:schemeClr val="dk1"/>
+          </a:fontRef>
+        </p:style>
+        <p:txBody>
+          <a:bodyPr rtlCol="0" anchor="ctr"/>
+          <a:lstStyle/>
+          <a:p>
+            <a:pPr algn="ctr"/>
+            <a:r>
+              <a:rPr lang="pt-BR" sz="1200" b="1" dirty="0" smtClean="0"/>
+              <a:t>UPAuthentication</a:t>
+            </a:r>
+            <a:endParaRPr lang="pt-BR" sz="1200" b="1" dirty="0"/>
+          </a:p>
+        </p:txBody>
+      </p:sp>
+      <p:sp>
+        <p:nvSpPr>
+          <p:cNvPr id="8" name="Rectangle 7"/>
+          <p:cNvSpPr/>
+          <p:nvPr/>
+        </p:nvSpPr>
+        <p:spPr>
+          <a:xfrm>
+            <a:off x="6329374" y="3643314"/>
+            <a:ext cx="1457335" cy="714380"/>
+          </a:xfrm>
+          <a:prstGeom prst="rect">
+            <a:avLst/>
+          </a:prstGeom>
+        </p:spPr>
+        <p:style>
+          <a:lnRef idx="2">
+            <a:schemeClr val="accent1"/>
+          </a:lnRef>
+          <a:fillRef idx="1">
+            <a:schemeClr val="lt1"/>
+          </a:fillRef>
+          <a:effectRef idx="0">
+            <a:schemeClr val="accent1"/>
+          </a:effectRef>
+          <a:fontRef idx="minor">
+            <a:schemeClr val="dk1"/>
+          </a:fontRef>
+        </p:style>
+        <p:txBody>
+          <a:bodyPr rtlCol="0" anchor="ctr"/>
+          <a:lstStyle/>
+          <a:p>
+            <a:pPr algn="ctr"/>
+            <a:r>
+              <a:rPr lang="pt-BR" sz="1200" b="1" dirty="0" smtClean="0"/>
+              <a:t>UPServices</a:t>
+            </a:r>
+            <a:endParaRPr lang="pt-BR" sz="1200" b="1" dirty="0"/>
+          </a:p>
+        </p:txBody>
+      </p:sp>
+      <p:sp>
+        <p:nvSpPr>
+          <p:cNvPr id="9" name="Rectangle 8"/>
+          <p:cNvSpPr/>
+          <p:nvPr/>
+        </p:nvSpPr>
+        <p:spPr>
+          <a:xfrm>
+            <a:off x="6329374" y="4572008"/>
+            <a:ext cx="1457335" cy="714380"/>
+          </a:xfrm>
+          <a:prstGeom prst="rect">
+            <a:avLst/>
+          </a:prstGeom>
+        </p:spPr>
+        <p:style>
+          <a:lnRef idx="2">
+            <a:schemeClr val="accent1"/>
+          </a:lnRef>
+          <a:fillRef idx="1">
+            <a:schemeClr val="lt1"/>
+          </a:fillRef>
+          <a:effectRef idx="0">
+            <a:schemeClr val="accent1"/>
+          </a:effectRef>
+          <a:fontRef idx="minor">
+            <a:schemeClr val="dk1"/>
+          </a:fontRef>
+        </p:style>
+        <p:txBody>
+          <a:bodyPr rtlCol="0" anchor="ctr"/>
+          <a:lstStyle/>
+          <a:p>
+            <a:pPr algn="ctr"/>
+            <a:r>
+              <a:rPr lang="pt-BR" sz="1200" b="1" dirty="0" smtClean="0"/>
+              <a:t>UPInferenceCache</a:t>
+            </a:r>
+            <a:endParaRPr lang="pt-BR" sz="1200" b="1" dirty="0"/>
+          </a:p>
+        </p:txBody>
+      </p:sp>
+      <p:sp>
+        <p:nvSpPr>
+          <p:cNvPr id="10" name="Rectangle 9"/>
+          <p:cNvSpPr/>
+          <p:nvPr/>
+        </p:nvSpPr>
+        <p:spPr>
+          <a:xfrm>
+            <a:off x="6329374" y="5500702"/>
+            <a:ext cx="1457335" cy="714380"/>
+          </a:xfrm>
+          <a:prstGeom prst="rect">
+            <a:avLst/>
+          </a:prstGeom>
+        </p:spPr>
+        <p:style>
+          <a:lnRef idx="2">
+            <a:schemeClr val="accent1"/>
+          </a:lnRef>
+          <a:fillRef idx="1">
+            <a:schemeClr val="lt1"/>
+          </a:fillRef>
+          <a:effectRef idx="0">
+            <a:schemeClr val="accent1"/>
+          </a:effectRef>
+          <a:fontRef idx="minor">
+            <a:schemeClr val="dk1"/>
+          </a:fontRef>
+        </p:style>
+        <p:txBody>
+          <a:bodyPr rtlCol="0" anchor="ctr"/>
+          <a:lstStyle/>
+          <a:p>
+            <a:pPr algn="ctr"/>
+            <a:r>
+              <a:rPr lang="pt-BR" sz="1200" b="1" dirty="0" smtClean="0"/>
+              <a:t>UPInferenceEngine</a:t>
+            </a:r>
+            <a:endParaRPr lang="pt-BR" sz="1200" b="1" dirty="0"/>
+          </a:p>
+        </p:txBody>
+      </p:sp>
+      <p:sp>
+        <p:nvSpPr>
+          <p:cNvPr id="11" name="Cloud 10"/>
+          <p:cNvSpPr/>
+          <p:nvPr/>
+        </p:nvSpPr>
+        <p:spPr>
+          <a:xfrm>
+            <a:off x="4572000" y="1714488"/>
+            <a:ext cx="1143008" cy="928694"/>
+          </a:xfrm>
+          <a:prstGeom prst="cloud">
+            <a:avLst/>
+          </a:prstGeom>
+        </p:spPr>
+        <p:style>
+          <a:lnRef idx="2">
+            <a:schemeClr val="accent1">
+              <a:shade val="50000"/>
+            </a:schemeClr>
+          </a:lnRef>
+          <a:fillRef idx="1">
+            <a:schemeClr val="accent1"/>
+          </a:fillRef>
+          <a:effectRef idx="0">
+            <a:schemeClr val="accent1"/>
+          </a:effectRef>
+          <a:fontRef idx="minor">
+            <a:schemeClr val="lt1"/>
+          </a:fontRef>
+        </p:style>
+        <p:txBody>
+          <a:bodyPr rtlCol="0" anchor="ctr"/>
+          <a:lstStyle/>
+          <a:p>
+            <a:pPr algn="ctr"/>
+            <a:r>
+              <a:rPr lang="pt-BR" sz="1200" b="1" dirty="0" smtClean="0"/>
+              <a:t>Internet</a:t>
+            </a:r>
+            <a:endParaRPr lang="pt-BR" sz="1200" b="1" dirty="0"/>
+          </a:p>
+        </p:txBody>
+      </p:sp>
+      <p:sp>
+        <p:nvSpPr>
+          <p:cNvPr id="12" name="Flowchart: Magnetic Disk 11"/>
+          <p:cNvSpPr/>
+          <p:nvPr/>
+        </p:nvSpPr>
+        <p:spPr>
+          <a:xfrm>
+            <a:off x="4857752" y="4857760"/>
+            <a:ext cx="871544" cy="857256"/>
+          </a:xfrm>
+          <a:prstGeom prst="flowChartMagneticDisk">
+            <a:avLst/>
+          </a:prstGeom>
+        </p:spPr>
+        <p:style>
+          <a:lnRef idx="2">
+            <a:schemeClr val="accent1"/>
+          </a:lnRef>
+          <a:fillRef idx="1">
+            <a:schemeClr val="lt1"/>
+          </a:fillRef>
+          <a:effectRef idx="0">
+            <a:schemeClr val="accent1"/>
+          </a:effectRef>
+          <a:fontRef idx="minor">
+            <a:schemeClr val="dk1"/>
+          </a:fontRef>
+        </p:style>
+        <p:txBody>
+          <a:bodyPr rtlCol="0" anchor="ctr"/>
+          <a:lstStyle/>
+          <a:p>
+            <a:pPr algn="ctr"/>
+            <a:r>
+              <a:rPr lang="pt-BR" sz="1200" b="1" dirty="0" smtClean="0"/>
+              <a:t>CacheDB</a:t>
+            </a:r>
+            <a:endParaRPr lang="pt-BR" sz="1200" b="1" dirty="0"/>
+          </a:p>
+        </p:txBody>
+      </p:sp>
+      <p:sp>
+        <p:nvSpPr>
+          <p:cNvPr id="13" name="Flowchart: Magnetic Disk 12"/>
+          <p:cNvSpPr/>
+          <p:nvPr/>
+        </p:nvSpPr>
+        <p:spPr>
+          <a:xfrm>
+            <a:off x="8215338" y="4429132"/>
+            <a:ext cx="728668" cy="857256"/>
+          </a:xfrm>
+          <a:prstGeom prst="flowChartMagneticDisk">
+            <a:avLst/>
+          </a:prstGeom>
+        </p:spPr>
+        <p:style>
+          <a:lnRef idx="2">
+            <a:schemeClr val="accent1"/>
+          </a:lnRef>
+          <a:fillRef idx="1">
+            <a:schemeClr val="lt1"/>
+          </a:fillRef>
+          <a:effectRef idx="0">
+            <a:schemeClr val="accent1"/>
+          </a:effectRef>
+          <a:fontRef idx="minor">
+            <a:schemeClr val="dk1"/>
+          </a:fontRef>
+        </p:style>
+        <p:txBody>
+          <a:bodyPr rtlCol="0" anchor="ctr"/>
+          <a:lstStyle/>
+          <a:p>
+            <a:pPr algn="ctr"/>
+            <a:r>
+              <a:rPr lang="pt-BR" sz="1200" b="1" dirty="0" smtClean="0"/>
+              <a:t>TrailsDB</a:t>
+            </a:r>
+            <a:endParaRPr lang="pt-BR" sz="1200" b="1" dirty="0"/>
+          </a:p>
+        </p:txBody>
+      </p:sp>
+      <p:sp>
+        <p:nvSpPr>
+          <p:cNvPr id="14" name="Flowchart: Magnetic Disk 13"/>
+          <p:cNvSpPr/>
+          <p:nvPr/>
+        </p:nvSpPr>
+        <p:spPr>
+          <a:xfrm>
+            <a:off x="8143900" y="2643182"/>
+            <a:ext cx="728668" cy="857256"/>
+          </a:xfrm>
+          <a:prstGeom prst="flowChartMagneticDisk">
+            <a:avLst/>
+          </a:prstGeom>
+        </p:spPr>
+        <p:style>
+          <a:lnRef idx="2">
+            <a:schemeClr val="accent1"/>
+          </a:lnRef>
+          <a:fillRef idx="1">
+            <a:schemeClr val="lt1"/>
+          </a:fillRef>
+          <a:effectRef idx="0">
+            <a:schemeClr val="accent1"/>
+          </a:effectRef>
+          <a:fontRef idx="minor">
+            <a:schemeClr val="dk1"/>
+          </a:fontRef>
+        </p:style>
+        <p:txBody>
+          <a:bodyPr rtlCol="0" anchor="ctr"/>
+          <a:lstStyle/>
+          <a:p>
+            <a:pPr algn="ctr"/>
+            <a:r>
+              <a:rPr lang="pt-BR" sz="1200" b="1" dirty="0" smtClean="0"/>
+              <a:t>UserDB</a:t>
+            </a:r>
+            <a:endParaRPr lang="pt-BR" sz="1200" b="1" dirty="0"/>
+          </a:p>
+        </p:txBody>
+      </p:sp>
+      <p:sp>
+        <p:nvSpPr>
+          <p:cNvPr id="15" name="Rectangle 14"/>
+          <p:cNvSpPr/>
+          <p:nvPr/>
+        </p:nvSpPr>
+        <p:spPr>
+          <a:xfrm>
+            <a:off x="4429124" y="3643314"/>
+            <a:ext cx="1500198" cy="714380"/>
+          </a:xfrm>
+          <a:prstGeom prst="rect">
+            <a:avLst/>
+          </a:prstGeom>
+        </p:spPr>
+        <p:style>
+          <a:lnRef idx="2">
+            <a:schemeClr val="accent1">
+              <a:shade val="50000"/>
+            </a:schemeClr>
+          </a:lnRef>
+          <a:fillRef idx="1">
+            <a:schemeClr val="accent1"/>
+          </a:fillRef>
+          <a:effectRef idx="0">
+            <a:schemeClr val="accent1"/>
+          </a:effectRef>
+          <a:fontRef idx="minor">
+            <a:schemeClr val="lt1"/>
+          </a:fontRef>
+        </p:style>
+        <p:txBody>
+          <a:bodyPr rtlCol="0" anchor="ctr"/>
+          <a:lstStyle/>
+          <a:p>
+            <a:pPr algn="ctr"/>
+            <a:r>
+              <a:rPr lang="pt-BR" sz="1200" b="1" dirty="0" smtClean="0"/>
+              <a:t>UPRemoteExecution</a:t>
+            </a:r>
+            <a:endParaRPr lang="pt-BR" sz="1200" b="1" dirty="0"/>
+          </a:p>
+        </p:txBody>
+      </p:sp>
+      <p:cxnSp>
+        <p:nvCxnSpPr>
+          <p:cNvPr id="16" name="Straight Arrow Connector 15"/>
+          <p:cNvCxnSpPr>
+            <a:stCxn id="11" idx="0"/>
+            <a:endCxn id="6" idx="1"/>
+          </p:cNvCxnSpPr>
+          <p:nvPr/>
+        </p:nvCxnSpPr>
+        <p:spPr>
+          <a:xfrm flipV="1">
+            <a:off x="5714055" y="2143116"/>
+            <a:ext cx="615319" cy="35719"/>
+          </a:xfrm>
+          <a:prstGeom prst="straightConnector1">
+            <a:avLst/>
+          </a:prstGeom>
+          <a:ln>
+            <a:headEnd type="arrow"/>
+            <a:tailEnd type="arrow"/>
+          </a:ln>
+        </p:spPr>
+        <p:style>
+          <a:lnRef idx="2">
+            <a:schemeClr val="accent1"/>
+          </a:lnRef>
+          <a:fillRef idx="1">
+            <a:schemeClr val="lt1"/>
+          </a:fillRef>
+          <a:effectRef idx="0">
+            <a:schemeClr val="accent1"/>
+          </a:effectRef>
+          <a:fontRef idx="minor">
+            <a:schemeClr val="dk1"/>
+          </a:fontRef>
+        </p:style>
+      </p:cxnSp>
+      <p:cxnSp>
+        <p:nvCxnSpPr>
+          <p:cNvPr id="17" name="Straight Arrow Connector 16"/>
+          <p:cNvCxnSpPr>
+            <a:stCxn id="15" idx="0"/>
+            <a:endCxn id="11" idx="1"/>
+          </p:cNvCxnSpPr>
+          <p:nvPr/>
+        </p:nvCxnSpPr>
+        <p:spPr>
+          <a:xfrm rot="16200000" flipV="1">
+            <a:off x="4660804" y="3124894"/>
+            <a:ext cx="1001121" cy="35719"/>
+          </a:xfrm>
+          <a:prstGeom prst="straightConnector1">
+            <a:avLst/>
+          </a:prstGeom>
+          <a:ln>
+            <a:headEnd type="arrow"/>
+            <a:tailEnd type="arrow"/>
+          </a:ln>
+        </p:spPr>
+        <p:style>
+          <a:lnRef idx="2">
+            <a:schemeClr val="accent1"/>
+          </a:lnRef>
+          <a:fillRef idx="1">
+            <a:schemeClr val="lt1"/>
+          </a:fillRef>
+          <a:effectRef idx="0">
+            <a:schemeClr val="accent1"/>
+          </a:effectRef>
+          <a:fontRef idx="minor">
+            <a:schemeClr val="dk1"/>
+          </a:fontRef>
+        </p:style>
+      </p:cxnSp>
+      <p:cxnSp>
+        <p:nvCxnSpPr>
+          <p:cNvPr id="18" name="Straight Arrow Connector 17"/>
+          <p:cNvCxnSpPr>
+            <a:stCxn id="15" idx="3"/>
+            <a:endCxn id="8" idx="1"/>
+          </p:cNvCxnSpPr>
+          <p:nvPr/>
+        </p:nvCxnSpPr>
+        <p:spPr>
+          <a:xfrm>
+            <a:off x="5929322" y="4000504"/>
+            <a:ext cx="400052" cy="1588"/>
+          </a:xfrm>
+          <a:prstGeom prst="straightConnector1">
+            <a:avLst/>
+          </a:prstGeom>
+          <a:ln>
+            <a:headEnd type="arrow"/>
+            <a:tailEnd type="arrow"/>
+          </a:ln>
+        </p:spPr>
+        <p:style>
+          <a:lnRef idx="2">
+            <a:schemeClr val="accent1"/>
+          </a:lnRef>
+          <a:fillRef idx="1">
+            <a:schemeClr val="lt1"/>
+          </a:fillRef>
+          <a:effectRef idx="0">
+            <a:schemeClr val="accent1"/>
+          </a:effectRef>
+          <a:fontRef idx="minor">
+            <a:schemeClr val="dk1"/>
+          </a:fontRef>
+        </p:style>
+      </p:cxnSp>
+      <p:cxnSp>
+        <p:nvCxnSpPr>
+          <p:cNvPr id="19" name="Straight Arrow Connector 18"/>
+          <p:cNvCxnSpPr>
+            <a:stCxn id="12" idx="4"/>
+            <a:endCxn id="9" idx="1"/>
+          </p:cNvCxnSpPr>
+          <p:nvPr/>
+        </p:nvCxnSpPr>
+        <p:spPr>
+          <a:xfrm flipV="1">
+            <a:off x="5729296" y="4929198"/>
+            <a:ext cx="600078" cy="357190"/>
+          </a:xfrm>
+          <a:prstGeom prst="straightConnector1">
+            <a:avLst/>
+          </a:prstGeom>
+          <a:ln>
+            <a:headEnd type="arrow"/>
+            <a:tailEnd type="arrow"/>
+          </a:ln>
+        </p:spPr>
+        <p:style>
+          <a:lnRef idx="2">
+            <a:schemeClr val="accent1"/>
+          </a:lnRef>
+          <a:fillRef idx="1">
+            <a:schemeClr val="lt1"/>
+          </a:fillRef>
+          <a:effectRef idx="0">
+            <a:schemeClr val="accent1"/>
+          </a:effectRef>
+          <a:fontRef idx="minor">
+            <a:schemeClr val="dk1"/>
+          </a:fontRef>
+        </p:style>
+      </p:cxnSp>
+      <p:cxnSp>
+        <p:nvCxnSpPr>
+          <p:cNvPr id="20" name="Straight Arrow Connector 19"/>
+          <p:cNvCxnSpPr>
+            <a:stCxn id="7" idx="3"/>
+            <a:endCxn id="14" idx="2"/>
+          </p:cNvCxnSpPr>
+          <p:nvPr/>
+        </p:nvCxnSpPr>
+        <p:spPr>
+          <a:xfrm>
+            <a:off x="7786709" y="3071810"/>
+            <a:ext cx="357191" cy="1588"/>
+          </a:xfrm>
+          <a:prstGeom prst="straightConnector1">
+            <a:avLst/>
+          </a:prstGeom>
+          <a:ln>
+            <a:headEnd type="arrow"/>
+            <a:tailEnd type="arrow"/>
+          </a:ln>
+        </p:spPr>
+        <p:style>
+          <a:lnRef idx="2">
+            <a:schemeClr val="accent1"/>
+          </a:lnRef>
+          <a:fillRef idx="1">
+            <a:schemeClr val="lt1"/>
+          </a:fillRef>
+          <a:effectRef idx="0">
+            <a:schemeClr val="accent1"/>
+          </a:effectRef>
+          <a:fontRef idx="minor">
+            <a:schemeClr val="dk1"/>
+          </a:fontRef>
+        </p:style>
+      </p:cxnSp>
+      <p:cxnSp>
+        <p:nvCxnSpPr>
+          <p:cNvPr id="21" name="Straight Arrow Connector 20"/>
+          <p:cNvCxnSpPr>
+            <a:stCxn id="8" idx="3"/>
+            <a:endCxn id="13" idx="2"/>
+          </p:cNvCxnSpPr>
+          <p:nvPr/>
+        </p:nvCxnSpPr>
+        <p:spPr>
+          <a:xfrm>
+            <a:off x="7786709" y="4000504"/>
+            <a:ext cx="428629" cy="857256"/>
+          </a:xfrm>
+          <a:prstGeom prst="straightConnector1">
+            <a:avLst/>
+          </a:prstGeom>
+          <a:ln>
+            <a:headEnd type="arrow"/>
+            <a:tailEnd type="arrow"/>
+          </a:ln>
+        </p:spPr>
+        <p:style>
+          <a:lnRef idx="2">
+            <a:schemeClr val="accent1"/>
+          </a:lnRef>
+          <a:fillRef idx="1">
+            <a:schemeClr val="lt1"/>
+          </a:fillRef>
+          <a:effectRef idx="0">
+            <a:schemeClr val="accent1"/>
+          </a:effectRef>
+          <a:fontRef idx="minor">
+            <a:schemeClr val="dk1"/>
+          </a:fontRef>
+        </p:style>
+      </p:cxnSp>
+      <p:cxnSp>
+        <p:nvCxnSpPr>
+          <p:cNvPr id="22" name="Straight Arrow Connector 21"/>
+          <p:cNvCxnSpPr>
+            <a:stCxn id="13" idx="2"/>
+            <a:endCxn id="10" idx="3"/>
+          </p:cNvCxnSpPr>
+          <p:nvPr/>
+        </p:nvCxnSpPr>
+        <p:spPr>
+          <a:xfrm rot="10800000" flipV="1">
+            <a:off x="7786710" y="4857760"/>
+            <a:ext cx="428629" cy="1000132"/>
+          </a:xfrm>
+          <a:prstGeom prst="straightConnector1">
+            <a:avLst/>
+          </a:prstGeom>
+          <a:ln>
+            <a:headEnd type="arrow"/>
+            <a:tailEnd type="arrow"/>
+          </a:ln>
+        </p:spPr>
+        <p:style>
+          <a:lnRef idx="2">
+            <a:schemeClr val="accent1"/>
+          </a:lnRef>
+          <a:fillRef idx="1">
+            <a:schemeClr val="lt1"/>
+          </a:fillRef>
+          <a:effectRef idx="0">
+            <a:schemeClr val="accent1"/>
+          </a:effectRef>
+          <a:fontRef idx="minor">
+            <a:schemeClr val="dk1"/>
+          </a:fontRef>
+        </p:style>
+      </p:cxnSp>
+      <p:cxnSp>
+        <p:nvCxnSpPr>
+          <p:cNvPr id="23" name="Straight Arrow Connector 22"/>
+          <p:cNvCxnSpPr>
+            <a:stCxn id="6" idx="2"/>
+            <a:endCxn id="7" idx="0"/>
+          </p:cNvCxnSpPr>
+          <p:nvPr/>
+        </p:nvCxnSpPr>
+        <p:spPr>
+          <a:xfrm rot="5400000">
+            <a:off x="6950885" y="2607463"/>
+            <a:ext cx="214314" cy="1588"/>
+          </a:xfrm>
+          <a:prstGeom prst="straightConnector1">
+            <a:avLst/>
+          </a:prstGeom>
+          <a:ln>
+            <a:headEnd type="arrow"/>
+            <a:tailEnd type="arrow"/>
+          </a:ln>
+        </p:spPr>
+        <p:style>
+          <a:lnRef idx="1">
+            <a:schemeClr val="accent1"/>
+          </a:lnRef>
+          <a:fillRef idx="0">
+            <a:schemeClr val="accent1"/>
+          </a:fillRef>
+          <a:effectRef idx="0">
+            <a:schemeClr val="accent1"/>
+          </a:effectRef>
+          <a:fontRef idx="minor">
+            <a:schemeClr val="tx1"/>
+          </a:fontRef>
+        </p:style>
+      </p:cxnSp>
+      <p:cxnSp>
+        <p:nvCxnSpPr>
+          <p:cNvPr id="24" name="Straight Arrow Connector 23"/>
+          <p:cNvCxnSpPr>
+            <a:stCxn id="7" idx="2"/>
+            <a:endCxn id="8" idx="0"/>
+          </p:cNvCxnSpPr>
+          <p:nvPr/>
+        </p:nvCxnSpPr>
+        <p:spPr>
+          <a:xfrm rot="5400000">
+            <a:off x="6950885" y="3536157"/>
+            <a:ext cx="214314" cy="1588"/>
+          </a:xfrm>
+          <a:prstGeom prst="straightConnector1">
+            <a:avLst/>
+          </a:prstGeom>
+          <a:ln>
+            <a:headEnd type="arrow"/>
+            <a:tailEnd type="arrow"/>
+          </a:ln>
+        </p:spPr>
+        <p:style>
+          <a:lnRef idx="1">
+            <a:schemeClr val="accent1"/>
+          </a:lnRef>
+          <a:fillRef idx="0">
+            <a:schemeClr val="accent1"/>
+          </a:fillRef>
+          <a:effectRef idx="0">
+            <a:schemeClr val="accent1"/>
+          </a:effectRef>
+          <a:fontRef idx="minor">
+            <a:schemeClr val="tx1"/>
+          </a:fontRef>
+        </p:style>
+      </p:cxnSp>
+      <p:cxnSp>
+        <p:nvCxnSpPr>
+          <p:cNvPr id="25" name="Straight Arrow Connector 24"/>
+          <p:cNvCxnSpPr>
+            <a:stCxn id="8" idx="2"/>
+            <a:endCxn id="9" idx="0"/>
+          </p:cNvCxnSpPr>
+          <p:nvPr/>
+        </p:nvCxnSpPr>
+        <p:spPr>
+          <a:xfrm rot="5400000">
+            <a:off x="6950885" y="4464851"/>
+            <a:ext cx="214314" cy="1588"/>
+          </a:xfrm>
+          <a:prstGeom prst="straightConnector1">
+            <a:avLst/>
+          </a:prstGeom>
+          <a:ln>
+            <a:headEnd type="arrow"/>
+            <a:tailEnd type="arrow"/>
+          </a:ln>
+        </p:spPr>
+        <p:style>
+          <a:lnRef idx="1">
+            <a:schemeClr val="accent1"/>
+          </a:lnRef>
+          <a:fillRef idx="0">
+            <a:schemeClr val="accent1"/>
+          </a:fillRef>
+          <a:effectRef idx="0">
+            <a:schemeClr val="accent1"/>
+          </a:effectRef>
+          <a:fontRef idx="minor">
+            <a:schemeClr val="tx1"/>
+          </a:fontRef>
+        </p:style>
+      </p:cxnSp>
+      <p:cxnSp>
+        <p:nvCxnSpPr>
+          <p:cNvPr id="26" name="Straight Arrow Connector 25"/>
+          <p:cNvCxnSpPr>
+            <a:stCxn id="9" idx="2"/>
+            <a:endCxn id="10" idx="0"/>
+          </p:cNvCxnSpPr>
+          <p:nvPr/>
+        </p:nvCxnSpPr>
+        <p:spPr>
+          <a:xfrm rot="5400000">
+            <a:off x="6950885" y="5393545"/>
+            <a:ext cx="214314" cy="1588"/>
+          </a:xfrm>
+          <a:prstGeom prst="straightConnector1">
+            <a:avLst/>
+          </a:prstGeom>
+          <a:ln>
+            <a:headEnd type="arrow"/>
+            <a:tailEnd type="arrow"/>
+          </a:ln>
+        </p:spPr>
+        <p:style>
+          <a:lnRef idx="1">
+            <a:schemeClr val="accent1"/>
+          </a:lnRef>
+          <a:fillRef idx="0">
+            <a:schemeClr val="accent1"/>
+          </a:fillRef>
+          <a:effectRef idx="0">
+            <a:schemeClr val="accent1"/>
+          </a:effectRef>
+          <a:fontRef idx="minor">
+            <a:schemeClr val="tx1"/>
+          </a:fontRef>
+        </p:style>
+      </p:cxnSp>
     </p:spTree>
   </p:cSld>
   <p:clrMapOvr>
     <a:masterClrMapping/>
   </p:clrMapOvr>
+  <p:timing>
+    <p:tnLst>
+      <p:par>
+        <p:cTn id="1" dur="indefinite" restart="never" nodeType="tmRoot"/>
+      </p:par>
+    </p:tnLst>
+  </p:timing>
 </p:sld>
 </file>
 
@@ -3633,7 +6934,7 @@
           <a:p>
             <a:r>
               <a:rPr lang="pt-BR" dirty="0" smtClean="0"/>
-              <a:t>Suporte a Desconexão</a:t>
+              <a:t>Protocolo de Comunicação</a:t>
             </a:r>
             <a:endParaRPr lang="pt-BR" dirty="0"/>
           </a:p>
@@ -3654,7 +6955,44 @@
           <a:bodyPr/>
           <a:lstStyle/>
           <a:p>
-            <a:endParaRPr lang="pt-BR"/>
+            <a:r>
+              <a:rPr lang="pt-BR" dirty="0" smtClean="0"/>
+              <a:t>Comunicação via </a:t>
+            </a:r>
+            <a:r>
+              <a:rPr lang="pt-BR" dirty="0" err="1" smtClean="0"/>
+              <a:t>WebServices</a:t>
+            </a:r>
+            <a:endParaRPr lang="pt-BR" dirty="0" smtClean="0"/>
+          </a:p>
+          <a:p>
+            <a:r>
+              <a:rPr lang="pt-BR" dirty="0" smtClean="0"/>
+              <a:t>Método de comunicação:</a:t>
+            </a:r>
+            <a:r>
+              <a:rPr lang="pt-BR" baseline="0" dirty="0" smtClean="0"/>
+              <a:t> REST sobre XML</a:t>
+            </a:r>
+          </a:p>
+          <a:p>
+            <a:pPr lvl="1"/>
+            <a:r>
+              <a:rPr lang="pt-BR" dirty="0" smtClean="0"/>
+              <a:t>Foi escolhido ao invés de SOAP devido à necessidade de rodar em dispositivos móveis</a:t>
+            </a:r>
+            <a:endParaRPr lang="pt-BR" baseline="0" dirty="0" smtClean="0"/>
+          </a:p>
+          <a:p>
+            <a:r>
+              <a:rPr lang="pt-BR" baseline="0" dirty="0" smtClean="0"/>
+              <a:t>Implementação </a:t>
+            </a:r>
+            <a:r>
+              <a:rPr lang="pt-BR" baseline="0" dirty="0" smtClean="0"/>
+              <a:t>customizada</a:t>
+            </a:r>
+            <a:endParaRPr lang="pt-BR" dirty="0"/>
           </a:p>
         </p:txBody>
       </p:sp>
@@ -3663,6 +7001,13 @@
   <p:clrMapOvr>
     <a:masterClrMapping/>
   </p:clrMapOvr>
+  <p:timing>
+    <p:tnLst>
+      <p:par>
+        <p:cTn id="1" dur="indefinite" restart="never" nodeType="tmRoot"/>
+      </p:par>
+    </p:tnLst>
+  </p:timing>
 </p:sld>
 </file>
 
@@ -3700,7 +7045,7 @@
           <a:p>
             <a:r>
               <a:rPr lang="pt-BR" dirty="0" smtClean="0"/>
-              <a:t>Demonstração</a:t>
+              <a:t>Suporte a Desconexão</a:t>
             </a:r>
             <a:endParaRPr lang="pt-BR" dirty="0"/>
           </a:p>
@@ -3718,10 +7063,54 @@
         </p:nvSpPr>
         <p:spPr/>
         <p:txBody>
-          <a:bodyPr/>
-          <a:lstStyle/>
-          <a:p>
-            <a:endParaRPr lang="pt-BR"/>
+          <a:bodyPr>
+            <a:normAutofit lnSpcReduction="10000"/>
+          </a:bodyPr>
+          <a:lstStyle/>
+          <a:p>
+            <a:r>
+              <a:rPr lang="pt-BR" dirty="0" smtClean="0"/>
+              <a:t>O suporte à desconexão</a:t>
+            </a:r>
+            <a:r>
+              <a:rPr lang="pt-BR" baseline="0" dirty="0" smtClean="0"/>
+              <a:t> ocorre rodando o servidor localmente, com as seguintes limitações:</a:t>
+            </a:r>
+          </a:p>
+          <a:p>
+            <a:pPr lvl="1"/>
+            <a:r>
+              <a:rPr lang="pt-BR" baseline="0" dirty="0" smtClean="0"/>
+              <a:t>Conexões somente localhost</a:t>
+            </a:r>
+          </a:p>
+          <a:p>
+            <a:pPr lvl="1"/>
+            <a:r>
+              <a:rPr lang="pt-BR" baseline="0" dirty="0" smtClean="0"/>
+              <a:t>Sem autenticação</a:t>
+            </a:r>
+          </a:p>
+          <a:p>
+            <a:pPr lvl="1"/>
+            <a:r>
+              <a:rPr lang="pt-BR" baseline="0" dirty="0" smtClean="0"/>
+              <a:t>Trilhas salvas localmente</a:t>
+            </a:r>
+          </a:p>
+          <a:p>
+            <a:pPr lvl="1"/>
+            <a:r>
+              <a:rPr lang="pt-BR" baseline="0" dirty="0" smtClean="0"/>
+              <a:t>Somente cache de inferência</a:t>
+            </a:r>
+          </a:p>
+          <a:p>
+            <a:pPr lvl="1"/>
+            <a:r>
+              <a:rPr lang="pt-BR" baseline="0" dirty="0" smtClean="0"/>
+              <a:t>Ao reconectar, o servidor local envia os dados recolhidos ao servidor remoto</a:t>
+            </a:r>
           </a:p>
         </p:txBody>
       </p:sp>
@@ -3730,6 +7119,13 @@
   <p:clrMapOvr>
     <a:masterClrMapping/>
   </p:clrMapOvr>
+  <p:timing>
+    <p:tnLst>
+      <p:par>
+        <p:cTn id="1" dur="indefinite" restart="never" nodeType="tmRoot"/>
+      </p:par>
+    </p:tnLst>
+  </p:timing>
 </p:sld>
 </file>
 
@@ -3767,6 +7163,84 @@
           <a:p>
             <a:r>
               <a:rPr lang="pt-BR" dirty="0" smtClean="0"/>
+              <a:t>Demonstração</a:t>
+            </a:r>
+            <a:endParaRPr lang="pt-BR" dirty="0"/>
+          </a:p>
+        </p:txBody>
+      </p:sp>
+      <p:pic>
+        <p:nvPicPr>
+          <p:cNvPr id="4" name="Content Placeholder 3" descr="Movie preview2.jpg"/>
+          <p:cNvPicPr>
+            <a:picLocks noGrp="1" noChangeAspect="1"/>
+          </p:cNvPicPr>
+          <p:nvPr>
+            <p:ph idx="1"/>
+          </p:nvPr>
+        </p:nvPicPr>
+        <p:blipFill>
+          <a:blip r:embed="rId2"/>
+          <a:stretch>
+            <a:fillRect/>
+          </a:stretch>
+        </p:blipFill>
+        <p:spPr>
+          <a:xfrm>
+            <a:off x="928662" y="1130678"/>
+            <a:ext cx="7358113" cy="5518585"/>
+          </a:xfrm>
+        </p:spPr>
+      </p:pic>
+    </p:spTree>
+  </p:cSld>
+  <p:clrMapOvr>
+    <a:masterClrMapping/>
+  </p:clrMapOvr>
+  <p:timing>
+    <p:tnLst>
+      <p:par>
+        <p:cTn id="1" dur="indefinite" restart="never" nodeType="tmRoot"/>
+      </p:par>
+    </p:tnLst>
+  </p:timing>
+</p:sld>
+</file>
+
+<file path=ppt/slides/slide17.xml><?xml version="1.0" encoding="utf-8"?>
+<p:sld xmlns:a="http://schemas.openxmlformats.org/drawingml/2006/main" xmlns:r="http://schemas.openxmlformats.org/officeDocument/2006/relationships" xmlns:p="http://schemas.openxmlformats.org/presentationml/2006/main">
+  <p:cSld>
+    <p:spTree>
+      <p:nvGrpSpPr>
+        <p:cNvPr id="1" name=""/>
+        <p:cNvGrpSpPr/>
+        <p:nvPr/>
+      </p:nvGrpSpPr>
+      <p:grpSpPr>
+        <a:xfrm>
+          <a:off x="0" y="0"/>
+          <a:ext cx="0" cy="0"/>
+          <a:chOff x="0" y="0"/>
+          <a:chExt cx="0" cy="0"/>
+        </a:xfrm>
+      </p:grpSpPr>
+      <p:sp>
+        <p:nvSpPr>
+          <p:cNvPr id="2" name="Title 1"/>
+          <p:cNvSpPr>
+            <a:spLocks noGrp="1"/>
+          </p:cNvSpPr>
+          <p:nvPr>
+            <p:ph type="title"/>
+          </p:nvPr>
+        </p:nvSpPr>
+        <p:spPr/>
+        <p:txBody>
+          <a:bodyPr/>
+          <a:lstStyle/>
+          <a:p>
+            <a:r>
+              <a:rPr lang="pt-BR" dirty="0" smtClean="0"/>
               <a:t>Conclusão</a:t>
             </a:r>
             <a:endParaRPr lang="pt-BR" dirty="0"/>
@@ -3788,7 +7262,33 @@
           <a:bodyPr/>
           <a:lstStyle/>
           <a:p>
-            <a:endParaRPr lang="pt-BR"/>
+            <a:r>
+              <a:rPr lang="pt-BR" dirty="0" smtClean="0"/>
+              <a:t>Gerenciamento</a:t>
+            </a:r>
+            <a:r>
+              <a:rPr lang="pt-BR" baseline="0" dirty="0" smtClean="0"/>
+              <a:t> de perfis</a:t>
+            </a:r>
+          </a:p>
+          <a:p>
+            <a:r>
+              <a:rPr lang="pt-BR" baseline="0" dirty="0" smtClean="0"/>
+              <a:t>Inferência de perfis</a:t>
+            </a:r>
+          </a:p>
+          <a:p>
+            <a:r>
+              <a:rPr lang="pt-BR" baseline="0" dirty="0" smtClean="0"/>
+              <a:t>Protocolo aberto</a:t>
+            </a:r>
+          </a:p>
+          <a:p>
+            <a:r>
+              <a:rPr lang="pt-BR" baseline="0" dirty="0" smtClean="0"/>
+              <a:t>Suporte à desconexão</a:t>
+            </a:r>
+            <a:endParaRPr lang="pt-BR" dirty="0"/>
           </a:p>
         </p:txBody>
       </p:sp>
@@ -3797,6 +7297,13 @@
   <p:clrMapOvr>
     <a:masterClrMapping/>
   </p:clrMapOvr>
+  <p:timing>
+    <p:tnLst>
+      <p:par>
+        <p:cTn id="1" dur="indefinite" restart="never" nodeType="tmRoot"/>
+      </p:par>
+    </p:tnLst>
+  </p:timing>
 </p:sld>
 </file>
 
@@ -3888,6 +7395,13 @@
   <p:clrMapOvr>
     <a:masterClrMapping/>
   </p:clrMapOvr>
+  <p:timing>
+    <p:tnLst>
+      <p:par>
+        <p:cTn id="1" dur="indefinite" restart="never" nodeType="tmRoot"/>
+      </p:par>
+    </p:tnLst>
+  </p:timing>
 </p:sld>
 </file>
 
@@ -3998,6 +7512,13 @@
   <p:clrMapOvr>
     <a:masterClrMapping/>
   </p:clrMapOvr>
+  <p:timing>
+    <p:tnLst>
+      <p:par>
+        <p:cTn id="1" dur="indefinite" restart="never" nodeType="tmRoot"/>
+      </p:par>
+    </p:tnLst>
+  </p:timing>
 </p:sld>
 </file>
 
@@ -4149,6 +7670,13 @@
   <p:clrMapOvr>
     <a:masterClrMapping/>
   </p:clrMapOvr>
+  <p:timing>
+    <p:tnLst>
+      <p:par>
+        <p:cTn id="1" dur="indefinite" restart="never" nodeType="tmRoot"/>
+      </p:par>
+    </p:tnLst>
+  </p:timing>
 </p:sld>
 </file>
 
@@ -4238,9 +7766,12 @@
           <a:p>
             <a:r>
               <a:rPr lang="pt-BR" dirty="0" smtClean="0"/>
-              <a:t>Possibilidade de envio de código do cliente para o servidor, para inferência personalizada</a:t>
-            </a:r>
-            <a:endParaRPr lang="pt-BR" dirty="0"/>
+              <a:t>Possibilidade de envio de código do cliente para o servidor, para inferência </a:t>
+            </a:r>
+            <a:r>
+              <a:rPr lang="pt-BR" dirty="0" smtClean="0"/>
+              <a:t>personalizada</a:t>
+            </a:r>
           </a:p>
         </p:txBody>
       </p:sp>
@@ -4249,6 +7780,13 @@
   <p:clrMapOvr>
     <a:masterClrMapping/>
   </p:clrMapOvr>
+  <p:timing>
+    <p:tnLst>
+      <p:par>
+        <p:cTn id="1" dur="indefinite" restart="never" nodeType="tmRoot"/>
+      </p:par>
+    </p:tnLst>
+  </p:timing>
 </p:sld>
 </file>
 
@@ -4294,28 +7832,843 @@
       </p:sp>
       <p:sp>
         <p:nvSpPr>
-          <p:cNvPr id="3" name="Content Placeholder 2"/>
-          <p:cNvSpPr>
-            <a:spLocks noGrp="1"/>
-          </p:cNvSpPr>
-          <p:nvPr>
-            <p:ph idx="1"/>
-          </p:nvPr>
-        </p:nvSpPr>
-        <p:spPr/>
-        <p:txBody>
-          <a:bodyPr/>
-          <a:lstStyle/>
-          <a:p>
-            <a:endParaRPr lang="pt-BR"/>
-          </a:p>
-        </p:txBody>
-      </p:sp>
+          <p:cNvPr id="4" name="Rectangle 3"/>
+          <p:cNvSpPr/>
+          <p:nvPr/>
+        </p:nvSpPr>
+        <p:spPr>
+          <a:xfrm>
+            <a:off x="3500430" y="1714488"/>
+            <a:ext cx="2571768" cy="714380"/>
+          </a:xfrm>
+          <a:prstGeom prst="rect">
+            <a:avLst/>
+          </a:prstGeom>
+        </p:spPr>
+        <p:style>
+          <a:lnRef idx="2">
+            <a:schemeClr val="accent1"/>
+          </a:lnRef>
+          <a:fillRef idx="1">
+            <a:schemeClr val="lt1"/>
+          </a:fillRef>
+          <a:effectRef idx="0">
+            <a:schemeClr val="accent1"/>
+          </a:effectRef>
+          <a:fontRef idx="minor">
+            <a:schemeClr val="dk1"/>
+          </a:fontRef>
+        </p:style>
+        <p:txBody>
+          <a:bodyPr rtlCol="0" anchor="ctr"/>
+          <a:lstStyle/>
+          <a:p>
+            <a:pPr algn="ctr"/>
+            <a:r>
+              <a:rPr lang="pt-BR" b="1" dirty="0" smtClean="0"/>
+              <a:t>UPCommunication</a:t>
+            </a:r>
+            <a:endParaRPr lang="pt-BR" b="1" dirty="0"/>
+          </a:p>
+        </p:txBody>
+      </p:sp>
+      <p:sp>
+        <p:nvSpPr>
+          <p:cNvPr id="5" name="Rectangle 4"/>
+          <p:cNvSpPr/>
+          <p:nvPr/>
+        </p:nvSpPr>
+        <p:spPr>
+          <a:xfrm>
+            <a:off x="3500430" y="2643182"/>
+            <a:ext cx="2571768" cy="714380"/>
+          </a:xfrm>
+          <a:prstGeom prst="rect">
+            <a:avLst/>
+          </a:prstGeom>
+        </p:spPr>
+        <p:style>
+          <a:lnRef idx="2">
+            <a:schemeClr val="accent1"/>
+          </a:lnRef>
+          <a:fillRef idx="1">
+            <a:schemeClr val="lt1"/>
+          </a:fillRef>
+          <a:effectRef idx="0">
+            <a:schemeClr val="accent1"/>
+          </a:effectRef>
+          <a:fontRef idx="minor">
+            <a:schemeClr val="dk1"/>
+          </a:fontRef>
+        </p:style>
+        <p:txBody>
+          <a:bodyPr rtlCol="0" anchor="ctr"/>
+          <a:lstStyle/>
+          <a:p>
+            <a:pPr algn="ctr"/>
+            <a:r>
+              <a:rPr lang="pt-BR" b="1" dirty="0" smtClean="0"/>
+              <a:t>UPAuthentication</a:t>
+            </a:r>
+            <a:endParaRPr lang="pt-BR" b="1" dirty="0"/>
+          </a:p>
+        </p:txBody>
+      </p:sp>
+      <p:sp>
+        <p:nvSpPr>
+          <p:cNvPr id="6" name="Rectangle 5"/>
+          <p:cNvSpPr/>
+          <p:nvPr/>
+        </p:nvSpPr>
+        <p:spPr>
+          <a:xfrm>
+            <a:off x="3500430" y="3571876"/>
+            <a:ext cx="2571768" cy="714380"/>
+          </a:xfrm>
+          <a:prstGeom prst="rect">
+            <a:avLst/>
+          </a:prstGeom>
+        </p:spPr>
+        <p:style>
+          <a:lnRef idx="2">
+            <a:schemeClr val="accent1"/>
+          </a:lnRef>
+          <a:fillRef idx="1">
+            <a:schemeClr val="lt1"/>
+          </a:fillRef>
+          <a:effectRef idx="0">
+            <a:schemeClr val="accent1"/>
+          </a:effectRef>
+          <a:fontRef idx="minor">
+            <a:schemeClr val="dk1"/>
+          </a:fontRef>
+        </p:style>
+        <p:txBody>
+          <a:bodyPr rtlCol="0" anchor="ctr"/>
+          <a:lstStyle/>
+          <a:p>
+            <a:pPr algn="ctr"/>
+            <a:r>
+              <a:rPr lang="pt-BR" b="1" dirty="0" smtClean="0"/>
+              <a:t>UPServices</a:t>
+            </a:r>
+            <a:endParaRPr lang="pt-BR" b="1" dirty="0"/>
+          </a:p>
+        </p:txBody>
+      </p:sp>
+      <p:sp>
+        <p:nvSpPr>
+          <p:cNvPr id="7" name="Rectangle 6"/>
+          <p:cNvSpPr/>
+          <p:nvPr/>
+        </p:nvSpPr>
+        <p:spPr>
+          <a:xfrm>
+            <a:off x="3500430" y="4500570"/>
+            <a:ext cx="2571768" cy="714380"/>
+          </a:xfrm>
+          <a:prstGeom prst="rect">
+            <a:avLst/>
+          </a:prstGeom>
+        </p:spPr>
+        <p:style>
+          <a:lnRef idx="2">
+            <a:schemeClr val="accent1"/>
+          </a:lnRef>
+          <a:fillRef idx="1">
+            <a:schemeClr val="lt1"/>
+          </a:fillRef>
+          <a:effectRef idx="0">
+            <a:schemeClr val="accent1"/>
+          </a:effectRef>
+          <a:fontRef idx="minor">
+            <a:schemeClr val="dk1"/>
+          </a:fontRef>
+        </p:style>
+        <p:txBody>
+          <a:bodyPr rtlCol="0" anchor="ctr"/>
+          <a:lstStyle/>
+          <a:p>
+            <a:pPr algn="ctr"/>
+            <a:r>
+              <a:rPr lang="pt-BR" b="1" dirty="0" smtClean="0"/>
+              <a:t>UPInferenceCache</a:t>
+            </a:r>
+            <a:endParaRPr lang="pt-BR" b="1" dirty="0"/>
+          </a:p>
+        </p:txBody>
+      </p:sp>
+      <p:sp>
+        <p:nvSpPr>
+          <p:cNvPr id="8" name="Rectangle 7"/>
+          <p:cNvSpPr/>
+          <p:nvPr/>
+        </p:nvSpPr>
+        <p:spPr>
+          <a:xfrm>
+            <a:off x="3500430" y="5429264"/>
+            <a:ext cx="2571768" cy="714380"/>
+          </a:xfrm>
+          <a:prstGeom prst="rect">
+            <a:avLst/>
+          </a:prstGeom>
+        </p:spPr>
+        <p:style>
+          <a:lnRef idx="2">
+            <a:schemeClr val="accent1"/>
+          </a:lnRef>
+          <a:fillRef idx="1">
+            <a:schemeClr val="lt1"/>
+          </a:fillRef>
+          <a:effectRef idx="0">
+            <a:schemeClr val="accent1"/>
+          </a:effectRef>
+          <a:fontRef idx="minor">
+            <a:schemeClr val="dk1"/>
+          </a:fontRef>
+        </p:style>
+        <p:txBody>
+          <a:bodyPr rtlCol="0" anchor="ctr"/>
+          <a:lstStyle/>
+          <a:p>
+            <a:pPr algn="ctr"/>
+            <a:r>
+              <a:rPr lang="pt-BR" b="1" dirty="0" smtClean="0"/>
+              <a:t>UPInferenceEngine</a:t>
+            </a:r>
+            <a:endParaRPr lang="pt-BR" b="1" dirty="0"/>
+          </a:p>
+        </p:txBody>
+      </p:sp>
+      <p:sp>
+        <p:nvSpPr>
+          <p:cNvPr id="9" name="Cloud 8"/>
+          <p:cNvSpPr/>
+          <p:nvPr/>
+        </p:nvSpPr>
+        <p:spPr>
+          <a:xfrm>
+            <a:off x="785786" y="1643050"/>
+            <a:ext cx="1785950" cy="928694"/>
+          </a:xfrm>
+          <a:prstGeom prst="cloud">
+            <a:avLst/>
+          </a:prstGeom>
+        </p:spPr>
+        <p:style>
+          <a:lnRef idx="2">
+            <a:schemeClr val="accent1"/>
+          </a:lnRef>
+          <a:fillRef idx="1">
+            <a:schemeClr val="lt1"/>
+          </a:fillRef>
+          <a:effectRef idx="0">
+            <a:schemeClr val="accent1"/>
+          </a:effectRef>
+          <a:fontRef idx="minor">
+            <a:schemeClr val="dk1"/>
+          </a:fontRef>
+        </p:style>
+        <p:txBody>
+          <a:bodyPr rtlCol="0" anchor="ctr"/>
+          <a:lstStyle/>
+          <a:p>
+            <a:pPr algn="ctr"/>
+            <a:r>
+              <a:rPr lang="pt-BR" b="1" dirty="0" smtClean="0"/>
+              <a:t>Internet</a:t>
+            </a:r>
+            <a:endParaRPr lang="pt-BR" b="1" dirty="0"/>
+          </a:p>
+        </p:txBody>
+      </p:sp>
+      <p:sp>
+        <p:nvSpPr>
+          <p:cNvPr id="10" name="Flowchart: Magnetic Disk 9"/>
+          <p:cNvSpPr/>
+          <p:nvPr/>
+        </p:nvSpPr>
+        <p:spPr>
+          <a:xfrm>
+            <a:off x="1000100" y="4929198"/>
+            <a:ext cx="1285884" cy="857256"/>
+          </a:xfrm>
+          <a:prstGeom prst="flowChartMagneticDisk">
+            <a:avLst/>
+          </a:prstGeom>
+        </p:spPr>
+        <p:style>
+          <a:lnRef idx="2">
+            <a:schemeClr val="accent1"/>
+          </a:lnRef>
+          <a:fillRef idx="1">
+            <a:schemeClr val="lt1"/>
+          </a:fillRef>
+          <a:effectRef idx="0">
+            <a:schemeClr val="accent1"/>
+          </a:effectRef>
+          <a:fontRef idx="minor">
+            <a:schemeClr val="dk1"/>
+          </a:fontRef>
+        </p:style>
+        <p:txBody>
+          <a:bodyPr rtlCol="0" anchor="ctr"/>
+          <a:lstStyle/>
+          <a:p>
+            <a:pPr algn="ctr"/>
+            <a:r>
+              <a:rPr lang="pt-BR" b="1" dirty="0" smtClean="0"/>
+              <a:t>CacheDB</a:t>
+            </a:r>
+            <a:endParaRPr lang="pt-BR" b="1" dirty="0"/>
+          </a:p>
+        </p:txBody>
+      </p:sp>
+      <p:sp>
+        <p:nvSpPr>
+          <p:cNvPr id="11" name="Flowchart: Magnetic Disk 10"/>
+          <p:cNvSpPr/>
+          <p:nvPr/>
+        </p:nvSpPr>
+        <p:spPr>
+          <a:xfrm>
+            <a:off x="7143768" y="4357694"/>
+            <a:ext cx="1285884" cy="857256"/>
+          </a:xfrm>
+          <a:prstGeom prst="flowChartMagneticDisk">
+            <a:avLst/>
+          </a:prstGeom>
+        </p:spPr>
+        <p:style>
+          <a:lnRef idx="2">
+            <a:schemeClr val="accent1"/>
+          </a:lnRef>
+          <a:fillRef idx="1">
+            <a:schemeClr val="lt1"/>
+          </a:fillRef>
+          <a:effectRef idx="0">
+            <a:schemeClr val="accent1"/>
+          </a:effectRef>
+          <a:fontRef idx="minor">
+            <a:schemeClr val="dk1"/>
+          </a:fontRef>
+        </p:style>
+        <p:txBody>
+          <a:bodyPr rtlCol="0" anchor="ctr"/>
+          <a:lstStyle/>
+          <a:p>
+            <a:pPr algn="ctr"/>
+            <a:r>
+              <a:rPr lang="pt-BR" b="1" dirty="0" smtClean="0"/>
+              <a:t>TrailsDB</a:t>
+            </a:r>
+            <a:endParaRPr lang="pt-BR" b="1" dirty="0"/>
+          </a:p>
+        </p:txBody>
+      </p:sp>
+      <p:sp>
+        <p:nvSpPr>
+          <p:cNvPr id="12" name="Flowchart: Magnetic Disk 11"/>
+          <p:cNvSpPr/>
+          <p:nvPr/>
+        </p:nvSpPr>
+        <p:spPr>
+          <a:xfrm>
+            <a:off x="7072330" y="2571744"/>
+            <a:ext cx="1285884" cy="857256"/>
+          </a:xfrm>
+          <a:prstGeom prst="flowChartMagneticDisk">
+            <a:avLst/>
+          </a:prstGeom>
+        </p:spPr>
+        <p:style>
+          <a:lnRef idx="2">
+            <a:schemeClr val="accent1"/>
+          </a:lnRef>
+          <a:fillRef idx="1">
+            <a:schemeClr val="lt1"/>
+          </a:fillRef>
+          <a:effectRef idx="0">
+            <a:schemeClr val="accent1"/>
+          </a:effectRef>
+          <a:fontRef idx="minor">
+            <a:schemeClr val="dk1"/>
+          </a:fontRef>
+        </p:style>
+        <p:txBody>
+          <a:bodyPr rtlCol="0" anchor="ctr"/>
+          <a:lstStyle/>
+          <a:p>
+            <a:pPr algn="ctr"/>
+            <a:r>
+              <a:rPr lang="pt-BR" b="1" dirty="0" smtClean="0"/>
+              <a:t>UserDB</a:t>
+            </a:r>
+            <a:endParaRPr lang="pt-BR" b="1" dirty="0"/>
+          </a:p>
+        </p:txBody>
+      </p:sp>
+      <p:sp>
+        <p:nvSpPr>
+          <p:cNvPr id="13" name="Rectangle 12"/>
+          <p:cNvSpPr/>
+          <p:nvPr/>
+        </p:nvSpPr>
+        <p:spPr>
+          <a:xfrm>
+            <a:off x="642910" y="3571876"/>
+            <a:ext cx="2143140" cy="714380"/>
+          </a:xfrm>
+          <a:prstGeom prst="rect">
+            <a:avLst/>
+          </a:prstGeom>
+        </p:spPr>
+        <p:style>
+          <a:lnRef idx="2">
+            <a:schemeClr val="accent1"/>
+          </a:lnRef>
+          <a:fillRef idx="1">
+            <a:schemeClr val="lt1"/>
+          </a:fillRef>
+          <a:effectRef idx="0">
+            <a:schemeClr val="accent1"/>
+          </a:effectRef>
+          <a:fontRef idx="minor">
+            <a:schemeClr val="dk1"/>
+          </a:fontRef>
+        </p:style>
+        <p:txBody>
+          <a:bodyPr rtlCol="0" anchor="ctr"/>
+          <a:lstStyle/>
+          <a:p>
+            <a:pPr algn="ctr"/>
+            <a:r>
+              <a:rPr lang="pt-BR" b="1" dirty="0" smtClean="0"/>
+              <a:t>UPRemoteExecution</a:t>
+            </a:r>
+            <a:endParaRPr lang="pt-BR" b="1" dirty="0"/>
+          </a:p>
+        </p:txBody>
+      </p:sp>
+      <p:cxnSp>
+        <p:nvCxnSpPr>
+          <p:cNvPr id="17" name="Straight Arrow Connector 16"/>
+          <p:cNvCxnSpPr>
+            <a:stCxn id="9" idx="0"/>
+            <a:endCxn id="4" idx="1"/>
+          </p:cNvCxnSpPr>
+          <p:nvPr/>
+        </p:nvCxnSpPr>
+        <p:spPr>
+          <a:xfrm flipV="1">
+            <a:off x="2570248" y="2071678"/>
+            <a:ext cx="930182" cy="35719"/>
+          </a:xfrm>
+          <a:prstGeom prst="straightConnector1">
+            <a:avLst/>
+          </a:prstGeom>
+          <a:ln>
+            <a:headEnd type="arrow"/>
+            <a:tailEnd type="arrow"/>
+          </a:ln>
+        </p:spPr>
+        <p:style>
+          <a:lnRef idx="2">
+            <a:schemeClr val="accent1"/>
+          </a:lnRef>
+          <a:fillRef idx="1">
+            <a:schemeClr val="lt1"/>
+          </a:fillRef>
+          <a:effectRef idx="0">
+            <a:schemeClr val="accent1"/>
+          </a:effectRef>
+          <a:fontRef idx="minor">
+            <a:schemeClr val="dk1"/>
+          </a:fontRef>
+        </p:style>
+      </p:cxnSp>
+      <p:cxnSp>
+        <p:nvCxnSpPr>
+          <p:cNvPr id="19" name="Straight Arrow Connector 18"/>
+          <p:cNvCxnSpPr>
+            <a:stCxn id="13" idx="0"/>
+            <a:endCxn id="9" idx="1"/>
+          </p:cNvCxnSpPr>
+          <p:nvPr/>
+        </p:nvCxnSpPr>
+        <p:spPr>
+          <a:xfrm rot="16200000" flipV="1">
+            <a:off x="1196061" y="3053456"/>
+            <a:ext cx="1001121" cy="35719"/>
+          </a:xfrm>
+          <a:prstGeom prst="straightConnector1">
+            <a:avLst/>
+          </a:prstGeom>
+          <a:ln>
+            <a:headEnd type="arrow"/>
+            <a:tailEnd type="arrow"/>
+          </a:ln>
+        </p:spPr>
+        <p:style>
+          <a:lnRef idx="2">
+            <a:schemeClr val="accent1"/>
+          </a:lnRef>
+          <a:fillRef idx="1">
+            <a:schemeClr val="lt1"/>
+          </a:fillRef>
+          <a:effectRef idx="0">
+            <a:schemeClr val="accent1"/>
+          </a:effectRef>
+          <a:fontRef idx="minor">
+            <a:schemeClr val="dk1"/>
+          </a:fontRef>
+        </p:style>
+      </p:cxnSp>
+      <p:cxnSp>
+        <p:nvCxnSpPr>
+          <p:cNvPr id="21" name="Straight Arrow Connector 20"/>
+          <p:cNvCxnSpPr>
+            <a:stCxn id="13" idx="3"/>
+            <a:endCxn id="6" idx="1"/>
+          </p:cNvCxnSpPr>
+          <p:nvPr/>
+        </p:nvCxnSpPr>
+        <p:spPr>
+          <a:xfrm>
+            <a:off x="2786050" y="3929066"/>
+            <a:ext cx="714380" cy="1588"/>
+          </a:xfrm>
+          <a:prstGeom prst="straightConnector1">
+            <a:avLst/>
+          </a:prstGeom>
+          <a:ln>
+            <a:headEnd type="arrow"/>
+            <a:tailEnd type="arrow"/>
+          </a:ln>
+        </p:spPr>
+        <p:style>
+          <a:lnRef idx="2">
+            <a:schemeClr val="accent1"/>
+          </a:lnRef>
+          <a:fillRef idx="1">
+            <a:schemeClr val="lt1"/>
+          </a:fillRef>
+          <a:effectRef idx="0">
+            <a:schemeClr val="accent1"/>
+          </a:effectRef>
+          <a:fontRef idx="minor">
+            <a:schemeClr val="dk1"/>
+          </a:fontRef>
+        </p:style>
+      </p:cxnSp>
+      <p:cxnSp>
+        <p:nvCxnSpPr>
+          <p:cNvPr id="23" name="Straight Arrow Connector 22"/>
+          <p:cNvCxnSpPr>
+            <a:stCxn id="10" idx="4"/>
+            <a:endCxn id="7" idx="1"/>
+          </p:cNvCxnSpPr>
+          <p:nvPr/>
+        </p:nvCxnSpPr>
+        <p:spPr>
+          <a:xfrm flipV="1">
+            <a:off x="2285984" y="4857760"/>
+            <a:ext cx="1214446" cy="500066"/>
+          </a:xfrm>
+          <a:prstGeom prst="straightConnector1">
+            <a:avLst/>
+          </a:prstGeom>
+          <a:ln>
+            <a:headEnd type="arrow"/>
+            <a:tailEnd type="arrow"/>
+          </a:ln>
+        </p:spPr>
+        <p:style>
+          <a:lnRef idx="2">
+            <a:schemeClr val="accent1"/>
+          </a:lnRef>
+          <a:fillRef idx="1">
+            <a:schemeClr val="lt1"/>
+          </a:fillRef>
+          <a:effectRef idx="0">
+            <a:schemeClr val="accent1"/>
+          </a:effectRef>
+          <a:fontRef idx="minor">
+            <a:schemeClr val="dk1"/>
+          </a:fontRef>
+        </p:style>
+      </p:cxnSp>
+      <p:cxnSp>
+        <p:nvCxnSpPr>
+          <p:cNvPr id="25" name="Straight Arrow Connector 24"/>
+          <p:cNvCxnSpPr>
+            <a:stCxn id="5" idx="3"/>
+            <a:endCxn id="12" idx="2"/>
+          </p:cNvCxnSpPr>
+          <p:nvPr/>
+        </p:nvCxnSpPr>
+        <p:spPr>
+          <a:xfrm>
+            <a:off x="6072198" y="3000372"/>
+            <a:ext cx="1000132" cy="1588"/>
+          </a:xfrm>
+          <a:prstGeom prst="straightConnector1">
+            <a:avLst/>
+          </a:prstGeom>
+          <a:ln>
+            <a:headEnd type="arrow"/>
+            <a:tailEnd type="arrow"/>
+          </a:ln>
+        </p:spPr>
+        <p:style>
+          <a:lnRef idx="2">
+            <a:schemeClr val="accent1"/>
+          </a:lnRef>
+          <a:fillRef idx="1">
+            <a:schemeClr val="lt1"/>
+          </a:fillRef>
+          <a:effectRef idx="0">
+            <a:schemeClr val="accent1"/>
+          </a:effectRef>
+          <a:fontRef idx="minor">
+            <a:schemeClr val="dk1"/>
+          </a:fontRef>
+        </p:style>
+      </p:cxnSp>
+      <p:cxnSp>
+        <p:nvCxnSpPr>
+          <p:cNvPr id="27" name="Straight Arrow Connector 26"/>
+          <p:cNvCxnSpPr>
+            <a:stCxn id="6" idx="3"/>
+            <a:endCxn id="11" idx="2"/>
+          </p:cNvCxnSpPr>
+          <p:nvPr/>
+        </p:nvCxnSpPr>
+        <p:spPr>
+          <a:xfrm>
+            <a:off x="6072198" y="3929066"/>
+            <a:ext cx="1071570" cy="857256"/>
+          </a:xfrm>
+          <a:prstGeom prst="straightConnector1">
+            <a:avLst/>
+          </a:prstGeom>
+          <a:ln>
+            <a:headEnd type="arrow"/>
+            <a:tailEnd type="arrow"/>
+          </a:ln>
+        </p:spPr>
+        <p:style>
+          <a:lnRef idx="2">
+            <a:schemeClr val="accent1"/>
+          </a:lnRef>
+          <a:fillRef idx="1">
+            <a:schemeClr val="lt1"/>
+          </a:fillRef>
+          <a:effectRef idx="0">
+            <a:schemeClr val="accent1"/>
+          </a:effectRef>
+          <a:fontRef idx="minor">
+            <a:schemeClr val="dk1"/>
+          </a:fontRef>
+        </p:style>
+      </p:cxnSp>
+      <p:cxnSp>
+        <p:nvCxnSpPr>
+          <p:cNvPr id="29" name="Straight Arrow Connector 28"/>
+          <p:cNvCxnSpPr>
+            <a:stCxn id="11" idx="2"/>
+            <a:endCxn id="8" idx="3"/>
+          </p:cNvCxnSpPr>
+          <p:nvPr/>
+        </p:nvCxnSpPr>
+        <p:spPr>
+          <a:xfrm rot="10800000" flipV="1">
+            <a:off x="6072198" y="4786322"/>
+            <a:ext cx="1071570" cy="1000132"/>
+          </a:xfrm>
+          <a:prstGeom prst="straightConnector1">
+            <a:avLst/>
+          </a:prstGeom>
+          <a:ln>
+            <a:headEnd type="arrow"/>
+            <a:tailEnd type="arrow"/>
+          </a:ln>
+        </p:spPr>
+        <p:style>
+          <a:lnRef idx="2">
+            <a:schemeClr val="accent1"/>
+          </a:lnRef>
+          <a:fillRef idx="1">
+            <a:schemeClr val="lt1"/>
+          </a:fillRef>
+          <a:effectRef idx="0">
+            <a:schemeClr val="accent1"/>
+          </a:effectRef>
+          <a:fontRef idx="minor">
+            <a:schemeClr val="dk1"/>
+          </a:fontRef>
+        </p:style>
+      </p:cxnSp>
+      <p:cxnSp>
+        <p:nvCxnSpPr>
+          <p:cNvPr id="38" name="Straight Arrow Connector 37"/>
+          <p:cNvCxnSpPr>
+            <a:stCxn id="4" idx="2"/>
+            <a:endCxn id="5" idx="0"/>
+          </p:cNvCxnSpPr>
+          <p:nvPr/>
+        </p:nvCxnSpPr>
+        <p:spPr>
+          <a:xfrm rot="5400000">
+            <a:off x="4679157" y="2536025"/>
+            <a:ext cx="214314" cy="1588"/>
+          </a:xfrm>
+          <a:prstGeom prst="straightConnector1">
+            <a:avLst/>
+          </a:prstGeom>
+          <a:ln>
+            <a:headEnd type="arrow"/>
+            <a:tailEnd type="arrow"/>
+          </a:ln>
+        </p:spPr>
+        <p:style>
+          <a:lnRef idx="1">
+            <a:schemeClr val="accent1"/>
+          </a:lnRef>
+          <a:fillRef idx="0">
+            <a:schemeClr val="accent1"/>
+          </a:fillRef>
+          <a:effectRef idx="0">
+            <a:schemeClr val="accent1"/>
+          </a:effectRef>
+          <a:fontRef idx="minor">
+            <a:schemeClr val="tx1"/>
+          </a:fontRef>
+        </p:style>
+      </p:cxnSp>
+      <p:cxnSp>
+        <p:nvCxnSpPr>
+          <p:cNvPr id="40" name="Straight Arrow Connector 39"/>
+          <p:cNvCxnSpPr>
+            <a:stCxn id="5" idx="2"/>
+            <a:endCxn id="6" idx="0"/>
+          </p:cNvCxnSpPr>
+          <p:nvPr/>
+        </p:nvCxnSpPr>
+        <p:spPr>
+          <a:xfrm rot="5400000">
+            <a:off x="4679157" y="3464719"/>
+            <a:ext cx="214314" cy="1588"/>
+          </a:xfrm>
+          <a:prstGeom prst="straightConnector1">
+            <a:avLst/>
+          </a:prstGeom>
+          <a:ln>
+            <a:headEnd type="arrow"/>
+            <a:tailEnd type="arrow"/>
+          </a:ln>
+        </p:spPr>
+        <p:style>
+          <a:lnRef idx="1">
+            <a:schemeClr val="accent1"/>
+          </a:lnRef>
+          <a:fillRef idx="0">
+            <a:schemeClr val="accent1"/>
+          </a:fillRef>
+          <a:effectRef idx="0">
+            <a:schemeClr val="accent1"/>
+          </a:effectRef>
+          <a:fontRef idx="minor">
+            <a:schemeClr val="tx1"/>
+          </a:fontRef>
+        </p:style>
+      </p:cxnSp>
+      <p:cxnSp>
+        <p:nvCxnSpPr>
+          <p:cNvPr id="42" name="Straight Arrow Connector 41"/>
+          <p:cNvCxnSpPr>
+            <a:stCxn id="6" idx="2"/>
+            <a:endCxn id="7" idx="0"/>
+          </p:cNvCxnSpPr>
+          <p:nvPr/>
+        </p:nvCxnSpPr>
+        <p:spPr>
+          <a:xfrm rot="5400000">
+            <a:off x="4679157" y="4393413"/>
+            <a:ext cx="214314" cy="1588"/>
+          </a:xfrm>
+          <a:prstGeom prst="straightConnector1">
+            <a:avLst/>
+          </a:prstGeom>
+          <a:ln>
+            <a:headEnd type="arrow"/>
+            <a:tailEnd type="arrow"/>
+          </a:ln>
+        </p:spPr>
+        <p:style>
+          <a:lnRef idx="1">
+            <a:schemeClr val="accent1"/>
+          </a:lnRef>
+          <a:fillRef idx="0">
+            <a:schemeClr val="accent1"/>
+          </a:fillRef>
+          <a:effectRef idx="0">
+            <a:schemeClr val="accent1"/>
+          </a:effectRef>
+          <a:fontRef idx="minor">
+            <a:schemeClr val="tx1"/>
+          </a:fontRef>
+        </p:style>
+      </p:cxnSp>
+      <p:cxnSp>
+        <p:nvCxnSpPr>
+          <p:cNvPr id="44" name="Straight Arrow Connector 43"/>
+          <p:cNvCxnSpPr>
+            <a:stCxn id="7" idx="2"/>
+            <a:endCxn id="8" idx="0"/>
+          </p:cNvCxnSpPr>
+          <p:nvPr/>
+        </p:nvCxnSpPr>
+        <p:spPr>
+          <a:xfrm rot="5400000">
+            <a:off x="4679157" y="5322107"/>
+            <a:ext cx="214314" cy="1588"/>
+          </a:xfrm>
+          <a:prstGeom prst="straightConnector1">
+            <a:avLst/>
+          </a:prstGeom>
+          <a:ln>
+            <a:headEnd type="arrow"/>
+            <a:tailEnd type="arrow"/>
+          </a:ln>
+        </p:spPr>
+        <p:style>
+          <a:lnRef idx="1">
+            <a:schemeClr val="accent1"/>
+          </a:lnRef>
+          <a:fillRef idx="0">
+            <a:schemeClr val="accent1"/>
+          </a:fillRef>
+          <a:effectRef idx="0">
+            <a:schemeClr val="accent1"/>
+          </a:effectRef>
+          <a:fontRef idx="minor">
+            <a:schemeClr val="tx1"/>
+          </a:fontRef>
+        </p:style>
+      </p:cxnSp>
     </p:spTree>
   </p:cSld>
   <p:clrMapOvr>
     <a:masterClrMapping/>
   </p:clrMapOvr>
+  <p:timing>
+    <p:tnLst>
+      <p:par>
+        <p:cTn id="1" dur="indefinite" restart="never" nodeType="tmRoot"/>
+      </p:par>
+    </p:tnLst>
+  </p:timing>
 </p:sld>
 </file>
 
@@ -4352,76 +8705,862 @@
           <a:lstStyle/>
           <a:p>
             <a:r>
-              <a:rPr lang="pt-BR" dirty="0" err="1" smtClean="0"/>
+              <a:rPr lang="pt-BR" dirty="0" smtClean="0"/>
+              <a:t>Arquitetura Implementada</a:t>
+            </a:r>
+            <a:endParaRPr lang="pt-BR" dirty="0"/>
+          </a:p>
+        </p:txBody>
+      </p:sp>
+      <p:sp>
+        <p:nvSpPr>
+          <p:cNvPr id="4" name="Rectangle 3"/>
+          <p:cNvSpPr/>
+          <p:nvPr/>
+        </p:nvSpPr>
+        <p:spPr>
+          <a:xfrm>
+            <a:off x="3500430" y="1714488"/>
+            <a:ext cx="2571768" cy="714380"/>
+          </a:xfrm>
+          <a:prstGeom prst="rect">
+            <a:avLst/>
+          </a:prstGeom>
+        </p:spPr>
+        <p:style>
+          <a:lnRef idx="2">
+            <a:schemeClr val="accent1">
+              <a:shade val="50000"/>
+            </a:schemeClr>
+          </a:lnRef>
+          <a:fillRef idx="1">
+            <a:schemeClr val="accent1"/>
+          </a:fillRef>
+          <a:effectRef idx="0">
+            <a:schemeClr val="accent1"/>
+          </a:effectRef>
+          <a:fontRef idx="minor">
+            <a:schemeClr val="lt1"/>
+          </a:fontRef>
+        </p:style>
+        <p:txBody>
+          <a:bodyPr rtlCol="0" anchor="ctr"/>
+          <a:lstStyle/>
+          <a:p>
+            <a:pPr algn="ctr"/>
+            <a:r>
+              <a:rPr lang="pt-BR" b="1" dirty="0" smtClean="0"/>
               <a:t>UPCommunication</a:t>
             </a:r>
-            <a:endParaRPr lang="pt-BR" dirty="0"/>
-          </a:p>
-        </p:txBody>
-      </p:sp>
-      <p:sp>
-        <p:nvSpPr>
-          <p:cNvPr id="6" name="Content Placeholder 5"/>
-          <p:cNvSpPr>
-            <a:spLocks noGrp="1"/>
-          </p:cNvSpPr>
-          <p:nvPr>
-            <p:ph sz="half" idx="1"/>
-          </p:nvPr>
-        </p:nvSpPr>
-        <p:spPr/>
-        <p:txBody>
-          <a:bodyPr/>
-          <a:lstStyle/>
-          <a:p>
-            <a:r>
-              <a:rPr lang="pt-BR" dirty="0" smtClean="0"/>
-              <a:t>Responsável</a:t>
-            </a:r>
-            <a:r>
-              <a:rPr lang="pt-BR" baseline="0" dirty="0" smtClean="0"/>
-              <a:t> por receber/enviar chamados</a:t>
-            </a:r>
-          </a:p>
-          <a:p>
-            <a:r>
-              <a:rPr lang="pt-BR" baseline="0" dirty="0" smtClean="0"/>
-              <a:t>Codifica/decodifica chamados WS/XML</a:t>
-            </a:r>
-          </a:p>
-          <a:p>
-            <a:r>
-              <a:rPr lang="pt-BR" baseline="0" dirty="0" smtClean="0"/>
-              <a:t>Envia chamados para outros módulos</a:t>
-            </a:r>
-            <a:endParaRPr lang="pt-BR" dirty="0"/>
-          </a:p>
-        </p:txBody>
-      </p:sp>
-      <p:sp>
-        <p:nvSpPr>
-          <p:cNvPr id="7" name="Content Placeholder 6"/>
-          <p:cNvSpPr>
-            <a:spLocks noGrp="1"/>
-          </p:cNvSpPr>
-          <p:nvPr>
-            <p:ph sz="half" idx="2"/>
-          </p:nvPr>
-        </p:nvSpPr>
-        <p:spPr/>
-        <p:txBody>
-          <a:bodyPr/>
-          <a:lstStyle/>
-          <a:p>
-            <a:endParaRPr lang="pt-BR"/>
-          </a:p>
-        </p:txBody>
-      </p:sp>
+            <a:endParaRPr lang="pt-BR" b="1" dirty="0"/>
+          </a:p>
+        </p:txBody>
+      </p:sp>
+      <p:sp>
+        <p:nvSpPr>
+          <p:cNvPr id="5" name="Rectangle 4"/>
+          <p:cNvSpPr/>
+          <p:nvPr/>
+        </p:nvSpPr>
+        <p:spPr>
+          <a:xfrm>
+            <a:off x="3500430" y="2643182"/>
+            <a:ext cx="2571768" cy="714380"/>
+          </a:xfrm>
+          <a:prstGeom prst="rect">
+            <a:avLst/>
+          </a:prstGeom>
+        </p:spPr>
+        <p:style>
+          <a:lnRef idx="2">
+            <a:schemeClr val="accent1"/>
+          </a:lnRef>
+          <a:fillRef idx="1">
+            <a:schemeClr val="lt1"/>
+          </a:fillRef>
+          <a:effectRef idx="0">
+            <a:schemeClr val="accent1"/>
+          </a:effectRef>
+          <a:fontRef idx="minor">
+            <a:schemeClr val="dk1"/>
+          </a:fontRef>
+        </p:style>
+        <p:txBody>
+          <a:bodyPr rtlCol="0" anchor="ctr"/>
+          <a:lstStyle/>
+          <a:p>
+            <a:pPr algn="ctr"/>
+            <a:r>
+              <a:rPr lang="pt-BR" b="1" dirty="0" smtClean="0"/>
+              <a:t>UPAuthentication</a:t>
+            </a:r>
+            <a:endParaRPr lang="pt-BR" b="1" dirty="0"/>
+          </a:p>
+        </p:txBody>
+      </p:sp>
+      <p:sp>
+        <p:nvSpPr>
+          <p:cNvPr id="6" name="Rectangle 5"/>
+          <p:cNvSpPr/>
+          <p:nvPr/>
+        </p:nvSpPr>
+        <p:spPr>
+          <a:xfrm>
+            <a:off x="3500430" y="3571876"/>
+            <a:ext cx="2571768" cy="714380"/>
+          </a:xfrm>
+          <a:prstGeom prst="rect">
+            <a:avLst/>
+          </a:prstGeom>
+        </p:spPr>
+        <p:style>
+          <a:lnRef idx="2">
+            <a:schemeClr val="accent1">
+              <a:shade val="50000"/>
+            </a:schemeClr>
+          </a:lnRef>
+          <a:fillRef idx="1">
+            <a:schemeClr val="accent1"/>
+          </a:fillRef>
+          <a:effectRef idx="0">
+            <a:schemeClr val="accent1"/>
+          </a:effectRef>
+          <a:fontRef idx="minor">
+            <a:schemeClr val="lt1"/>
+          </a:fontRef>
+        </p:style>
+        <p:txBody>
+          <a:bodyPr rtlCol="0" anchor="ctr"/>
+          <a:lstStyle/>
+          <a:p>
+            <a:pPr algn="ctr"/>
+            <a:r>
+              <a:rPr lang="pt-BR" b="1" dirty="0" smtClean="0"/>
+              <a:t>UPServices</a:t>
+            </a:r>
+            <a:endParaRPr lang="pt-BR" b="1" dirty="0"/>
+          </a:p>
+        </p:txBody>
+      </p:sp>
+      <p:sp>
+        <p:nvSpPr>
+          <p:cNvPr id="7" name="Rectangle 6"/>
+          <p:cNvSpPr/>
+          <p:nvPr/>
+        </p:nvSpPr>
+        <p:spPr>
+          <a:xfrm>
+            <a:off x="3500430" y="4500570"/>
+            <a:ext cx="2571768" cy="714380"/>
+          </a:xfrm>
+          <a:prstGeom prst="rect">
+            <a:avLst/>
+          </a:prstGeom>
+        </p:spPr>
+        <p:style>
+          <a:lnRef idx="2">
+            <a:schemeClr val="accent1"/>
+          </a:lnRef>
+          <a:fillRef idx="1">
+            <a:schemeClr val="lt1"/>
+          </a:fillRef>
+          <a:effectRef idx="0">
+            <a:schemeClr val="accent1"/>
+          </a:effectRef>
+          <a:fontRef idx="minor">
+            <a:schemeClr val="dk1"/>
+          </a:fontRef>
+        </p:style>
+        <p:txBody>
+          <a:bodyPr rtlCol="0" anchor="ctr"/>
+          <a:lstStyle/>
+          <a:p>
+            <a:pPr algn="ctr"/>
+            <a:r>
+              <a:rPr lang="pt-BR" b="1" dirty="0" smtClean="0"/>
+              <a:t>UPInferenceCache</a:t>
+            </a:r>
+            <a:endParaRPr lang="pt-BR" b="1" dirty="0"/>
+          </a:p>
+        </p:txBody>
+      </p:sp>
+      <p:sp>
+        <p:nvSpPr>
+          <p:cNvPr id="8" name="Rectangle 7"/>
+          <p:cNvSpPr/>
+          <p:nvPr/>
+        </p:nvSpPr>
+        <p:spPr>
+          <a:xfrm>
+            <a:off x="3500430" y="5429264"/>
+            <a:ext cx="2571768" cy="714380"/>
+          </a:xfrm>
+          <a:prstGeom prst="rect">
+            <a:avLst/>
+          </a:prstGeom>
+        </p:spPr>
+        <p:style>
+          <a:lnRef idx="2">
+            <a:schemeClr val="accent5">
+              <a:shade val="50000"/>
+            </a:schemeClr>
+          </a:lnRef>
+          <a:fillRef idx="1">
+            <a:schemeClr val="accent5"/>
+          </a:fillRef>
+          <a:effectRef idx="0">
+            <a:schemeClr val="accent5"/>
+          </a:effectRef>
+          <a:fontRef idx="minor">
+            <a:schemeClr val="lt1"/>
+          </a:fontRef>
+        </p:style>
+        <p:txBody>
+          <a:bodyPr rtlCol="0" anchor="ctr"/>
+          <a:lstStyle/>
+          <a:p>
+            <a:pPr algn="ctr"/>
+            <a:r>
+              <a:rPr lang="pt-BR" b="1" dirty="0" smtClean="0"/>
+              <a:t>UPInferenceEngine</a:t>
+            </a:r>
+            <a:endParaRPr lang="pt-BR" b="1" dirty="0"/>
+          </a:p>
+        </p:txBody>
+      </p:sp>
+      <p:sp>
+        <p:nvSpPr>
+          <p:cNvPr id="9" name="Cloud 8"/>
+          <p:cNvSpPr/>
+          <p:nvPr/>
+        </p:nvSpPr>
+        <p:spPr>
+          <a:xfrm>
+            <a:off x="785786" y="1643050"/>
+            <a:ext cx="1785950" cy="928694"/>
+          </a:xfrm>
+          <a:prstGeom prst="cloud">
+            <a:avLst/>
+          </a:prstGeom>
+        </p:spPr>
+        <p:style>
+          <a:lnRef idx="2">
+            <a:schemeClr val="accent1"/>
+          </a:lnRef>
+          <a:fillRef idx="1">
+            <a:schemeClr val="lt1"/>
+          </a:fillRef>
+          <a:effectRef idx="0">
+            <a:schemeClr val="accent1"/>
+          </a:effectRef>
+          <a:fontRef idx="minor">
+            <a:schemeClr val="dk1"/>
+          </a:fontRef>
+        </p:style>
+        <p:txBody>
+          <a:bodyPr rtlCol="0" anchor="ctr"/>
+          <a:lstStyle/>
+          <a:p>
+            <a:pPr algn="ctr"/>
+            <a:r>
+              <a:rPr lang="pt-BR" b="1" dirty="0" smtClean="0"/>
+              <a:t>Internet</a:t>
+            </a:r>
+            <a:endParaRPr lang="pt-BR" b="1" dirty="0"/>
+          </a:p>
+        </p:txBody>
+      </p:sp>
+      <p:sp>
+        <p:nvSpPr>
+          <p:cNvPr id="10" name="Flowchart: Magnetic Disk 9"/>
+          <p:cNvSpPr/>
+          <p:nvPr/>
+        </p:nvSpPr>
+        <p:spPr>
+          <a:xfrm>
+            <a:off x="1000100" y="4929198"/>
+            <a:ext cx="1285884" cy="857256"/>
+          </a:xfrm>
+          <a:prstGeom prst="flowChartMagneticDisk">
+            <a:avLst/>
+          </a:prstGeom>
+        </p:spPr>
+        <p:style>
+          <a:lnRef idx="2">
+            <a:schemeClr val="accent1"/>
+          </a:lnRef>
+          <a:fillRef idx="1">
+            <a:schemeClr val="lt1"/>
+          </a:fillRef>
+          <a:effectRef idx="0">
+            <a:schemeClr val="accent1"/>
+          </a:effectRef>
+          <a:fontRef idx="minor">
+            <a:schemeClr val="dk1"/>
+          </a:fontRef>
+        </p:style>
+        <p:txBody>
+          <a:bodyPr rtlCol="0" anchor="ctr"/>
+          <a:lstStyle/>
+          <a:p>
+            <a:pPr algn="ctr"/>
+            <a:r>
+              <a:rPr lang="pt-BR" b="1" dirty="0" smtClean="0"/>
+              <a:t>CacheDB</a:t>
+            </a:r>
+            <a:endParaRPr lang="pt-BR" b="1" dirty="0"/>
+          </a:p>
+        </p:txBody>
+      </p:sp>
+      <p:sp>
+        <p:nvSpPr>
+          <p:cNvPr id="11" name="Flowchart: Magnetic Disk 10"/>
+          <p:cNvSpPr/>
+          <p:nvPr/>
+        </p:nvSpPr>
+        <p:spPr>
+          <a:xfrm>
+            <a:off x="7143768" y="4357694"/>
+            <a:ext cx="1285884" cy="857256"/>
+          </a:xfrm>
+          <a:prstGeom prst="flowChartMagneticDisk">
+            <a:avLst/>
+          </a:prstGeom>
+        </p:spPr>
+        <p:style>
+          <a:lnRef idx="2">
+            <a:schemeClr val="accent5">
+              <a:shade val="50000"/>
+            </a:schemeClr>
+          </a:lnRef>
+          <a:fillRef idx="1">
+            <a:schemeClr val="accent5"/>
+          </a:fillRef>
+          <a:effectRef idx="0">
+            <a:schemeClr val="accent5"/>
+          </a:effectRef>
+          <a:fontRef idx="minor">
+            <a:schemeClr val="lt1"/>
+          </a:fontRef>
+        </p:style>
+        <p:txBody>
+          <a:bodyPr rtlCol="0" anchor="ctr"/>
+          <a:lstStyle/>
+          <a:p>
+            <a:pPr algn="ctr"/>
+            <a:r>
+              <a:rPr lang="pt-BR" b="1" dirty="0" smtClean="0"/>
+              <a:t>TrailsDB</a:t>
+            </a:r>
+            <a:endParaRPr lang="pt-BR" b="1" dirty="0"/>
+          </a:p>
+        </p:txBody>
+      </p:sp>
+      <p:sp>
+        <p:nvSpPr>
+          <p:cNvPr id="12" name="Flowchart: Magnetic Disk 11"/>
+          <p:cNvSpPr/>
+          <p:nvPr/>
+        </p:nvSpPr>
+        <p:spPr>
+          <a:xfrm>
+            <a:off x="7072330" y="2571744"/>
+            <a:ext cx="1285884" cy="857256"/>
+          </a:xfrm>
+          <a:prstGeom prst="flowChartMagneticDisk">
+            <a:avLst/>
+          </a:prstGeom>
+        </p:spPr>
+        <p:style>
+          <a:lnRef idx="2">
+            <a:schemeClr val="accent1"/>
+          </a:lnRef>
+          <a:fillRef idx="1">
+            <a:schemeClr val="lt1"/>
+          </a:fillRef>
+          <a:effectRef idx="0">
+            <a:schemeClr val="accent1"/>
+          </a:effectRef>
+          <a:fontRef idx="minor">
+            <a:schemeClr val="dk1"/>
+          </a:fontRef>
+        </p:style>
+        <p:txBody>
+          <a:bodyPr rtlCol="0" anchor="ctr"/>
+          <a:lstStyle/>
+          <a:p>
+            <a:pPr algn="ctr"/>
+            <a:r>
+              <a:rPr lang="pt-BR" b="1" dirty="0" smtClean="0"/>
+              <a:t>UserDB</a:t>
+            </a:r>
+            <a:endParaRPr lang="pt-BR" b="1" dirty="0"/>
+          </a:p>
+        </p:txBody>
+      </p:sp>
+      <p:sp>
+        <p:nvSpPr>
+          <p:cNvPr id="13" name="Rectangle 12"/>
+          <p:cNvSpPr/>
+          <p:nvPr/>
+        </p:nvSpPr>
+        <p:spPr>
+          <a:xfrm>
+            <a:off x="642910" y="3571876"/>
+            <a:ext cx="2143140" cy="714380"/>
+          </a:xfrm>
+          <a:prstGeom prst="rect">
+            <a:avLst/>
+          </a:prstGeom>
+        </p:spPr>
+        <p:style>
+          <a:lnRef idx="2">
+            <a:schemeClr val="accent1">
+              <a:shade val="50000"/>
+            </a:schemeClr>
+          </a:lnRef>
+          <a:fillRef idx="1">
+            <a:schemeClr val="accent1"/>
+          </a:fillRef>
+          <a:effectRef idx="0">
+            <a:schemeClr val="accent1"/>
+          </a:effectRef>
+          <a:fontRef idx="minor">
+            <a:schemeClr val="lt1"/>
+          </a:fontRef>
+        </p:style>
+        <p:txBody>
+          <a:bodyPr rtlCol="0" anchor="ctr"/>
+          <a:lstStyle/>
+          <a:p>
+            <a:pPr algn="ctr"/>
+            <a:r>
+              <a:rPr lang="pt-BR" b="1" dirty="0" smtClean="0"/>
+              <a:t>UPRemoteExecution</a:t>
+            </a:r>
+            <a:endParaRPr lang="pt-BR" b="1" dirty="0"/>
+          </a:p>
+        </p:txBody>
+      </p:sp>
+      <p:cxnSp>
+        <p:nvCxnSpPr>
+          <p:cNvPr id="17" name="Straight Arrow Connector 16"/>
+          <p:cNvCxnSpPr>
+            <a:stCxn id="9" idx="0"/>
+            <a:endCxn id="4" idx="1"/>
+          </p:cNvCxnSpPr>
+          <p:nvPr/>
+        </p:nvCxnSpPr>
+        <p:spPr>
+          <a:xfrm flipV="1">
+            <a:off x="2570248" y="2071678"/>
+            <a:ext cx="930182" cy="35719"/>
+          </a:xfrm>
+          <a:prstGeom prst="straightConnector1">
+            <a:avLst/>
+          </a:prstGeom>
+          <a:ln>
+            <a:headEnd type="arrow"/>
+            <a:tailEnd type="arrow"/>
+          </a:ln>
+        </p:spPr>
+        <p:style>
+          <a:lnRef idx="2">
+            <a:schemeClr val="accent1"/>
+          </a:lnRef>
+          <a:fillRef idx="1">
+            <a:schemeClr val="lt1"/>
+          </a:fillRef>
+          <a:effectRef idx="0">
+            <a:schemeClr val="accent1"/>
+          </a:effectRef>
+          <a:fontRef idx="minor">
+            <a:schemeClr val="dk1"/>
+          </a:fontRef>
+        </p:style>
+      </p:cxnSp>
+      <p:cxnSp>
+        <p:nvCxnSpPr>
+          <p:cNvPr id="19" name="Straight Arrow Connector 18"/>
+          <p:cNvCxnSpPr>
+            <a:stCxn id="13" idx="0"/>
+            <a:endCxn id="9" idx="1"/>
+          </p:cNvCxnSpPr>
+          <p:nvPr/>
+        </p:nvCxnSpPr>
+        <p:spPr>
+          <a:xfrm rot="16200000" flipV="1">
+            <a:off x="1196061" y="3053456"/>
+            <a:ext cx="1001121" cy="35719"/>
+          </a:xfrm>
+          <a:prstGeom prst="straightConnector1">
+            <a:avLst/>
+          </a:prstGeom>
+          <a:ln>
+            <a:headEnd type="arrow"/>
+            <a:tailEnd type="arrow"/>
+          </a:ln>
+        </p:spPr>
+        <p:style>
+          <a:lnRef idx="2">
+            <a:schemeClr val="accent1"/>
+          </a:lnRef>
+          <a:fillRef idx="1">
+            <a:schemeClr val="lt1"/>
+          </a:fillRef>
+          <a:effectRef idx="0">
+            <a:schemeClr val="accent1"/>
+          </a:effectRef>
+          <a:fontRef idx="minor">
+            <a:schemeClr val="dk1"/>
+          </a:fontRef>
+        </p:style>
+      </p:cxnSp>
+      <p:cxnSp>
+        <p:nvCxnSpPr>
+          <p:cNvPr id="21" name="Straight Arrow Connector 20"/>
+          <p:cNvCxnSpPr>
+            <a:stCxn id="13" idx="3"/>
+            <a:endCxn id="6" idx="1"/>
+          </p:cNvCxnSpPr>
+          <p:nvPr/>
+        </p:nvCxnSpPr>
+        <p:spPr>
+          <a:xfrm>
+            <a:off x="2786050" y="3929066"/>
+            <a:ext cx="714380" cy="1588"/>
+          </a:xfrm>
+          <a:prstGeom prst="straightConnector1">
+            <a:avLst/>
+          </a:prstGeom>
+          <a:ln>
+            <a:headEnd type="arrow"/>
+            <a:tailEnd type="arrow"/>
+          </a:ln>
+        </p:spPr>
+        <p:style>
+          <a:lnRef idx="2">
+            <a:schemeClr val="accent1"/>
+          </a:lnRef>
+          <a:fillRef idx="1">
+            <a:schemeClr val="lt1"/>
+          </a:fillRef>
+          <a:effectRef idx="0">
+            <a:schemeClr val="accent1"/>
+          </a:effectRef>
+          <a:fontRef idx="minor">
+            <a:schemeClr val="dk1"/>
+          </a:fontRef>
+        </p:style>
+      </p:cxnSp>
+      <p:cxnSp>
+        <p:nvCxnSpPr>
+          <p:cNvPr id="23" name="Straight Arrow Connector 22"/>
+          <p:cNvCxnSpPr>
+            <a:stCxn id="10" idx="4"/>
+            <a:endCxn id="7" idx="1"/>
+          </p:cNvCxnSpPr>
+          <p:nvPr/>
+        </p:nvCxnSpPr>
+        <p:spPr>
+          <a:xfrm flipV="1">
+            <a:off x="2285984" y="4857760"/>
+            <a:ext cx="1214446" cy="500066"/>
+          </a:xfrm>
+          <a:prstGeom prst="straightConnector1">
+            <a:avLst/>
+          </a:prstGeom>
+          <a:ln>
+            <a:headEnd type="arrow"/>
+            <a:tailEnd type="arrow"/>
+          </a:ln>
+        </p:spPr>
+        <p:style>
+          <a:lnRef idx="2">
+            <a:schemeClr val="accent1"/>
+          </a:lnRef>
+          <a:fillRef idx="1">
+            <a:schemeClr val="lt1"/>
+          </a:fillRef>
+          <a:effectRef idx="0">
+            <a:schemeClr val="accent1"/>
+          </a:effectRef>
+          <a:fontRef idx="minor">
+            <a:schemeClr val="dk1"/>
+          </a:fontRef>
+        </p:style>
+      </p:cxnSp>
+      <p:cxnSp>
+        <p:nvCxnSpPr>
+          <p:cNvPr id="25" name="Straight Arrow Connector 24"/>
+          <p:cNvCxnSpPr>
+            <a:stCxn id="5" idx="3"/>
+            <a:endCxn id="12" idx="2"/>
+          </p:cNvCxnSpPr>
+          <p:nvPr/>
+        </p:nvCxnSpPr>
+        <p:spPr>
+          <a:xfrm>
+            <a:off x="6072198" y="3000372"/>
+            <a:ext cx="1000132" cy="1588"/>
+          </a:xfrm>
+          <a:prstGeom prst="straightConnector1">
+            <a:avLst/>
+          </a:prstGeom>
+          <a:ln>
+            <a:headEnd type="arrow"/>
+            <a:tailEnd type="arrow"/>
+          </a:ln>
+        </p:spPr>
+        <p:style>
+          <a:lnRef idx="2">
+            <a:schemeClr val="accent1"/>
+          </a:lnRef>
+          <a:fillRef idx="1">
+            <a:schemeClr val="lt1"/>
+          </a:fillRef>
+          <a:effectRef idx="0">
+            <a:schemeClr val="accent1"/>
+          </a:effectRef>
+          <a:fontRef idx="minor">
+            <a:schemeClr val="dk1"/>
+          </a:fontRef>
+        </p:style>
+      </p:cxnSp>
+      <p:cxnSp>
+        <p:nvCxnSpPr>
+          <p:cNvPr id="27" name="Straight Arrow Connector 26"/>
+          <p:cNvCxnSpPr>
+            <a:stCxn id="6" idx="3"/>
+            <a:endCxn id="11" idx="2"/>
+          </p:cNvCxnSpPr>
+          <p:nvPr/>
+        </p:nvCxnSpPr>
+        <p:spPr>
+          <a:xfrm>
+            <a:off x="6072198" y="3929066"/>
+            <a:ext cx="1071570" cy="857256"/>
+          </a:xfrm>
+          <a:prstGeom prst="straightConnector1">
+            <a:avLst/>
+          </a:prstGeom>
+          <a:ln>
+            <a:headEnd type="arrow"/>
+            <a:tailEnd type="arrow"/>
+          </a:ln>
+        </p:spPr>
+        <p:style>
+          <a:lnRef idx="2">
+            <a:schemeClr val="accent1"/>
+          </a:lnRef>
+          <a:fillRef idx="1">
+            <a:schemeClr val="lt1"/>
+          </a:fillRef>
+          <a:effectRef idx="0">
+            <a:schemeClr val="accent1"/>
+          </a:effectRef>
+          <a:fontRef idx="minor">
+            <a:schemeClr val="dk1"/>
+          </a:fontRef>
+        </p:style>
+      </p:cxnSp>
+      <p:cxnSp>
+        <p:nvCxnSpPr>
+          <p:cNvPr id="29" name="Straight Arrow Connector 28"/>
+          <p:cNvCxnSpPr>
+            <a:stCxn id="11" idx="2"/>
+            <a:endCxn id="8" idx="3"/>
+          </p:cNvCxnSpPr>
+          <p:nvPr/>
+        </p:nvCxnSpPr>
+        <p:spPr>
+          <a:xfrm rot="10800000" flipV="1">
+            <a:off x="6072198" y="4786322"/>
+            <a:ext cx="1071570" cy="1000132"/>
+          </a:xfrm>
+          <a:prstGeom prst="straightConnector1">
+            <a:avLst/>
+          </a:prstGeom>
+          <a:ln>
+            <a:headEnd type="arrow"/>
+            <a:tailEnd type="arrow"/>
+          </a:ln>
+        </p:spPr>
+        <p:style>
+          <a:lnRef idx="2">
+            <a:schemeClr val="accent1"/>
+          </a:lnRef>
+          <a:fillRef idx="1">
+            <a:schemeClr val="lt1"/>
+          </a:fillRef>
+          <a:effectRef idx="0">
+            <a:schemeClr val="accent1"/>
+          </a:effectRef>
+          <a:fontRef idx="minor">
+            <a:schemeClr val="dk1"/>
+          </a:fontRef>
+        </p:style>
+      </p:cxnSp>
+      <p:cxnSp>
+        <p:nvCxnSpPr>
+          <p:cNvPr id="38" name="Straight Arrow Connector 37"/>
+          <p:cNvCxnSpPr>
+            <a:stCxn id="4" idx="2"/>
+            <a:endCxn id="5" idx="0"/>
+          </p:cNvCxnSpPr>
+          <p:nvPr/>
+        </p:nvCxnSpPr>
+        <p:spPr>
+          <a:xfrm rot="5400000">
+            <a:off x="4679157" y="2536025"/>
+            <a:ext cx="214314" cy="1588"/>
+          </a:xfrm>
+          <a:prstGeom prst="straightConnector1">
+            <a:avLst/>
+          </a:prstGeom>
+          <a:ln>
+            <a:headEnd type="arrow"/>
+            <a:tailEnd type="arrow"/>
+          </a:ln>
+        </p:spPr>
+        <p:style>
+          <a:lnRef idx="1">
+            <a:schemeClr val="accent1"/>
+          </a:lnRef>
+          <a:fillRef idx="0">
+            <a:schemeClr val="accent1"/>
+          </a:fillRef>
+          <a:effectRef idx="0">
+            <a:schemeClr val="accent1"/>
+          </a:effectRef>
+          <a:fontRef idx="minor">
+            <a:schemeClr val="tx1"/>
+          </a:fontRef>
+        </p:style>
+      </p:cxnSp>
+      <p:cxnSp>
+        <p:nvCxnSpPr>
+          <p:cNvPr id="40" name="Straight Arrow Connector 39"/>
+          <p:cNvCxnSpPr>
+            <a:stCxn id="5" idx="2"/>
+            <a:endCxn id="6" idx="0"/>
+          </p:cNvCxnSpPr>
+          <p:nvPr/>
+        </p:nvCxnSpPr>
+        <p:spPr>
+          <a:xfrm rot="5400000">
+            <a:off x="4679157" y="3464719"/>
+            <a:ext cx="214314" cy="1588"/>
+          </a:xfrm>
+          <a:prstGeom prst="straightConnector1">
+            <a:avLst/>
+          </a:prstGeom>
+          <a:ln>
+            <a:headEnd type="arrow"/>
+            <a:tailEnd type="arrow"/>
+          </a:ln>
+        </p:spPr>
+        <p:style>
+          <a:lnRef idx="1">
+            <a:schemeClr val="accent1"/>
+          </a:lnRef>
+          <a:fillRef idx="0">
+            <a:schemeClr val="accent1"/>
+          </a:fillRef>
+          <a:effectRef idx="0">
+            <a:schemeClr val="accent1"/>
+          </a:effectRef>
+          <a:fontRef idx="minor">
+            <a:schemeClr val="tx1"/>
+          </a:fontRef>
+        </p:style>
+      </p:cxnSp>
+      <p:cxnSp>
+        <p:nvCxnSpPr>
+          <p:cNvPr id="42" name="Straight Arrow Connector 41"/>
+          <p:cNvCxnSpPr>
+            <a:stCxn id="6" idx="2"/>
+            <a:endCxn id="7" idx="0"/>
+          </p:cNvCxnSpPr>
+          <p:nvPr/>
+        </p:nvCxnSpPr>
+        <p:spPr>
+          <a:xfrm rot="5400000">
+            <a:off x="4679157" y="4393413"/>
+            <a:ext cx="214314" cy="1588"/>
+          </a:xfrm>
+          <a:prstGeom prst="straightConnector1">
+            <a:avLst/>
+          </a:prstGeom>
+          <a:ln>
+            <a:headEnd type="arrow"/>
+            <a:tailEnd type="arrow"/>
+          </a:ln>
+        </p:spPr>
+        <p:style>
+          <a:lnRef idx="1">
+            <a:schemeClr val="accent1"/>
+          </a:lnRef>
+          <a:fillRef idx="0">
+            <a:schemeClr val="accent1"/>
+          </a:fillRef>
+          <a:effectRef idx="0">
+            <a:schemeClr val="accent1"/>
+          </a:effectRef>
+          <a:fontRef idx="minor">
+            <a:schemeClr val="tx1"/>
+          </a:fontRef>
+        </p:style>
+      </p:cxnSp>
+      <p:cxnSp>
+        <p:nvCxnSpPr>
+          <p:cNvPr id="44" name="Straight Arrow Connector 43"/>
+          <p:cNvCxnSpPr>
+            <a:stCxn id="7" idx="2"/>
+            <a:endCxn id="8" idx="0"/>
+          </p:cNvCxnSpPr>
+          <p:nvPr/>
+        </p:nvCxnSpPr>
+        <p:spPr>
+          <a:xfrm rot="5400000">
+            <a:off x="4679157" y="5322107"/>
+            <a:ext cx="214314" cy="1588"/>
+          </a:xfrm>
+          <a:prstGeom prst="straightConnector1">
+            <a:avLst/>
+          </a:prstGeom>
+          <a:ln>
+            <a:headEnd type="arrow"/>
+            <a:tailEnd type="arrow"/>
+          </a:ln>
+        </p:spPr>
+        <p:style>
+          <a:lnRef idx="1">
+            <a:schemeClr val="accent1"/>
+          </a:lnRef>
+          <a:fillRef idx="0">
+            <a:schemeClr val="accent1"/>
+          </a:fillRef>
+          <a:effectRef idx="0">
+            <a:schemeClr val="accent1"/>
+          </a:effectRef>
+          <a:fontRef idx="minor">
+            <a:schemeClr val="tx1"/>
+          </a:fontRef>
+        </p:style>
+      </p:cxnSp>
     </p:spTree>
   </p:cSld>
   <p:clrMapOvr>
     <a:masterClrMapping/>
   </p:clrMapOvr>
+  <p:timing>
+    <p:tnLst>
+      <p:par>
+        <p:cTn id="1" dur="indefinite" restart="never" nodeType="tmRoot"/>
+      </p:par>
+    </p:tnLst>
+  </p:timing>
 </p:sld>
 </file>
 
@@ -4459,7 +9598,7 @@
           <a:p>
             <a:r>
               <a:rPr lang="pt-BR" dirty="0" err="1" smtClean="0"/>
-              <a:t>UPAuthentication</a:t>
+              <a:t>UPCommunication</a:t>
             </a:r>
             <a:endParaRPr lang="pt-BR" dirty="0"/>
           </a:p>
@@ -4467,7 +9606,7 @@
       </p:sp>
       <p:sp>
         <p:nvSpPr>
-          <p:cNvPr id="4" name="Content Placeholder 3"/>
+          <p:cNvPr id="6" name="Content Placeholder 5"/>
           <p:cNvSpPr>
             <a:spLocks noGrp="1"/>
           </p:cNvSpPr>
@@ -4482,23 +9621,23 @@
           <a:p>
             <a:r>
               <a:rPr lang="pt-BR" dirty="0" smtClean="0"/>
-              <a:t>Autentica</a:t>
+              <a:t>Responsável</a:t>
             </a:r>
             <a:r>
               <a:rPr lang="pt-BR" baseline="0" dirty="0" smtClean="0"/>
-              <a:t> cliente e usuário</a:t>
+              <a:t> por receber/enviar chamados</a:t>
             </a:r>
           </a:p>
           <a:p>
             <a:r>
               <a:rPr lang="pt-BR" baseline="0" dirty="0" smtClean="0"/>
-              <a:t>Verifica credenciais e barra comunicação</a:t>
+              <a:t>Codifica/decodifica chamados WS/XML</a:t>
             </a:r>
           </a:p>
           <a:p>
             <a:r>
               <a:rPr lang="pt-BR" baseline="0" dirty="0" smtClean="0"/>
-              <a:t>Módulo não implementado para este trabalho</a:t>
+              <a:t>Envia chamados para outros módulos</a:t>
             </a:r>
             <a:endParaRPr lang="pt-BR" dirty="0"/>
           </a:p>
@@ -4506,28 +9645,847 @@
       </p:sp>
       <p:sp>
         <p:nvSpPr>
-          <p:cNvPr id="5" name="Content Placeholder 4"/>
-          <p:cNvSpPr>
-            <a:spLocks noGrp="1"/>
-          </p:cNvSpPr>
-          <p:nvPr>
-            <p:ph sz="half" idx="2"/>
-          </p:nvPr>
-        </p:nvSpPr>
-        <p:spPr/>
-        <p:txBody>
-          <a:bodyPr/>
-          <a:lstStyle/>
-          <a:p>
-            <a:endParaRPr lang="pt-BR"/>
-          </a:p>
-        </p:txBody>
-      </p:sp>
+          <p:cNvPr id="5" name="Rectangle 4"/>
+          <p:cNvSpPr/>
+          <p:nvPr/>
+        </p:nvSpPr>
+        <p:spPr>
+          <a:xfrm>
+            <a:off x="6329374" y="1785926"/>
+            <a:ext cx="1457335" cy="714380"/>
+          </a:xfrm>
+          <a:prstGeom prst="rect">
+            <a:avLst/>
+          </a:prstGeom>
+        </p:spPr>
+        <p:style>
+          <a:lnRef idx="2">
+            <a:schemeClr val="accent1">
+              <a:shade val="50000"/>
+            </a:schemeClr>
+          </a:lnRef>
+          <a:fillRef idx="1">
+            <a:schemeClr val="accent1"/>
+          </a:fillRef>
+          <a:effectRef idx="0">
+            <a:schemeClr val="accent1"/>
+          </a:effectRef>
+          <a:fontRef idx="minor">
+            <a:schemeClr val="lt1"/>
+          </a:fontRef>
+        </p:style>
+        <p:txBody>
+          <a:bodyPr rtlCol="0" anchor="ctr"/>
+          <a:lstStyle/>
+          <a:p>
+            <a:pPr algn="ctr"/>
+            <a:r>
+              <a:rPr lang="pt-BR" sz="1200" b="1" dirty="0" smtClean="0"/>
+              <a:t>UPCommunication</a:t>
+            </a:r>
+            <a:endParaRPr lang="pt-BR" sz="1200" b="1" dirty="0"/>
+          </a:p>
+        </p:txBody>
+      </p:sp>
+      <p:sp>
+        <p:nvSpPr>
+          <p:cNvPr id="8" name="Rectangle 7"/>
+          <p:cNvSpPr/>
+          <p:nvPr/>
+        </p:nvSpPr>
+        <p:spPr>
+          <a:xfrm>
+            <a:off x="6329374" y="2714620"/>
+            <a:ext cx="1457335" cy="714380"/>
+          </a:xfrm>
+          <a:prstGeom prst="rect">
+            <a:avLst/>
+          </a:prstGeom>
+        </p:spPr>
+        <p:style>
+          <a:lnRef idx="2">
+            <a:schemeClr val="accent1"/>
+          </a:lnRef>
+          <a:fillRef idx="1">
+            <a:schemeClr val="lt1"/>
+          </a:fillRef>
+          <a:effectRef idx="0">
+            <a:schemeClr val="accent1"/>
+          </a:effectRef>
+          <a:fontRef idx="minor">
+            <a:schemeClr val="dk1"/>
+          </a:fontRef>
+        </p:style>
+        <p:txBody>
+          <a:bodyPr rtlCol="0" anchor="ctr"/>
+          <a:lstStyle/>
+          <a:p>
+            <a:pPr algn="ctr"/>
+            <a:r>
+              <a:rPr lang="pt-BR" sz="1200" b="1" dirty="0" smtClean="0"/>
+              <a:t>UPAuthentication</a:t>
+            </a:r>
+            <a:endParaRPr lang="pt-BR" sz="1200" b="1" dirty="0"/>
+          </a:p>
+        </p:txBody>
+      </p:sp>
+      <p:sp>
+        <p:nvSpPr>
+          <p:cNvPr id="9" name="Rectangle 8"/>
+          <p:cNvSpPr/>
+          <p:nvPr/>
+        </p:nvSpPr>
+        <p:spPr>
+          <a:xfrm>
+            <a:off x="6329374" y="3643314"/>
+            <a:ext cx="1457335" cy="714380"/>
+          </a:xfrm>
+          <a:prstGeom prst="rect">
+            <a:avLst/>
+          </a:prstGeom>
+        </p:spPr>
+        <p:style>
+          <a:lnRef idx="2">
+            <a:schemeClr val="accent1"/>
+          </a:lnRef>
+          <a:fillRef idx="1">
+            <a:schemeClr val="lt1"/>
+          </a:fillRef>
+          <a:effectRef idx="0">
+            <a:schemeClr val="accent1"/>
+          </a:effectRef>
+          <a:fontRef idx="minor">
+            <a:schemeClr val="dk1"/>
+          </a:fontRef>
+        </p:style>
+        <p:txBody>
+          <a:bodyPr rtlCol="0" anchor="ctr"/>
+          <a:lstStyle/>
+          <a:p>
+            <a:pPr algn="ctr"/>
+            <a:r>
+              <a:rPr lang="pt-BR" sz="1200" b="1" dirty="0" smtClean="0"/>
+              <a:t>UPServices</a:t>
+            </a:r>
+            <a:endParaRPr lang="pt-BR" sz="1200" b="1" dirty="0"/>
+          </a:p>
+        </p:txBody>
+      </p:sp>
+      <p:sp>
+        <p:nvSpPr>
+          <p:cNvPr id="10" name="Rectangle 9"/>
+          <p:cNvSpPr/>
+          <p:nvPr/>
+        </p:nvSpPr>
+        <p:spPr>
+          <a:xfrm>
+            <a:off x="6329374" y="4572008"/>
+            <a:ext cx="1457335" cy="714380"/>
+          </a:xfrm>
+          <a:prstGeom prst="rect">
+            <a:avLst/>
+          </a:prstGeom>
+        </p:spPr>
+        <p:style>
+          <a:lnRef idx="2">
+            <a:schemeClr val="accent1"/>
+          </a:lnRef>
+          <a:fillRef idx="1">
+            <a:schemeClr val="lt1"/>
+          </a:fillRef>
+          <a:effectRef idx="0">
+            <a:schemeClr val="accent1"/>
+          </a:effectRef>
+          <a:fontRef idx="minor">
+            <a:schemeClr val="dk1"/>
+          </a:fontRef>
+        </p:style>
+        <p:txBody>
+          <a:bodyPr rtlCol="0" anchor="ctr"/>
+          <a:lstStyle/>
+          <a:p>
+            <a:pPr algn="ctr"/>
+            <a:r>
+              <a:rPr lang="pt-BR" sz="1200" b="1" dirty="0" smtClean="0"/>
+              <a:t>UPInferenceCache</a:t>
+            </a:r>
+            <a:endParaRPr lang="pt-BR" sz="1200" b="1" dirty="0"/>
+          </a:p>
+        </p:txBody>
+      </p:sp>
+      <p:sp>
+        <p:nvSpPr>
+          <p:cNvPr id="11" name="Rectangle 10"/>
+          <p:cNvSpPr/>
+          <p:nvPr/>
+        </p:nvSpPr>
+        <p:spPr>
+          <a:xfrm>
+            <a:off x="6329374" y="5500702"/>
+            <a:ext cx="1457335" cy="714380"/>
+          </a:xfrm>
+          <a:prstGeom prst="rect">
+            <a:avLst/>
+          </a:prstGeom>
+        </p:spPr>
+        <p:style>
+          <a:lnRef idx="2">
+            <a:schemeClr val="accent1"/>
+          </a:lnRef>
+          <a:fillRef idx="1">
+            <a:schemeClr val="lt1"/>
+          </a:fillRef>
+          <a:effectRef idx="0">
+            <a:schemeClr val="accent1"/>
+          </a:effectRef>
+          <a:fontRef idx="minor">
+            <a:schemeClr val="dk1"/>
+          </a:fontRef>
+        </p:style>
+        <p:txBody>
+          <a:bodyPr rtlCol="0" anchor="ctr"/>
+          <a:lstStyle/>
+          <a:p>
+            <a:pPr algn="ctr"/>
+            <a:r>
+              <a:rPr lang="pt-BR" sz="1200" b="1" dirty="0" smtClean="0"/>
+              <a:t>UPInferenceEngine</a:t>
+            </a:r>
+            <a:endParaRPr lang="pt-BR" sz="1200" b="1" dirty="0"/>
+          </a:p>
+        </p:txBody>
+      </p:sp>
+      <p:sp>
+        <p:nvSpPr>
+          <p:cNvPr id="12" name="Cloud 11"/>
+          <p:cNvSpPr/>
+          <p:nvPr/>
+        </p:nvSpPr>
+        <p:spPr>
+          <a:xfrm>
+            <a:off x="4572000" y="1714488"/>
+            <a:ext cx="1143008" cy="928694"/>
+          </a:xfrm>
+          <a:prstGeom prst="cloud">
+            <a:avLst/>
+          </a:prstGeom>
+        </p:spPr>
+        <p:style>
+          <a:lnRef idx="2">
+            <a:schemeClr val="accent1">
+              <a:shade val="50000"/>
+            </a:schemeClr>
+          </a:lnRef>
+          <a:fillRef idx="1">
+            <a:schemeClr val="accent1"/>
+          </a:fillRef>
+          <a:effectRef idx="0">
+            <a:schemeClr val="accent1"/>
+          </a:effectRef>
+          <a:fontRef idx="minor">
+            <a:schemeClr val="lt1"/>
+          </a:fontRef>
+        </p:style>
+        <p:txBody>
+          <a:bodyPr rtlCol="0" anchor="ctr"/>
+          <a:lstStyle/>
+          <a:p>
+            <a:pPr algn="ctr"/>
+            <a:r>
+              <a:rPr lang="pt-BR" sz="1200" b="1" dirty="0" smtClean="0"/>
+              <a:t>Internet</a:t>
+            </a:r>
+            <a:endParaRPr lang="pt-BR" sz="1200" b="1" dirty="0"/>
+          </a:p>
+        </p:txBody>
+      </p:sp>
+      <p:sp>
+        <p:nvSpPr>
+          <p:cNvPr id="13" name="Flowchart: Magnetic Disk 12"/>
+          <p:cNvSpPr/>
+          <p:nvPr/>
+        </p:nvSpPr>
+        <p:spPr>
+          <a:xfrm>
+            <a:off x="4857752" y="4857760"/>
+            <a:ext cx="871544" cy="857256"/>
+          </a:xfrm>
+          <a:prstGeom prst="flowChartMagneticDisk">
+            <a:avLst/>
+          </a:prstGeom>
+        </p:spPr>
+        <p:style>
+          <a:lnRef idx="2">
+            <a:schemeClr val="accent1"/>
+          </a:lnRef>
+          <a:fillRef idx="1">
+            <a:schemeClr val="lt1"/>
+          </a:fillRef>
+          <a:effectRef idx="0">
+            <a:schemeClr val="accent1"/>
+          </a:effectRef>
+          <a:fontRef idx="minor">
+            <a:schemeClr val="dk1"/>
+          </a:fontRef>
+        </p:style>
+        <p:txBody>
+          <a:bodyPr rtlCol="0" anchor="ctr"/>
+          <a:lstStyle/>
+          <a:p>
+            <a:pPr algn="ctr"/>
+            <a:r>
+              <a:rPr lang="pt-BR" sz="1200" b="1" dirty="0" smtClean="0"/>
+              <a:t>CacheDB</a:t>
+            </a:r>
+            <a:endParaRPr lang="pt-BR" sz="1200" b="1" dirty="0"/>
+          </a:p>
+        </p:txBody>
+      </p:sp>
+      <p:sp>
+        <p:nvSpPr>
+          <p:cNvPr id="14" name="Flowchart: Magnetic Disk 13"/>
+          <p:cNvSpPr/>
+          <p:nvPr/>
+        </p:nvSpPr>
+        <p:spPr>
+          <a:xfrm>
+            <a:off x="8215338" y="4429132"/>
+            <a:ext cx="728668" cy="857256"/>
+          </a:xfrm>
+          <a:prstGeom prst="flowChartMagneticDisk">
+            <a:avLst/>
+          </a:prstGeom>
+        </p:spPr>
+        <p:style>
+          <a:lnRef idx="2">
+            <a:schemeClr val="accent1"/>
+          </a:lnRef>
+          <a:fillRef idx="1">
+            <a:schemeClr val="lt1"/>
+          </a:fillRef>
+          <a:effectRef idx="0">
+            <a:schemeClr val="accent1"/>
+          </a:effectRef>
+          <a:fontRef idx="minor">
+            <a:schemeClr val="dk1"/>
+          </a:fontRef>
+        </p:style>
+        <p:txBody>
+          <a:bodyPr rtlCol="0" anchor="ctr"/>
+          <a:lstStyle/>
+          <a:p>
+            <a:pPr algn="ctr"/>
+            <a:r>
+              <a:rPr lang="pt-BR" sz="1200" b="1" dirty="0" smtClean="0"/>
+              <a:t>TrailsDB</a:t>
+            </a:r>
+            <a:endParaRPr lang="pt-BR" sz="1200" b="1" dirty="0"/>
+          </a:p>
+        </p:txBody>
+      </p:sp>
+      <p:sp>
+        <p:nvSpPr>
+          <p:cNvPr id="15" name="Flowchart: Magnetic Disk 14"/>
+          <p:cNvSpPr/>
+          <p:nvPr/>
+        </p:nvSpPr>
+        <p:spPr>
+          <a:xfrm>
+            <a:off x="8143900" y="2643182"/>
+            <a:ext cx="728668" cy="857256"/>
+          </a:xfrm>
+          <a:prstGeom prst="flowChartMagneticDisk">
+            <a:avLst/>
+          </a:prstGeom>
+        </p:spPr>
+        <p:style>
+          <a:lnRef idx="2">
+            <a:schemeClr val="accent1"/>
+          </a:lnRef>
+          <a:fillRef idx="1">
+            <a:schemeClr val="lt1"/>
+          </a:fillRef>
+          <a:effectRef idx="0">
+            <a:schemeClr val="accent1"/>
+          </a:effectRef>
+          <a:fontRef idx="minor">
+            <a:schemeClr val="dk1"/>
+          </a:fontRef>
+        </p:style>
+        <p:txBody>
+          <a:bodyPr rtlCol="0" anchor="ctr"/>
+          <a:lstStyle/>
+          <a:p>
+            <a:pPr algn="ctr"/>
+            <a:r>
+              <a:rPr lang="pt-BR" sz="1200" b="1" dirty="0" smtClean="0"/>
+              <a:t>UserDB</a:t>
+            </a:r>
+            <a:endParaRPr lang="pt-BR" sz="1200" b="1" dirty="0"/>
+          </a:p>
+        </p:txBody>
+      </p:sp>
+      <p:sp>
+        <p:nvSpPr>
+          <p:cNvPr id="16" name="Rectangle 15"/>
+          <p:cNvSpPr/>
+          <p:nvPr/>
+        </p:nvSpPr>
+        <p:spPr>
+          <a:xfrm>
+            <a:off x="4429124" y="3643314"/>
+            <a:ext cx="1500198" cy="714380"/>
+          </a:xfrm>
+          <a:prstGeom prst="rect">
+            <a:avLst/>
+          </a:prstGeom>
+        </p:spPr>
+        <p:style>
+          <a:lnRef idx="2">
+            <a:schemeClr val="accent1"/>
+          </a:lnRef>
+          <a:fillRef idx="1">
+            <a:schemeClr val="lt1"/>
+          </a:fillRef>
+          <a:effectRef idx="0">
+            <a:schemeClr val="accent1"/>
+          </a:effectRef>
+          <a:fontRef idx="minor">
+            <a:schemeClr val="dk1"/>
+          </a:fontRef>
+        </p:style>
+        <p:txBody>
+          <a:bodyPr rtlCol="0" anchor="ctr"/>
+          <a:lstStyle/>
+          <a:p>
+            <a:pPr algn="ctr"/>
+            <a:r>
+              <a:rPr lang="pt-BR" sz="1200" b="1" dirty="0" smtClean="0"/>
+              <a:t>UPRemoteExecution</a:t>
+            </a:r>
+            <a:endParaRPr lang="pt-BR" sz="1200" b="1" dirty="0"/>
+          </a:p>
+        </p:txBody>
+      </p:sp>
+      <p:cxnSp>
+        <p:nvCxnSpPr>
+          <p:cNvPr id="17" name="Straight Arrow Connector 16"/>
+          <p:cNvCxnSpPr>
+            <a:stCxn id="12" idx="0"/>
+            <a:endCxn id="5" idx="1"/>
+          </p:cNvCxnSpPr>
+          <p:nvPr/>
+        </p:nvCxnSpPr>
+        <p:spPr>
+          <a:xfrm flipV="1">
+            <a:off x="5714055" y="2143116"/>
+            <a:ext cx="615319" cy="35719"/>
+          </a:xfrm>
+          <a:prstGeom prst="straightConnector1">
+            <a:avLst/>
+          </a:prstGeom>
+          <a:ln>
+            <a:headEnd type="arrow"/>
+            <a:tailEnd type="arrow"/>
+          </a:ln>
+        </p:spPr>
+        <p:style>
+          <a:lnRef idx="2">
+            <a:schemeClr val="accent1"/>
+          </a:lnRef>
+          <a:fillRef idx="1">
+            <a:schemeClr val="lt1"/>
+          </a:fillRef>
+          <a:effectRef idx="0">
+            <a:schemeClr val="accent1"/>
+          </a:effectRef>
+          <a:fontRef idx="minor">
+            <a:schemeClr val="dk1"/>
+          </a:fontRef>
+        </p:style>
+      </p:cxnSp>
+      <p:cxnSp>
+        <p:nvCxnSpPr>
+          <p:cNvPr id="18" name="Straight Arrow Connector 17"/>
+          <p:cNvCxnSpPr>
+            <a:stCxn id="16" idx="0"/>
+            <a:endCxn id="12" idx="1"/>
+          </p:cNvCxnSpPr>
+          <p:nvPr/>
+        </p:nvCxnSpPr>
+        <p:spPr>
+          <a:xfrm rot="16200000" flipV="1">
+            <a:off x="4660804" y="3124894"/>
+            <a:ext cx="1001121" cy="35719"/>
+          </a:xfrm>
+          <a:prstGeom prst="straightConnector1">
+            <a:avLst/>
+          </a:prstGeom>
+          <a:ln>
+            <a:headEnd type="arrow"/>
+            <a:tailEnd type="arrow"/>
+          </a:ln>
+        </p:spPr>
+        <p:style>
+          <a:lnRef idx="2">
+            <a:schemeClr val="accent1"/>
+          </a:lnRef>
+          <a:fillRef idx="1">
+            <a:schemeClr val="lt1"/>
+          </a:fillRef>
+          <a:effectRef idx="0">
+            <a:schemeClr val="accent1"/>
+          </a:effectRef>
+          <a:fontRef idx="minor">
+            <a:schemeClr val="dk1"/>
+          </a:fontRef>
+        </p:style>
+      </p:cxnSp>
+      <p:cxnSp>
+        <p:nvCxnSpPr>
+          <p:cNvPr id="19" name="Straight Arrow Connector 18"/>
+          <p:cNvCxnSpPr>
+            <a:stCxn id="16" idx="3"/>
+            <a:endCxn id="9" idx="1"/>
+          </p:cNvCxnSpPr>
+          <p:nvPr/>
+        </p:nvCxnSpPr>
+        <p:spPr>
+          <a:xfrm>
+            <a:off x="5929322" y="4000504"/>
+            <a:ext cx="400052" cy="1588"/>
+          </a:xfrm>
+          <a:prstGeom prst="straightConnector1">
+            <a:avLst/>
+          </a:prstGeom>
+          <a:ln>
+            <a:headEnd type="arrow"/>
+            <a:tailEnd type="arrow"/>
+          </a:ln>
+        </p:spPr>
+        <p:style>
+          <a:lnRef idx="2">
+            <a:schemeClr val="accent1"/>
+          </a:lnRef>
+          <a:fillRef idx="1">
+            <a:schemeClr val="lt1"/>
+          </a:fillRef>
+          <a:effectRef idx="0">
+            <a:schemeClr val="accent1"/>
+          </a:effectRef>
+          <a:fontRef idx="minor">
+            <a:schemeClr val="dk1"/>
+          </a:fontRef>
+        </p:style>
+      </p:cxnSp>
+      <p:cxnSp>
+        <p:nvCxnSpPr>
+          <p:cNvPr id="20" name="Straight Arrow Connector 19"/>
+          <p:cNvCxnSpPr>
+            <a:stCxn id="13" idx="4"/>
+            <a:endCxn id="10" idx="1"/>
+          </p:cNvCxnSpPr>
+          <p:nvPr/>
+        </p:nvCxnSpPr>
+        <p:spPr>
+          <a:xfrm flipV="1">
+            <a:off x="5729296" y="4929198"/>
+            <a:ext cx="600078" cy="357190"/>
+          </a:xfrm>
+          <a:prstGeom prst="straightConnector1">
+            <a:avLst/>
+          </a:prstGeom>
+          <a:ln>
+            <a:headEnd type="arrow"/>
+            <a:tailEnd type="arrow"/>
+          </a:ln>
+        </p:spPr>
+        <p:style>
+          <a:lnRef idx="2">
+            <a:schemeClr val="accent1"/>
+          </a:lnRef>
+          <a:fillRef idx="1">
+            <a:schemeClr val="lt1"/>
+          </a:fillRef>
+          <a:effectRef idx="0">
+            <a:schemeClr val="accent1"/>
+          </a:effectRef>
+          <a:fontRef idx="minor">
+            <a:schemeClr val="dk1"/>
+          </a:fontRef>
+        </p:style>
+      </p:cxnSp>
+      <p:cxnSp>
+        <p:nvCxnSpPr>
+          <p:cNvPr id="21" name="Straight Arrow Connector 20"/>
+          <p:cNvCxnSpPr>
+            <a:stCxn id="8" idx="3"/>
+            <a:endCxn id="15" idx="2"/>
+          </p:cNvCxnSpPr>
+          <p:nvPr/>
+        </p:nvCxnSpPr>
+        <p:spPr>
+          <a:xfrm>
+            <a:off x="7786709" y="3071810"/>
+            <a:ext cx="357191" cy="1588"/>
+          </a:xfrm>
+          <a:prstGeom prst="straightConnector1">
+            <a:avLst/>
+          </a:prstGeom>
+          <a:ln>
+            <a:headEnd type="arrow"/>
+            <a:tailEnd type="arrow"/>
+          </a:ln>
+        </p:spPr>
+        <p:style>
+          <a:lnRef idx="2">
+            <a:schemeClr val="accent1"/>
+          </a:lnRef>
+          <a:fillRef idx="1">
+            <a:schemeClr val="lt1"/>
+          </a:fillRef>
+          <a:effectRef idx="0">
+            <a:schemeClr val="accent1"/>
+          </a:effectRef>
+          <a:fontRef idx="minor">
+            <a:schemeClr val="dk1"/>
+          </a:fontRef>
+        </p:style>
+      </p:cxnSp>
+      <p:cxnSp>
+        <p:nvCxnSpPr>
+          <p:cNvPr id="22" name="Straight Arrow Connector 21"/>
+          <p:cNvCxnSpPr>
+            <a:stCxn id="9" idx="3"/>
+            <a:endCxn id="14" idx="2"/>
+          </p:cNvCxnSpPr>
+          <p:nvPr/>
+        </p:nvCxnSpPr>
+        <p:spPr>
+          <a:xfrm>
+            <a:off x="7786709" y="4000504"/>
+            <a:ext cx="428629" cy="857256"/>
+          </a:xfrm>
+          <a:prstGeom prst="straightConnector1">
+            <a:avLst/>
+          </a:prstGeom>
+          <a:ln>
+            <a:headEnd type="arrow"/>
+            <a:tailEnd type="arrow"/>
+          </a:ln>
+        </p:spPr>
+        <p:style>
+          <a:lnRef idx="2">
+            <a:schemeClr val="accent1"/>
+          </a:lnRef>
+          <a:fillRef idx="1">
+            <a:schemeClr val="lt1"/>
+          </a:fillRef>
+          <a:effectRef idx="0">
+            <a:schemeClr val="accent1"/>
+          </a:effectRef>
+          <a:fontRef idx="minor">
+            <a:schemeClr val="dk1"/>
+          </a:fontRef>
+        </p:style>
+      </p:cxnSp>
+      <p:cxnSp>
+        <p:nvCxnSpPr>
+          <p:cNvPr id="23" name="Straight Arrow Connector 22"/>
+          <p:cNvCxnSpPr>
+            <a:stCxn id="14" idx="2"/>
+            <a:endCxn id="11" idx="3"/>
+          </p:cNvCxnSpPr>
+          <p:nvPr/>
+        </p:nvCxnSpPr>
+        <p:spPr>
+          <a:xfrm rot="10800000" flipV="1">
+            <a:off x="7786710" y="4857760"/>
+            <a:ext cx="428629" cy="1000132"/>
+          </a:xfrm>
+          <a:prstGeom prst="straightConnector1">
+            <a:avLst/>
+          </a:prstGeom>
+          <a:ln>
+            <a:headEnd type="arrow"/>
+            <a:tailEnd type="arrow"/>
+          </a:ln>
+        </p:spPr>
+        <p:style>
+          <a:lnRef idx="2">
+            <a:schemeClr val="accent1"/>
+          </a:lnRef>
+          <a:fillRef idx="1">
+            <a:schemeClr val="lt1"/>
+          </a:fillRef>
+          <a:effectRef idx="0">
+            <a:schemeClr val="accent1"/>
+          </a:effectRef>
+          <a:fontRef idx="minor">
+            <a:schemeClr val="dk1"/>
+          </a:fontRef>
+        </p:style>
+      </p:cxnSp>
+      <p:cxnSp>
+        <p:nvCxnSpPr>
+          <p:cNvPr id="24" name="Straight Arrow Connector 23"/>
+          <p:cNvCxnSpPr>
+            <a:stCxn id="5" idx="2"/>
+            <a:endCxn id="8" idx="0"/>
+          </p:cNvCxnSpPr>
+          <p:nvPr/>
+        </p:nvCxnSpPr>
+        <p:spPr>
+          <a:xfrm rot="5400000">
+            <a:off x="6950885" y="2607463"/>
+            <a:ext cx="214314" cy="1588"/>
+          </a:xfrm>
+          <a:prstGeom prst="straightConnector1">
+            <a:avLst/>
+          </a:prstGeom>
+          <a:ln>
+            <a:headEnd type="arrow"/>
+            <a:tailEnd type="arrow"/>
+          </a:ln>
+        </p:spPr>
+        <p:style>
+          <a:lnRef idx="1">
+            <a:schemeClr val="accent1"/>
+          </a:lnRef>
+          <a:fillRef idx="0">
+            <a:schemeClr val="accent1"/>
+          </a:fillRef>
+          <a:effectRef idx="0">
+            <a:schemeClr val="accent1"/>
+          </a:effectRef>
+          <a:fontRef idx="minor">
+            <a:schemeClr val="tx1"/>
+          </a:fontRef>
+        </p:style>
+      </p:cxnSp>
+      <p:cxnSp>
+        <p:nvCxnSpPr>
+          <p:cNvPr id="25" name="Straight Arrow Connector 24"/>
+          <p:cNvCxnSpPr>
+            <a:stCxn id="8" idx="2"/>
+            <a:endCxn id="9" idx="0"/>
+          </p:cNvCxnSpPr>
+          <p:nvPr/>
+        </p:nvCxnSpPr>
+        <p:spPr>
+          <a:xfrm rot="5400000">
+            <a:off x="6950885" y="3536157"/>
+            <a:ext cx="214314" cy="1588"/>
+          </a:xfrm>
+          <a:prstGeom prst="straightConnector1">
+            <a:avLst/>
+          </a:prstGeom>
+          <a:ln>
+            <a:headEnd type="arrow"/>
+            <a:tailEnd type="arrow"/>
+          </a:ln>
+        </p:spPr>
+        <p:style>
+          <a:lnRef idx="1">
+            <a:schemeClr val="accent1"/>
+          </a:lnRef>
+          <a:fillRef idx="0">
+            <a:schemeClr val="accent1"/>
+          </a:fillRef>
+          <a:effectRef idx="0">
+            <a:schemeClr val="accent1"/>
+          </a:effectRef>
+          <a:fontRef idx="minor">
+            <a:schemeClr val="tx1"/>
+          </a:fontRef>
+        </p:style>
+      </p:cxnSp>
+      <p:cxnSp>
+        <p:nvCxnSpPr>
+          <p:cNvPr id="26" name="Straight Arrow Connector 25"/>
+          <p:cNvCxnSpPr>
+            <a:stCxn id="9" idx="2"/>
+            <a:endCxn id="10" idx="0"/>
+          </p:cNvCxnSpPr>
+          <p:nvPr/>
+        </p:nvCxnSpPr>
+        <p:spPr>
+          <a:xfrm rot="5400000">
+            <a:off x="6950885" y="4464851"/>
+            <a:ext cx="214314" cy="1588"/>
+          </a:xfrm>
+          <a:prstGeom prst="straightConnector1">
+            <a:avLst/>
+          </a:prstGeom>
+          <a:ln>
+            <a:headEnd type="arrow"/>
+            <a:tailEnd type="arrow"/>
+          </a:ln>
+        </p:spPr>
+        <p:style>
+          <a:lnRef idx="1">
+            <a:schemeClr val="accent1"/>
+          </a:lnRef>
+          <a:fillRef idx="0">
+            <a:schemeClr val="accent1"/>
+          </a:fillRef>
+          <a:effectRef idx="0">
+            <a:schemeClr val="accent1"/>
+          </a:effectRef>
+          <a:fontRef idx="minor">
+            <a:schemeClr val="tx1"/>
+          </a:fontRef>
+        </p:style>
+      </p:cxnSp>
+      <p:cxnSp>
+        <p:nvCxnSpPr>
+          <p:cNvPr id="27" name="Straight Arrow Connector 26"/>
+          <p:cNvCxnSpPr>
+            <a:stCxn id="10" idx="2"/>
+            <a:endCxn id="11" idx="0"/>
+          </p:cNvCxnSpPr>
+          <p:nvPr/>
+        </p:nvCxnSpPr>
+        <p:spPr>
+          <a:xfrm rot="5400000">
+            <a:off x="6950885" y="5393545"/>
+            <a:ext cx="214314" cy="1588"/>
+          </a:xfrm>
+          <a:prstGeom prst="straightConnector1">
+            <a:avLst/>
+          </a:prstGeom>
+          <a:ln>
+            <a:headEnd type="arrow"/>
+            <a:tailEnd type="arrow"/>
+          </a:ln>
+        </p:spPr>
+        <p:style>
+          <a:lnRef idx="1">
+            <a:schemeClr val="accent1"/>
+          </a:lnRef>
+          <a:fillRef idx="0">
+            <a:schemeClr val="accent1"/>
+          </a:fillRef>
+          <a:effectRef idx="0">
+            <a:schemeClr val="accent1"/>
+          </a:effectRef>
+          <a:fontRef idx="minor">
+            <a:schemeClr val="tx1"/>
+          </a:fontRef>
+        </p:style>
+      </p:cxnSp>
     </p:spTree>
   </p:cSld>
   <p:clrMapOvr>
     <a:masterClrMapping/>
   </p:clrMapOvr>
+  <p:timing>
+    <p:tnLst>
+      <p:par>
+        <p:cTn id="1" dur="indefinite" restart="never" nodeType="tmRoot"/>
+      </p:par>
+    </p:tnLst>
+  </p:timing>
 </p:sld>
 </file>
 
@@ -4565,7 +10523,7 @@
           <a:p>
             <a:r>
               <a:rPr lang="pt-BR" dirty="0" err="1" smtClean="0"/>
-              <a:t>UPServices</a:t>
+              <a:t>UPAuthentication</a:t>
             </a:r>
             <a:endParaRPr lang="pt-BR" dirty="0"/>
           </a:p>
@@ -4588,23 +10546,23 @@
           <a:p>
             <a:r>
               <a:rPr lang="pt-BR" dirty="0" smtClean="0"/>
-              <a:t>Acessa BD de trilhas</a:t>
-            </a:r>
-          </a:p>
-          <a:p>
-            <a:r>
-              <a:rPr lang="pt-BR" dirty="0" smtClean="0"/>
-              <a:t>Processa requisições de registro e solicitações de trilhas</a:t>
-            </a:r>
-          </a:p>
-          <a:p>
-            <a:r>
-              <a:rPr lang="pt-BR" dirty="0" smtClean="0"/>
-              <a:t>Armazena os</a:t>
+              <a:t>Autentica</a:t>
             </a:r>
             <a:r>
               <a:rPr lang="pt-BR" baseline="0" dirty="0" smtClean="0"/>
-              <a:t> dados</a:t>
+              <a:t> cliente e usuário</a:t>
+            </a:r>
+          </a:p>
+          <a:p>
+            <a:r>
+              <a:rPr lang="pt-BR" baseline="0" dirty="0" smtClean="0"/>
+              <a:t>Verifica credenciais e barra comunicação</a:t>
+            </a:r>
+          </a:p>
+          <a:p>
+            <a:r>
+              <a:rPr lang="pt-BR" baseline="0" dirty="0" smtClean="0"/>
+              <a:t>Módulo não implementado para este trabalho</a:t>
             </a:r>
             <a:endParaRPr lang="pt-BR" dirty="0"/>
           </a:p>
@@ -4612,28 +10570,847 @@
       </p:sp>
       <p:sp>
         <p:nvSpPr>
-          <p:cNvPr id="5" name="Content Placeholder 4"/>
-          <p:cNvSpPr>
-            <a:spLocks noGrp="1"/>
-          </p:cNvSpPr>
-          <p:nvPr>
-            <p:ph sz="half" idx="2"/>
-          </p:nvPr>
-        </p:nvSpPr>
-        <p:spPr/>
-        <p:txBody>
-          <a:bodyPr/>
-          <a:lstStyle/>
-          <a:p>
-            <a:endParaRPr lang="pt-BR"/>
-          </a:p>
-        </p:txBody>
-      </p:sp>
+          <p:cNvPr id="6" name="Rectangle 5"/>
+          <p:cNvSpPr/>
+          <p:nvPr/>
+        </p:nvSpPr>
+        <p:spPr>
+          <a:xfrm>
+            <a:off x="6329374" y="1785926"/>
+            <a:ext cx="1457335" cy="714380"/>
+          </a:xfrm>
+          <a:prstGeom prst="rect">
+            <a:avLst/>
+          </a:prstGeom>
+        </p:spPr>
+        <p:style>
+          <a:lnRef idx="2">
+            <a:schemeClr val="accent1"/>
+          </a:lnRef>
+          <a:fillRef idx="1">
+            <a:schemeClr val="lt1"/>
+          </a:fillRef>
+          <a:effectRef idx="0">
+            <a:schemeClr val="accent1"/>
+          </a:effectRef>
+          <a:fontRef idx="minor">
+            <a:schemeClr val="dk1"/>
+          </a:fontRef>
+        </p:style>
+        <p:txBody>
+          <a:bodyPr rtlCol="0" anchor="ctr"/>
+          <a:lstStyle/>
+          <a:p>
+            <a:pPr algn="ctr"/>
+            <a:r>
+              <a:rPr lang="pt-BR" sz="1200" b="1" dirty="0" smtClean="0"/>
+              <a:t>UPCommunication</a:t>
+            </a:r>
+            <a:endParaRPr lang="pt-BR" sz="1200" b="1" dirty="0"/>
+          </a:p>
+        </p:txBody>
+      </p:sp>
+      <p:sp>
+        <p:nvSpPr>
+          <p:cNvPr id="7" name="Rectangle 6"/>
+          <p:cNvSpPr/>
+          <p:nvPr/>
+        </p:nvSpPr>
+        <p:spPr>
+          <a:xfrm>
+            <a:off x="6329374" y="2714620"/>
+            <a:ext cx="1457335" cy="714380"/>
+          </a:xfrm>
+          <a:prstGeom prst="rect">
+            <a:avLst/>
+          </a:prstGeom>
+        </p:spPr>
+        <p:style>
+          <a:lnRef idx="2">
+            <a:schemeClr val="accent1">
+              <a:shade val="50000"/>
+            </a:schemeClr>
+          </a:lnRef>
+          <a:fillRef idx="1">
+            <a:schemeClr val="accent1"/>
+          </a:fillRef>
+          <a:effectRef idx="0">
+            <a:schemeClr val="accent1"/>
+          </a:effectRef>
+          <a:fontRef idx="minor">
+            <a:schemeClr val="lt1"/>
+          </a:fontRef>
+        </p:style>
+        <p:txBody>
+          <a:bodyPr rtlCol="0" anchor="ctr"/>
+          <a:lstStyle/>
+          <a:p>
+            <a:pPr algn="ctr"/>
+            <a:r>
+              <a:rPr lang="pt-BR" sz="1200" b="1" dirty="0" smtClean="0"/>
+              <a:t>UPAuthentication</a:t>
+            </a:r>
+            <a:endParaRPr lang="pt-BR" sz="1200" b="1" dirty="0"/>
+          </a:p>
+        </p:txBody>
+      </p:sp>
+      <p:sp>
+        <p:nvSpPr>
+          <p:cNvPr id="8" name="Rectangle 7"/>
+          <p:cNvSpPr/>
+          <p:nvPr/>
+        </p:nvSpPr>
+        <p:spPr>
+          <a:xfrm>
+            <a:off x="6329374" y="3643314"/>
+            <a:ext cx="1457335" cy="714380"/>
+          </a:xfrm>
+          <a:prstGeom prst="rect">
+            <a:avLst/>
+          </a:prstGeom>
+        </p:spPr>
+        <p:style>
+          <a:lnRef idx="2">
+            <a:schemeClr val="accent1"/>
+          </a:lnRef>
+          <a:fillRef idx="1">
+            <a:schemeClr val="lt1"/>
+          </a:fillRef>
+          <a:effectRef idx="0">
+            <a:schemeClr val="accent1"/>
+          </a:effectRef>
+          <a:fontRef idx="minor">
+            <a:schemeClr val="dk1"/>
+          </a:fontRef>
+        </p:style>
+        <p:txBody>
+          <a:bodyPr rtlCol="0" anchor="ctr"/>
+          <a:lstStyle/>
+          <a:p>
+            <a:pPr algn="ctr"/>
+            <a:r>
+              <a:rPr lang="pt-BR" sz="1200" b="1" dirty="0" smtClean="0"/>
+              <a:t>UPServices</a:t>
+            </a:r>
+            <a:endParaRPr lang="pt-BR" sz="1200" b="1" dirty="0"/>
+          </a:p>
+        </p:txBody>
+      </p:sp>
+      <p:sp>
+        <p:nvSpPr>
+          <p:cNvPr id="9" name="Rectangle 8"/>
+          <p:cNvSpPr/>
+          <p:nvPr/>
+        </p:nvSpPr>
+        <p:spPr>
+          <a:xfrm>
+            <a:off x="6329374" y="4572008"/>
+            <a:ext cx="1457335" cy="714380"/>
+          </a:xfrm>
+          <a:prstGeom prst="rect">
+            <a:avLst/>
+          </a:prstGeom>
+        </p:spPr>
+        <p:style>
+          <a:lnRef idx="2">
+            <a:schemeClr val="accent1"/>
+          </a:lnRef>
+          <a:fillRef idx="1">
+            <a:schemeClr val="lt1"/>
+          </a:fillRef>
+          <a:effectRef idx="0">
+            <a:schemeClr val="accent1"/>
+          </a:effectRef>
+          <a:fontRef idx="minor">
+            <a:schemeClr val="dk1"/>
+          </a:fontRef>
+        </p:style>
+        <p:txBody>
+          <a:bodyPr rtlCol="0" anchor="ctr"/>
+          <a:lstStyle/>
+          <a:p>
+            <a:pPr algn="ctr"/>
+            <a:r>
+              <a:rPr lang="pt-BR" sz="1200" b="1" dirty="0" smtClean="0"/>
+              <a:t>UPInferenceCache</a:t>
+            </a:r>
+            <a:endParaRPr lang="pt-BR" sz="1200" b="1" dirty="0"/>
+          </a:p>
+        </p:txBody>
+      </p:sp>
+      <p:sp>
+        <p:nvSpPr>
+          <p:cNvPr id="10" name="Rectangle 9"/>
+          <p:cNvSpPr/>
+          <p:nvPr/>
+        </p:nvSpPr>
+        <p:spPr>
+          <a:xfrm>
+            <a:off x="6329374" y="5500702"/>
+            <a:ext cx="1457335" cy="714380"/>
+          </a:xfrm>
+          <a:prstGeom prst="rect">
+            <a:avLst/>
+          </a:prstGeom>
+        </p:spPr>
+        <p:style>
+          <a:lnRef idx="2">
+            <a:schemeClr val="accent1"/>
+          </a:lnRef>
+          <a:fillRef idx="1">
+            <a:schemeClr val="lt1"/>
+          </a:fillRef>
+          <a:effectRef idx="0">
+            <a:schemeClr val="accent1"/>
+          </a:effectRef>
+          <a:fontRef idx="minor">
+            <a:schemeClr val="dk1"/>
+          </a:fontRef>
+        </p:style>
+        <p:txBody>
+          <a:bodyPr rtlCol="0" anchor="ctr"/>
+          <a:lstStyle/>
+          <a:p>
+            <a:pPr algn="ctr"/>
+            <a:r>
+              <a:rPr lang="pt-BR" sz="1200" b="1" dirty="0" smtClean="0"/>
+              <a:t>UPInferenceEngine</a:t>
+            </a:r>
+            <a:endParaRPr lang="pt-BR" sz="1200" b="1" dirty="0"/>
+          </a:p>
+        </p:txBody>
+      </p:sp>
+      <p:sp>
+        <p:nvSpPr>
+          <p:cNvPr id="11" name="Cloud 10"/>
+          <p:cNvSpPr/>
+          <p:nvPr/>
+        </p:nvSpPr>
+        <p:spPr>
+          <a:xfrm>
+            <a:off x="4572000" y="1714488"/>
+            <a:ext cx="1143008" cy="928694"/>
+          </a:xfrm>
+          <a:prstGeom prst="cloud">
+            <a:avLst/>
+          </a:prstGeom>
+        </p:spPr>
+        <p:style>
+          <a:lnRef idx="2">
+            <a:schemeClr val="accent1"/>
+          </a:lnRef>
+          <a:fillRef idx="1">
+            <a:schemeClr val="lt1"/>
+          </a:fillRef>
+          <a:effectRef idx="0">
+            <a:schemeClr val="accent1"/>
+          </a:effectRef>
+          <a:fontRef idx="minor">
+            <a:schemeClr val="dk1"/>
+          </a:fontRef>
+        </p:style>
+        <p:txBody>
+          <a:bodyPr rtlCol="0" anchor="ctr"/>
+          <a:lstStyle/>
+          <a:p>
+            <a:pPr algn="ctr"/>
+            <a:r>
+              <a:rPr lang="pt-BR" sz="1200" b="1" dirty="0" smtClean="0"/>
+              <a:t>Internet</a:t>
+            </a:r>
+            <a:endParaRPr lang="pt-BR" sz="1200" b="1" dirty="0"/>
+          </a:p>
+        </p:txBody>
+      </p:sp>
+      <p:sp>
+        <p:nvSpPr>
+          <p:cNvPr id="12" name="Flowchart: Magnetic Disk 11"/>
+          <p:cNvSpPr/>
+          <p:nvPr/>
+        </p:nvSpPr>
+        <p:spPr>
+          <a:xfrm>
+            <a:off x="4857752" y="4857760"/>
+            <a:ext cx="871544" cy="857256"/>
+          </a:xfrm>
+          <a:prstGeom prst="flowChartMagneticDisk">
+            <a:avLst/>
+          </a:prstGeom>
+        </p:spPr>
+        <p:style>
+          <a:lnRef idx="2">
+            <a:schemeClr val="accent1"/>
+          </a:lnRef>
+          <a:fillRef idx="1">
+            <a:schemeClr val="lt1"/>
+          </a:fillRef>
+          <a:effectRef idx="0">
+            <a:schemeClr val="accent1"/>
+          </a:effectRef>
+          <a:fontRef idx="minor">
+            <a:schemeClr val="dk1"/>
+          </a:fontRef>
+        </p:style>
+        <p:txBody>
+          <a:bodyPr rtlCol="0" anchor="ctr"/>
+          <a:lstStyle/>
+          <a:p>
+            <a:pPr algn="ctr"/>
+            <a:r>
+              <a:rPr lang="pt-BR" sz="1200" b="1" dirty="0" smtClean="0"/>
+              <a:t>CacheDB</a:t>
+            </a:r>
+            <a:endParaRPr lang="pt-BR" sz="1200" b="1" dirty="0"/>
+          </a:p>
+        </p:txBody>
+      </p:sp>
+      <p:sp>
+        <p:nvSpPr>
+          <p:cNvPr id="13" name="Flowchart: Magnetic Disk 12"/>
+          <p:cNvSpPr/>
+          <p:nvPr/>
+        </p:nvSpPr>
+        <p:spPr>
+          <a:xfrm>
+            <a:off x="8215338" y="4429132"/>
+            <a:ext cx="728668" cy="857256"/>
+          </a:xfrm>
+          <a:prstGeom prst="flowChartMagneticDisk">
+            <a:avLst/>
+          </a:prstGeom>
+        </p:spPr>
+        <p:style>
+          <a:lnRef idx="2">
+            <a:schemeClr val="accent1"/>
+          </a:lnRef>
+          <a:fillRef idx="1">
+            <a:schemeClr val="lt1"/>
+          </a:fillRef>
+          <a:effectRef idx="0">
+            <a:schemeClr val="accent1"/>
+          </a:effectRef>
+          <a:fontRef idx="minor">
+            <a:schemeClr val="dk1"/>
+          </a:fontRef>
+        </p:style>
+        <p:txBody>
+          <a:bodyPr rtlCol="0" anchor="ctr"/>
+          <a:lstStyle/>
+          <a:p>
+            <a:pPr algn="ctr"/>
+            <a:r>
+              <a:rPr lang="pt-BR" sz="1200" b="1" dirty="0" smtClean="0"/>
+              <a:t>TrailsDB</a:t>
+            </a:r>
+            <a:endParaRPr lang="pt-BR" sz="1200" b="1" dirty="0"/>
+          </a:p>
+        </p:txBody>
+      </p:sp>
+      <p:sp>
+        <p:nvSpPr>
+          <p:cNvPr id="14" name="Flowchart: Magnetic Disk 13"/>
+          <p:cNvSpPr/>
+          <p:nvPr/>
+        </p:nvSpPr>
+        <p:spPr>
+          <a:xfrm>
+            <a:off x="8143900" y="2643182"/>
+            <a:ext cx="728668" cy="857256"/>
+          </a:xfrm>
+          <a:prstGeom prst="flowChartMagneticDisk">
+            <a:avLst/>
+          </a:prstGeom>
+        </p:spPr>
+        <p:style>
+          <a:lnRef idx="2">
+            <a:schemeClr val="accent1">
+              <a:shade val="50000"/>
+            </a:schemeClr>
+          </a:lnRef>
+          <a:fillRef idx="1">
+            <a:schemeClr val="accent1"/>
+          </a:fillRef>
+          <a:effectRef idx="0">
+            <a:schemeClr val="accent1"/>
+          </a:effectRef>
+          <a:fontRef idx="minor">
+            <a:schemeClr val="lt1"/>
+          </a:fontRef>
+        </p:style>
+        <p:txBody>
+          <a:bodyPr rtlCol="0" anchor="ctr"/>
+          <a:lstStyle/>
+          <a:p>
+            <a:pPr algn="ctr"/>
+            <a:r>
+              <a:rPr lang="pt-BR" sz="1200" b="1" dirty="0" smtClean="0"/>
+              <a:t>UserDB</a:t>
+            </a:r>
+            <a:endParaRPr lang="pt-BR" sz="1200" b="1" dirty="0"/>
+          </a:p>
+        </p:txBody>
+      </p:sp>
+      <p:sp>
+        <p:nvSpPr>
+          <p:cNvPr id="15" name="Rectangle 14"/>
+          <p:cNvSpPr/>
+          <p:nvPr/>
+        </p:nvSpPr>
+        <p:spPr>
+          <a:xfrm>
+            <a:off x="4429124" y="3643314"/>
+            <a:ext cx="1500198" cy="714380"/>
+          </a:xfrm>
+          <a:prstGeom prst="rect">
+            <a:avLst/>
+          </a:prstGeom>
+        </p:spPr>
+        <p:style>
+          <a:lnRef idx="2">
+            <a:schemeClr val="accent1"/>
+          </a:lnRef>
+          <a:fillRef idx="1">
+            <a:schemeClr val="lt1"/>
+          </a:fillRef>
+          <a:effectRef idx="0">
+            <a:schemeClr val="accent1"/>
+          </a:effectRef>
+          <a:fontRef idx="minor">
+            <a:schemeClr val="dk1"/>
+          </a:fontRef>
+        </p:style>
+        <p:txBody>
+          <a:bodyPr rtlCol="0" anchor="ctr"/>
+          <a:lstStyle/>
+          <a:p>
+            <a:pPr algn="ctr"/>
+            <a:r>
+              <a:rPr lang="pt-BR" sz="1200" b="1" dirty="0" smtClean="0"/>
+              <a:t>UPRemoteExecution</a:t>
+            </a:r>
+            <a:endParaRPr lang="pt-BR" sz="1200" b="1" dirty="0"/>
+          </a:p>
+        </p:txBody>
+      </p:sp>
+      <p:cxnSp>
+        <p:nvCxnSpPr>
+          <p:cNvPr id="16" name="Straight Arrow Connector 15"/>
+          <p:cNvCxnSpPr>
+            <a:stCxn id="11" idx="0"/>
+            <a:endCxn id="6" idx="1"/>
+          </p:cNvCxnSpPr>
+          <p:nvPr/>
+        </p:nvCxnSpPr>
+        <p:spPr>
+          <a:xfrm flipV="1">
+            <a:off x="5714055" y="2143116"/>
+            <a:ext cx="615319" cy="35719"/>
+          </a:xfrm>
+          <a:prstGeom prst="straightConnector1">
+            <a:avLst/>
+          </a:prstGeom>
+          <a:ln>
+            <a:headEnd type="arrow"/>
+            <a:tailEnd type="arrow"/>
+          </a:ln>
+        </p:spPr>
+        <p:style>
+          <a:lnRef idx="2">
+            <a:schemeClr val="accent1"/>
+          </a:lnRef>
+          <a:fillRef idx="1">
+            <a:schemeClr val="lt1"/>
+          </a:fillRef>
+          <a:effectRef idx="0">
+            <a:schemeClr val="accent1"/>
+          </a:effectRef>
+          <a:fontRef idx="minor">
+            <a:schemeClr val="dk1"/>
+          </a:fontRef>
+        </p:style>
+      </p:cxnSp>
+      <p:cxnSp>
+        <p:nvCxnSpPr>
+          <p:cNvPr id="17" name="Straight Arrow Connector 16"/>
+          <p:cNvCxnSpPr>
+            <a:stCxn id="15" idx="0"/>
+            <a:endCxn id="11" idx="1"/>
+          </p:cNvCxnSpPr>
+          <p:nvPr/>
+        </p:nvCxnSpPr>
+        <p:spPr>
+          <a:xfrm rot="16200000" flipV="1">
+            <a:off x="4660804" y="3124894"/>
+            <a:ext cx="1001121" cy="35719"/>
+          </a:xfrm>
+          <a:prstGeom prst="straightConnector1">
+            <a:avLst/>
+          </a:prstGeom>
+          <a:ln>
+            <a:headEnd type="arrow"/>
+            <a:tailEnd type="arrow"/>
+          </a:ln>
+        </p:spPr>
+        <p:style>
+          <a:lnRef idx="2">
+            <a:schemeClr val="accent1"/>
+          </a:lnRef>
+          <a:fillRef idx="1">
+            <a:schemeClr val="lt1"/>
+          </a:fillRef>
+          <a:effectRef idx="0">
+            <a:schemeClr val="accent1"/>
+          </a:effectRef>
+          <a:fontRef idx="minor">
+            <a:schemeClr val="dk1"/>
+          </a:fontRef>
+        </p:style>
+      </p:cxnSp>
+      <p:cxnSp>
+        <p:nvCxnSpPr>
+          <p:cNvPr id="18" name="Straight Arrow Connector 17"/>
+          <p:cNvCxnSpPr>
+            <a:stCxn id="15" idx="3"/>
+            <a:endCxn id="8" idx="1"/>
+          </p:cNvCxnSpPr>
+          <p:nvPr/>
+        </p:nvCxnSpPr>
+        <p:spPr>
+          <a:xfrm>
+            <a:off x="5929322" y="4000504"/>
+            <a:ext cx="400052" cy="1588"/>
+          </a:xfrm>
+          <a:prstGeom prst="straightConnector1">
+            <a:avLst/>
+          </a:prstGeom>
+          <a:ln>
+            <a:headEnd type="arrow"/>
+            <a:tailEnd type="arrow"/>
+          </a:ln>
+        </p:spPr>
+        <p:style>
+          <a:lnRef idx="2">
+            <a:schemeClr val="accent1"/>
+          </a:lnRef>
+          <a:fillRef idx="1">
+            <a:schemeClr val="lt1"/>
+          </a:fillRef>
+          <a:effectRef idx="0">
+            <a:schemeClr val="accent1"/>
+          </a:effectRef>
+          <a:fontRef idx="minor">
+            <a:schemeClr val="dk1"/>
+          </a:fontRef>
+        </p:style>
+      </p:cxnSp>
+      <p:cxnSp>
+        <p:nvCxnSpPr>
+          <p:cNvPr id="19" name="Straight Arrow Connector 18"/>
+          <p:cNvCxnSpPr>
+            <a:stCxn id="12" idx="4"/>
+            <a:endCxn id="9" idx="1"/>
+          </p:cNvCxnSpPr>
+          <p:nvPr/>
+        </p:nvCxnSpPr>
+        <p:spPr>
+          <a:xfrm flipV="1">
+            <a:off x="5729296" y="4929198"/>
+            <a:ext cx="600078" cy="357190"/>
+          </a:xfrm>
+          <a:prstGeom prst="straightConnector1">
+            <a:avLst/>
+          </a:prstGeom>
+          <a:ln>
+            <a:headEnd type="arrow"/>
+            <a:tailEnd type="arrow"/>
+          </a:ln>
+        </p:spPr>
+        <p:style>
+          <a:lnRef idx="2">
+            <a:schemeClr val="accent1"/>
+          </a:lnRef>
+          <a:fillRef idx="1">
+            <a:schemeClr val="lt1"/>
+          </a:fillRef>
+          <a:effectRef idx="0">
+            <a:schemeClr val="accent1"/>
+          </a:effectRef>
+          <a:fontRef idx="minor">
+            <a:schemeClr val="dk1"/>
+          </a:fontRef>
+        </p:style>
+      </p:cxnSp>
+      <p:cxnSp>
+        <p:nvCxnSpPr>
+          <p:cNvPr id="20" name="Straight Arrow Connector 19"/>
+          <p:cNvCxnSpPr>
+            <a:stCxn id="7" idx="3"/>
+            <a:endCxn id="14" idx="2"/>
+          </p:cNvCxnSpPr>
+          <p:nvPr/>
+        </p:nvCxnSpPr>
+        <p:spPr>
+          <a:xfrm>
+            <a:off x="7786709" y="3071810"/>
+            <a:ext cx="357191" cy="1588"/>
+          </a:xfrm>
+          <a:prstGeom prst="straightConnector1">
+            <a:avLst/>
+          </a:prstGeom>
+          <a:ln>
+            <a:headEnd type="arrow"/>
+            <a:tailEnd type="arrow"/>
+          </a:ln>
+        </p:spPr>
+        <p:style>
+          <a:lnRef idx="2">
+            <a:schemeClr val="accent1"/>
+          </a:lnRef>
+          <a:fillRef idx="1">
+            <a:schemeClr val="lt1"/>
+          </a:fillRef>
+          <a:effectRef idx="0">
+            <a:schemeClr val="accent1"/>
+          </a:effectRef>
+          <a:fontRef idx="minor">
+            <a:schemeClr val="dk1"/>
+          </a:fontRef>
+        </p:style>
+      </p:cxnSp>
+      <p:cxnSp>
+        <p:nvCxnSpPr>
+          <p:cNvPr id="21" name="Straight Arrow Connector 20"/>
+          <p:cNvCxnSpPr>
+            <a:stCxn id="8" idx="3"/>
+            <a:endCxn id="13" idx="2"/>
+          </p:cNvCxnSpPr>
+          <p:nvPr/>
+        </p:nvCxnSpPr>
+        <p:spPr>
+          <a:xfrm>
+            <a:off x="7786709" y="4000504"/>
+            <a:ext cx="428629" cy="857256"/>
+          </a:xfrm>
+          <a:prstGeom prst="straightConnector1">
+            <a:avLst/>
+          </a:prstGeom>
+          <a:ln>
+            <a:headEnd type="arrow"/>
+            <a:tailEnd type="arrow"/>
+          </a:ln>
+        </p:spPr>
+        <p:style>
+          <a:lnRef idx="2">
+            <a:schemeClr val="accent1"/>
+          </a:lnRef>
+          <a:fillRef idx="1">
+            <a:schemeClr val="lt1"/>
+          </a:fillRef>
+          <a:effectRef idx="0">
+            <a:schemeClr val="accent1"/>
+          </a:effectRef>
+          <a:fontRef idx="minor">
+            <a:schemeClr val="dk1"/>
+          </a:fontRef>
+        </p:style>
+      </p:cxnSp>
+      <p:cxnSp>
+        <p:nvCxnSpPr>
+          <p:cNvPr id="22" name="Straight Arrow Connector 21"/>
+          <p:cNvCxnSpPr>
+            <a:stCxn id="13" idx="2"/>
+            <a:endCxn id="10" idx="3"/>
+          </p:cNvCxnSpPr>
+          <p:nvPr/>
+        </p:nvCxnSpPr>
+        <p:spPr>
+          <a:xfrm rot="10800000" flipV="1">
+            <a:off x="7786710" y="4857760"/>
+            <a:ext cx="428629" cy="1000132"/>
+          </a:xfrm>
+          <a:prstGeom prst="straightConnector1">
+            <a:avLst/>
+          </a:prstGeom>
+          <a:ln>
+            <a:headEnd type="arrow"/>
+            <a:tailEnd type="arrow"/>
+          </a:ln>
+        </p:spPr>
+        <p:style>
+          <a:lnRef idx="2">
+            <a:schemeClr val="accent1"/>
+          </a:lnRef>
+          <a:fillRef idx="1">
+            <a:schemeClr val="lt1"/>
+          </a:fillRef>
+          <a:effectRef idx="0">
+            <a:schemeClr val="accent1"/>
+          </a:effectRef>
+          <a:fontRef idx="minor">
+            <a:schemeClr val="dk1"/>
+          </a:fontRef>
+        </p:style>
+      </p:cxnSp>
+      <p:cxnSp>
+        <p:nvCxnSpPr>
+          <p:cNvPr id="23" name="Straight Arrow Connector 22"/>
+          <p:cNvCxnSpPr>
+            <a:stCxn id="6" idx="2"/>
+            <a:endCxn id="7" idx="0"/>
+          </p:cNvCxnSpPr>
+          <p:nvPr/>
+        </p:nvCxnSpPr>
+        <p:spPr>
+          <a:xfrm rot="5400000">
+            <a:off x="6950885" y="2607463"/>
+            <a:ext cx="214314" cy="1588"/>
+          </a:xfrm>
+          <a:prstGeom prst="straightConnector1">
+            <a:avLst/>
+          </a:prstGeom>
+          <a:ln>
+            <a:headEnd type="arrow"/>
+            <a:tailEnd type="arrow"/>
+          </a:ln>
+        </p:spPr>
+        <p:style>
+          <a:lnRef idx="1">
+            <a:schemeClr val="accent1"/>
+          </a:lnRef>
+          <a:fillRef idx="0">
+            <a:schemeClr val="accent1"/>
+          </a:fillRef>
+          <a:effectRef idx="0">
+            <a:schemeClr val="accent1"/>
+          </a:effectRef>
+          <a:fontRef idx="minor">
+            <a:schemeClr val="tx1"/>
+          </a:fontRef>
+        </p:style>
+      </p:cxnSp>
+      <p:cxnSp>
+        <p:nvCxnSpPr>
+          <p:cNvPr id="24" name="Straight Arrow Connector 23"/>
+          <p:cNvCxnSpPr>
+            <a:stCxn id="7" idx="2"/>
+            <a:endCxn id="8" idx="0"/>
+          </p:cNvCxnSpPr>
+          <p:nvPr/>
+        </p:nvCxnSpPr>
+        <p:spPr>
+          <a:xfrm rot="5400000">
+            <a:off x="6950885" y="3536157"/>
+            <a:ext cx="214314" cy="1588"/>
+          </a:xfrm>
+          <a:prstGeom prst="straightConnector1">
+            <a:avLst/>
+          </a:prstGeom>
+          <a:ln>
+            <a:headEnd type="arrow"/>
+            <a:tailEnd type="arrow"/>
+          </a:ln>
+        </p:spPr>
+        <p:style>
+          <a:lnRef idx="1">
+            <a:schemeClr val="accent1"/>
+          </a:lnRef>
+          <a:fillRef idx="0">
+            <a:schemeClr val="accent1"/>
+          </a:fillRef>
+          <a:effectRef idx="0">
+            <a:schemeClr val="accent1"/>
+          </a:effectRef>
+          <a:fontRef idx="minor">
+            <a:schemeClr val="tx1"/>
+          </a:fontRef>
+        </p:style>
+      </p:cxnSp>
+      <p:cxnSp>
+        <p:nvCxnSpPr>
+          <p:cNvPr id="25" name="Straight Arrow Connector 24"/>
+          <p:cNvCxnSpPr>
+            <a:stCxn id="8" idx="2"/>
+            <a:endCxn id="9" idx="0"/>
+          </p:cNvCxnSpPr>
+          <p:nvPr/>
+        </p:nvCxnSpPr>
+        <p:spPr>
+          <a:xfrm rot="5400000">
+            <a:off x="6950885" y="4464851"/>
+            <a:ext cx="214314" cy="1588"/>
+          </a:xfrm>
+          <a:prstGeom prst="straightConnector1">
+            <a:avLst/>
+          </a:prstGeom>
+          <a:ln>
+            <a:headEnd type="arrow"/>
+            <a:tailEnd type="arrow"/>
+          </a:ln>
+        </p:spPr>
+        <p:style>
+          <a:lnRef idx="1">
+            <a:schemeClr val="accent1"/>
+          </a:lnRef>
+          <a:fillRef idx="0">
+            <a:schemeClr val="accent1"/>
+          </a:fillRef>
+          <a:effectRef idx="0">
+            <a:schemeClr val="accent1"/>
+          </a:effectRef>
+          <a:fontRef idx="minor">
+            <a:schemeClr val="tx1"/>
+          </a:fontRef>
+        </p:style>
+      </p:cxnSp>
+      <p:cxnSp>
+        <p:nvCxnSpPr>
+          <p:cNvPr id="26" name="Straight Arrow Connector 25"/>
+          <p:cNvCxnSpPr>
+            <a:stCxn id="9" idx="2"/>
+            <a:endCxn id="10" idx="0"/>
+          </p:cNvCxnSpPr>
+          <p:nvPr/>
+        </p:nvCxnSpPr>
+        <p:spPr>
+          <a:xfrm rot="5400000">
+            <a:off x="6950885" y="5393545"/>
+            <a:ext cx="214314" cy="1588"/>
+          </a:xfrm>
+          <a:prstGeom prst="straightConnector1">
+            <a:avLst/>
+          </a:prstGeom>
+          <a:ln>
+            <a:headEnd type="arrow"/>
+            <a:tailEnd type="arrow"/>
+          </a:ln>
+        </p:spPr>
+        <p:style>
+          <a:lnRef idx="1">
+            <a:schemeClr val="accent1"/>
+          </a:lnRef>
+          <a:fillRef idx="0">
+            <a:schemeClr val="accent1"/>
+          </a:fillRef>
+          <a:effectRef idx="0">
+            <a:schemeClr val="accent1"/>
+          </a:effectRef>
+          <a:fontRef idx="minor">
+            <a:schemeClr val="tx1"/>
+          </a:fontRef>
+        </p:style>
+      </p:cxnSp>
     </p:spTree>
   </p:cSld>
   <p:clrMapOvr>
     <a:masterClrMapping/>
   </p:clrMapOvr>
+  <p:timing>
+    <p:tnLst>
+      <p:par>
+        <p:cTn id="1" dur="indefinite" restart="never" nodeType="tmRoot"/>
+      </p:par>
+    </p:tnLst>
+  </p:timing>
 </p:sld>
 </file>
 
